--- a/content/05-teaching-resources/slides/core/16-networks.pptx
+++ b/content/05-teaching-resources/slides/core/16-networks.pptx
@@ -10,11 +10,17 @@
     <p:sldId id="258" r:id="rId9"/>
     <p:sldId id="259" r:id="rId10"/>
     <p:sldId id="260" r:id="rId11"/>
-    <p:sldId id="261" r:id="rId12"/>
-    <p:sldId id="262" r:id="rId13"/>
+    <p:sldId id="261" r:id="rId13"/>
+    <p:sldId id="262" r:id="rId14"/>
     <p:sldId id="263" r:id="rId15"/>
     <p:sldId id="264" r:id="rId16"/>
     <p:sldId id="265" r:id="rId17"/>
+    <p:sldId id="266" r:id="rId18"/>
+    <p:sldId id="267" r:id="rId19"/>
+    <p:sldId id="268" r:id="rId20"/>
+    <p:sldId id="269" r:id="rId21"/>
+    <p:sldId id="270" r:id="rId22"/>
+    <p:sldId id="271" r:id="rId23"/>
   </p:sldIdLst>
   <p:sldSz cx="12191695" cy="6858000" type="screen4x3"/>
   <p:notesSz cx="6858000" cy="9144000"/>
@@ -511,7 +517,22 @@
           <a:lstStyle/>
           <a:p>
             <a:r>
-              <a:t>Give students a few minutes to answer on mini whiteboards or paper, then reveal the answers on the next slide.</a:t>
+              <a:t>Answers:</a:t>
+            </a:r>
+          </a:p>
+          <a:p>
+            <a:r>
+              <a:t>1. A private, encrypted connection across a public network.</a:t>
+            </a:r>
+          </a:p>
+          <a:p>
+            <a:r>
+              <a:t>2. The client-server model.</a:t>
+            </a:r>
+          </a:p>
+          <a:p>
+            <a:r>
+              <a:t>3. The largest WAN.</a:t>
             </a:r>
           </a:p>
         </p:txBody>
@@ -581,7 +602,22 @@
           <a:lstStyle/>
           <a:p>
             <a:r>
-              <a:t>Talk through any answers the class found difficult.</a:t>
+              <a:t>Answers:</a:t>
+            </a:r>
+          </a:p>
+          <a:p>
+            <a:r>
+              <a:t>1. Addresses, packet number and protocol.</a:t>
+            </a:r>
+          </a:p>
+          <a:p>
+            <a:r>
+              <a:t>2. Detecting damaged packets.</a:t>
+            </a:r>
+          </a:p>
+          <a:p>
+            <a:r>
+              <a:t>3. High latency causes lag.</a:t>
             </a:r>
           </a:p>
         </p:txBody>
@@ -607,6 +643,231 @@
 </file>
 
 <file path=ppt/notesSlides/notesSlide3.xml><?xml version="1.0" encoding="utf-8"?>
+<p:notes xmlns:a="http://schemas.openxmlformats.org/drawingml/2006/main" xmlns:p="http://schemas.openxmlformats.org/presentationml/2006/main" xmlns:r="http://schemas.openxmlformats.org/officeDocument/2006/relationships">
+  <p:cSld>
+    <p:spTree>
+      <p:nvGrpSpPr>
+        <p:cNvPr id="1" name=""/>
+        <p:cNvGrpSpPr/>
+        <p:nvPr/>
+      </p:nvGrpSpPr>
+      <p:grpSpPr>
+        <a:xfrm>
+          <a:off x="0" y="0"/>
+          <a:ext cx="0" cy="0"/>
+          <a:chOff x="0" y="0"/>
+          <a:chExt cx="0" cy="0"/>
+        </a:xfrm>
+      </p:grpSpPr>
+      <p:sp>
+        <p:nvSpPr>
+          <p:cNvPr id="2" name="Slide Image Placeholder 1"/>
+          <p:cNvSpPr>
+            <a:spLocks noGrp="1"/>
+          </p:cNvSpPr>
+          <p:nvPr>
+            <p:ph type="sldImg" idx="2"/>
+          </p:nvPr>
+        </p:nvSpPr>
+        <p:spPr/>
+      </p:sp>
+      <p:sp>
+        <p:nvSpPr>
+          <p:cNvPr id="3" name="Notes Placeholder 2"/>
+          <p:cNvSpPr>
+            <a:spLocks noGrp="1"/>
+          </p:cNvSpPr>
+          <p:nvPr>
+            <p:ph type="body" idx="3" sz="quarter"/>
+          </p:nvPr>
+        </p:nvSpPr>
+        <p:spPr/>
+        <p:txBody>
+          <a:bodyPr/>
+          <a:lstStyle/>
+          <a:p>
+            <a:r>
+              <a:t>Answers:</a:t>
+            </a:r>
+          </a:p>
+          <a:p>
+            <a:r>
+              <a:t>1. HTTPS.</a:t>
+            </a:r>
+          </a:p>
+          <a:p>
+            <a:r>
+              <a:t>2. Turns domain names into IP addresses.</a:t>
+            </a:r>
+          </a:p>
+          <a:p>
+            <a:r>
+              <a:t>3. SFTP is secure (encrypted).</a:t>
+            </a:r>
+          </a:p>
+        </p:txBody>
+      </p:sp>
+      <p:sp>
+        <p:nvSpPr>
+          <p:cNvPr id="4" name="Slide Number Placeholder 3"/>
+          <p:cNvSpPr>
+            <a:spLocks noGrp="1"/>
+          </p:cNvSpPr>
+          <p:nvPr>
+            <p:ph type="sldNum" idx="5" sz="quarter"/>
+          </p:nvPr>
+        </p:nvSpPr>
+        <p:spPr/>
+      </p:sp>
+    </p:spTree>
+  </p:cSld>
+  <p:clrMapOvr>
+    <a:masterClrMapping/>
+  </p:clrMapOvr>
+</p:notes>
+</file>
+
+<file path=ppt/notesSlides/notesSlide4.xml><?xml version="1.0" encoding="utf-8"?>
+<p:notes xmlns:a="http://schemas.openxmlformats.org/drawingml/2006/main" xmlns:p="http://schemas.openxmlformats.org/presentationml/2006/main" xmlns:r="http://schemas.openxmlformats.org/officeDocument/2006/relationships">
+  <p:cSld>
+    <p:spTree>
+      <p:nvGrpSpPr>
+        <p:cNvPr id="1" name=""/>
+        <p:cNvGrpSpPr/>
+        <p:nvPr/>
+      </p:nvGrpSpPr>
+      <p:grpSpPr>
+        <a:xfrm>
+          <a:off x="0" y="0"/>
+          <a:ext cx="0" cy="0"/>
+          <a:chOff x="0" y="0"/>
+          <a:chExt cx="0" cy="0"/>
+        </a:xfrm>
+      </p:grpSpPr>
+      <p:sp>
+        <p:nvSpPr>
+          <p:cNvPr id="2" name="Slide Image Placeholder 1"/>
+          <p:cNvSpPr>
+            <a:spLocks noGrp="1"/>
+          </p:cNvSpPr>
+          <p:nvPr>
+            <p:ph type="sldImg" idx="2"/>
+          </p:nvPr>
+        </p:nvSpPr>
+        <p:spPr/>
+      </p:sp>
+      <p:sp>
+        <p:nvSpPr>
+          <p:cNvPr id="3" name="Notes Placeholder 2"/>
+          <p:cNvSpPr>
+            <a:spLocks noGrp="1"/>
+          </p:cNvSpPr>
+          <p:nvPr>
+            <p:ph type="body" idx="3" sz="quarter"/>
+          </p:nvPr>
+        </p:nvSpPr>
+        <p:spPr/>
+        <p:txBody>
+          <a:bodyPr/>
+          <a:lstStyle/>
+          <a:p>
+            <a:r>
+              <a:t>Give students a few minutes to answer on mini whiteboards or paper, then reveal the answers on the next slide.</a:t>
+            </a:r>
+          </a:p>
+        </p:txBody>
+      </p:sp>
+      <p:sp>
+        <p:nvSpPr>
+          <p:cNvPr id="4" name="Slide Number Placeholder 3"/>
+          <p:cNvSpPr>
+            <a:spLocks noGrp="1"/>
+          </p:cNvSpPr>
+          <p:nvPr>
+            <p:ph type="sldNum" idx="5" sz="quarter"/>
+          </p:nvPr>
+        </p:nvSpPr>
+        <p:spPr/>
+      </p:sp>
+    </p:spTree>
+  </p:cSld>
+  <p:clrMapOvr>
+    <a:masterClrMapping/>
+  </p:clrMapOvr>
+</p:notes>
+</file>
+
+<file path=ppt/notesSlides/notesSlide5.xml><?xml version="1.0" encoding="utf-8"?>
+<p:notes xmlns:a="http://schemas.openxmlformats.org/drawingml/2006/main" xmlns:p="http://schemas.openxmlformats.org/presentationml/2006/main" xmlns:r="http://schemas.openxmlformats.org/officeDocument/2006/relationships">
+  <p:cSld>
+    <p:spTree>
+      <p:nvGrpSpPr>
+        <p:cNvPr id="1" name=""/>
+        <p:cNvGrpSpPr/>
+        <p:nvPr/>
+      </p:nvGrpSpPr>
+      <p:grpSpPr>
+        <a:xfrm>
+          <a:off x="0" y="0"/>
+          <a:ext cx="0" cy="0"/>
+          <a:chOff x="0" y="0"/>
+          <a:chExt cx="0" cy="0"/>
+        </a:xfrm>
+      </p:grpSpPr>
+      <p:sp>
+        <p:nvSpPr>
+          <p:cNvPr id="2" name="Slide Image Placeholder 1"/>
+          <p:cNvSpPr>
+            <a:spLocks noGrp="1"/>
+          </p:cNvSpPr>
+          <p:nvPr>
+            <p:ph type="sldImg" idx="2"/>
+          </p:nvPr>
+        </p:nvSpPr>
+        <p:spPr/>
+      </p:sp>
+      <p:sp>
+        <p:nvSpPr>
+          <p:cNvPr id="3" name="Notes Placeholder 2"/>
+          <p:cNvSpPr>
+            <a:spLocks noGrp="1"/>
+          </p:cNvSpPr>
+          <p:nvPr>
+            <p:ph type="body" idx="3" sz="quarter"/>
+          </p:nvPr>
+        </p:nvSpPr>
+        <p:spPr/>
+        <p:txBody>
+          <a:bodyPr/>
+          <a:lstStyle/>
+          <a:p>
+            <a:r>
+              <a:t>Talk through any answers the class found difficult.</a:t>
+            </a:r>
+          </a:p>
+        </p:txBody>
+      </p:sp>
+      <p:sp>
+        <p:nvSpPr>
+          <p:cNvPr id="4" name="Slide Number Placeholder 3"/>
+          <p:cNvSpPr>
+            <a:spLocks noGrp="1"/>
+          </p:cNvSpPr>
+          <p:nvPr>
+            <p:ph type="sldNum" idx="5" sz="quarter"/>
+          </p:nvPr>
+        </p:nvSpPr>
+        <p:spPr/>
+      </p:sp>
+    </p:spTree>
+  </p:cSld>
+  <p:clrMapOvr>
+    <a:masterClrMapping/>
+  </p:clrMapOvr>
+</p:notes>
+</file>
+
+<file path=ppt/notesSlides/notesSlide6.xml><?xml version="1.0" encoding="utf-8"?>
 <p:notes xmlns:a="http://schemas.openxmlformats.org/drawingml/2006/main" xmlns:p="http://schemas.openxmlformats.org/presentationml/2006/main" xmlns:r="http://schemas.openxmlformats.org/officeDocument/2006/relationships">
   <p:cSld>
     <p:spTree>
@@ -3982,6 +4243,3179 @@
     <p:bg>
       <p:bgPr>
         <a:solidFill>
+          <a:srgbClr val="FFFFFF"/>
+        </a:solidFill>
+        <a:effectLst/>
+      </p:bgPr>
+    </p:bg>
+    <p:spTree>
+      <p:nvGrpSpPr>
+        <p:cNvPr id="1" name=""/>
+        <p:cNvGrpSpPr/>
+        <p:nvPr/>
+      </p:nvGrpSpPr>
+      <p:grpSpPr/>
+      <p:sp>
+        <p:nvSpPr>
+          <p:cNvPr id="2" name="TextBox 1"/>
+          <p:cNvSpPr txBox="1"/>
+          <p:nvPr/>
+        </p:nvSpPr>
+        <p:spPr>
+          <a:xfrm>
+            <a:off x="548640" y="320040"/>
+            <a:ext cx="11094415" cy="274320"/>
+          </a:xfrm>
+          <a:prstGeom prst="rect">
+            <a:avLst/>
+          </a:prstGeom>
+          <a:noFill/>
+        </p:spPr>
+        <p:txBody>
+          <a:bodyPr wrap="square" anchor="t" lIns="0" rIns="0" tIns="0" bIns="0"/>
+          <a:lstStyle/>
+          <a:p>
+            <a:pPr algn="l"/>
+            <a:r>
+              <a:rPr sz="1100" b="1" i="0">
+                <a:solidFill>
+                  <a:srgbClr val="54595D"/>
+                </a:solidFill>
+                <a:latin typeface="Calibri"/>
+              </a:rPr>
+              <a:t>CORE COMPONENT  ·  Core Paper 2</a:t>
+            </a:r>
+          </a:p>
+        </p:txBody>
+      </p:sp>
+      <p:sp>
+        <p:nvSpPr>
+          <p:cNvPr id="3" name="TextBox 2"/>
+          <p:cNvSpPr txBox="1"/>
+          <p:nvPr/>
+        </p:nvSpPr>
+        <p:spPr>
+          <a:xfrm>
+            <a:off x="548640" y="566928"/>
+            <a:ext cx="11094415" cy="822960"/>
+          </a:xfrm>
+          <a:prstGeom prst="rect">
+            <a:avLst/>
+          </a:prstGeom>
+          <a:noFill/>
+        </p:spPr>
+        <p:txBody>
+          <a:bodyPr wrap="square" anchor="ctr" lIns="0" rIns="0" tIns="0" bIns="0"/>
+          <a:lstStyle/>
+          <a:p>
+            <a:pPr algn="l"/>
+            <a:r>
+              <a:rPr sz="3200" b="1" i="0">
+                <a:solidFill>
+                  <a:srgbClr val="03306E"/>
+                </a:solidFill>
+                <a:latin typeface="Cambria"/>
+              </a:rPr>
+              <a:t>Common protocols</a:t>
+            </a:r>
+          </a:p>
+        </p:txBody>
+      </p:sp>
+      <p:sp>
+        <p:nvSpPr>
+          <p:cNvPr id="4" name="TextBox 3"/>
+          <p:cNvSpPr txBox="1"/>
+          <p:nvPr/>
+        </p:nvSpPr>
+        <p:spPr>
+          <a:xfrm>
+            <a:off x="548640" y="6446520"/>
+            <a:ext cx="8229600" cy="274320"/>
+          </a:xfrm>
+          <a:prstGeom prst="rect">
+            <a:avLst/>
+          </a:prstGeom>
+          <a:noFill/>
+        </p:spPr>
+        <p:txBody>
+          <a:bodyPr wrap="square" anchor="t" lIns="0" rIns="0" tIns="0" bIns="0"/>
+          <a:lstStyle/>
+          <a:p>
+            <a:pPr algn="l"/>
+            <a:r>
+              <a:rPr sz="1000" b="0" i="0">
+                <a:solidFill>
+                  <a:srgbClr val="54595D"/>
+                </a:solidFill>
+                <a:latin typeface="Calibri"/>
+              </a:rPr>
+              <a:t>Digital Software Development T Level  ·  Networks</a:t>
+            </a:r>
+          </a:p>
+        </p:txBody>
+      </p:sp>
+      <p:sp>
+        <p:nvSpPr>
+          <p:cNvPr id="5" name="TextBox 4"/>
+          <p:cNvSpPr txBox="1"/>
+          <p:nvPr/>
+        </p:nvSpPr>
+        <p:spPr>
+          <a:xfrm>
+            <a:off x="10728655" y="6446520"/>
+            <a:ext cx="914400" cy="274320"/>
+          </a:xfrm>
+          <a:prstGeom prst="rect">
+            <a:avLst/>
+          </a:prstGeom>
+          <a:noFill/>
+        </p:spPr>
+        <p:txBody>
+          <a:bodyPr wrap="square" anchor="t" lIns="0" rIns="0" tIns="0" bIns="0"/>
+          <a:lstStyle/>
+          <a:p>
+            <a:pPr algn="r"/>
+            <a:r>
+              <a:rPr sz="1000" b="0" i="0">
+                <a:solidFill>
+                  <a:srgbClr val="54595D"/>
+                </a:solidFill>
+                <a:latin typeface="Calibri"/>
+              </a:rPr>
+              <a:t>10</a:t>
+            </a:r>
+          </a:p>
+        </p:txBody>
+      </p:sp>
+      <p:sp>
+        <p:nvSpPr>
+          <p:cNvPr id="6" name="TextBox 5"/>
+          <p:cNvSpPr txBox="1"/>
+          <p:nvPr/>
+        </p:nvSpPr>
+        <p:spPr>
+          <a:xfrm>
+            <a:off x="548640" y="1554480"/>
+            <a:ext cx="6720840" cy="4617720"/>
+          </a:xfrm>
+          <a:prstGeom prst="rect">
+            <a:avLst/>
+          </a:prstGeom>
+          <a:noFill/>
+        </p:spPr>
+        <p:txBody>
+          <a:bodyPr wrap="square" lIns="0" rIns="0" tIns="0" bIns="0">
+            <a:spAutoFit/>
+          </a:bodyPr>
+          <a:lstStyle/>
+          <a:p>
+            <a:pPr>
+              <a:spcAft>
+                <a:spcPts val="1320"/>
+              </a:spcAft>
+            </a:pPr>
+            <a:r>
+              <a:rPr sz="2200" b="0">
+                <a:solidFill>
+                  <a:srgbClr val="202122"/>
+                </a:solidFill>
+                <a:latin typeface="Calibri"/>
+              </a:rPr>
+              <a:t>HTTP transfers web pages and API requests; HTTPS encrypts them. SMTP sends email; POP downloads it; IMAP keeps it on the server and syncs. RIP and OSPF let routers share routes. FTP transfers files and SFTP does so securely. DHCP gives devices IP addresses. DNS turns domain names into IP addresses.</a:t>
+            </a:r>
+          </a:p>
+          <a:p>
+            <a:pPr>
+              <a:spcAft>
+                <a:spcPts val="1320"/>
+              </a:spcAft>
+            </a:pPr>
+            <a:r>
+              <a:rPr sz="2200" b="0">
+                <a:solidFill>
+                  <a:srgbClr val="202122"/>
+                </a:solidFill>
+                <a:latin typeface="Calibri"/>
+              </a:rPr>
+              <a:t>Developers meet HTTPS and DNS constantly: every API call looks up a name and sends an encrypted request.</a:t>
+            </a:r>
+          </a:p>
+        </p:txBody>
+      </p:sp>
+      <p:sp>
+        <p:nvSpPr>
+          <p:cNvPr id="7" name="Rounded Rectangle 6"/>
+          <p:cNvSpPr/>
+          <p:nvPr/>
+        </p:nvSpPr>
+        <p:spPr>
+          <a:xfrm>
+            <a:off x="7772400" y="1554480"/>
+            <a:ext cx="3867912" cy="4526280"/>
+          </a:xfrm>
+          <a:prstGeom prst="roundRect">
+            <a:avLst>
+              <a:gd name="adj" fmla="val 8000"/>
+            </a:avLst>
+          </a:prstGeom>
+          <a:solidFill>
+            <a:srgbClr val="03306E"/>
+          </a:solidFill>
+          <a:ln>
+            <a:noFill/>
+          </a:ln>
+          <a:effectLst/>
+        </p:spPr>
+        <p:style>
+          <a:lnRef idx="1">
+            <a:schemeClr val="accent1"/>
+          </a:lnRef>
+          <a:fillRef idx="3">
+            <a:schemeClr val="accent1"/>
+          </a:fillRef>
+          <a:effectRef idx="2">
+            <a:schemeClr val="accent1"/>
+          </a:effectRef>
+          <a:fontRef idx="minor">
+            <a:schemeClr val="lt1"/>
+          </a:fontRef>
+        </p:style>
+        <p:txBody>
+          <a:bodyPr rtlCol="0" anchor="ctr"/>
+          <a:lstStyle/>
+          <a:p/>
+        </p:txBody>
+      </p:sp>
+      <p:sp>
+        <p:nvSpPr>
+          <p:cNvPr id="8" name="Oval 7"/>
+          <p:cNvSpPr/>
+          <p:nvPr/>
+        </p:nvSpPr>
+        <p:spPr>
+          <a:xfrm>
+            <a:off x="8046720" y="1828800"/>
+            <a:ext cx="548640" cy="548640"/>
+          </a:xfrm>
+          <a:prstGeom prst="ellipse">
+            <a:avLst/>
+          </a:prstGeom>
+          <a:solidFill>
+            <a:srgbClr val="F2B705"/>
+          </a:solidFill>
+          <a:ln>
+            <a:noFill/>
+          </a:ln>
+          <a:effectLst/>
+        </p:spPr>
+        <p:style>
+          <a:lnRef idx="1">
+            <a:schemeClr val="accent1"/>
+          </a:lnRef>
+          <a:fillRef idx="3">
+            <a:schemeClr val="accent1"/>
+          </a:fillRef>
+          <a:effectRef idx="2">
+            <a:schemeClr val="accent1"/>
+          </a:effectRef>
+          <a:fontRef idx="minor">
+            <a:schemeClr val="lt1"/>
+          </a:fontRef>
+        </p:style>
+        <p:txBody>
+          <a:bodyPr rtlCol="0" anchor="ctr" lIns="0" rIns="0" tIns="0" bIns="0"/>
+          <a:lstStyle/>
+          <a:p>
+            <a:pPr algn="ctr"/>
+            <a:r>
+              <a:rPr sz="1300" b="1">
+                <a:solidFill>
+                  <a:srgbClr val="202122"/>
+                </a:solidFill>
+                <a:latin typeface="Calibri"/>
+              </a:rPr>
+              <a:t>e.g.</a:t>
+            </a:r>
+          </a:p>
+        </p:txBody>
+      </p:sp>
+      <p:sp>
+        <p:nvSpPr>
+          <p:cNvPr id="9" name="TextBox 8"/>
+          <p:cNvSpPr txBox="1"/>
+          <p:nvPr/>
+        </p:nvSpPr>
+        <p:spPr>
+          <a:xfrm>
+            <a:off x="8046720" y="2560320"/>
+            <a:ext cx="3291840" cy="365760"/>
+          </a:xfrm>
+          <a:prstGeom prst="rect">
+            <a:avLst/>
+          </a:prstGeom>
+          <a:noFill/>
+        </p:spPr>
+        <p:txBody>
+          <a:bodyPr wrap="square" anchor="t" lIns="0" rIns="0" tIns="0" bIns="0"/>
+          <a:lstStyle/>
+          <a:p>
+            <a:pPr algn="l"/>
+            <a:r>
+              <a:rPr sz="1300" b="1" i="0">
+                <a:solidFill>
+                  <a:srgbClr val="A9C8F0"/>
+                </a:solidFill>
+                <a:latin typeface="Calibri"/>
+              </a:rPr>
+              <a:t>EXAMPLE</a:t>
+            </a:r>
+          </a:p>
+        </p:txBody>
+      </p:sp>
+      <p:sp>
+        <p:nvSpPr>
+          <p:cNvPr id="10" name="TextBox 9"/>
+          <p:cNvSpPr txBox="1"/>
+          <p:nvPr/>
+        </p:nvSpPr>
+        <p:spPr>
+          <a:xfrm>
+            <a:off x="8046720" y="2971800"/>
+            <a:ext cx="3291840" cy="2971800"/>
+          </a:xfrm>
+          <a:prstGeom prst="rect">
+            <a:avLst/>
+          </a:prstGeom>
+          <a:noFill/>
+        </p:spPr>
+        <p:txBody>
+          <a:bodyPr wrap="square" anchor="t" lIns="0" rIns="0" tIns="0" bIns="0"/>
+          <a:lstStyle/>
+          <a:p>
+            <a:pPr algn="l"/>
+            <a:r>
+              <a:rPr sz="1900" b="0" i="0">
+                <a:solidFill>
+                  <a:srgbClr val="FFFFFF"/>
+                </a:solidFill>
+                <a:latin typeface="Cambria"/>
+              </a:rPr>
+              <a:t>When an app calls a weather API, DNS first finds the server's IP address, then HTTPS sends the request and receives the forecast securely.</a:t>
+            </a:r>
+          </a:p>
+        </p:txBody>
+      </p:sp>
+    </p:spTree>
+  </p:cSld>
+  <p:clrMapOvr>
+    <a:masterClrMapping/>
+  </p:clrMapOvr>
+</p:sld>
+</file>
+
+<file path=ppt/slides/slide11.xml><?xml version="1.0" encoding="utf-8"?>
+<p:sld xmlns:a="http://schemas.openxmlformats.org/drawingml/2006/main" xmlns:p="http://schemas.openxmlformats.org/presentationml/2006/main" xmlns:r="http://schemas.openxmlformats.org/officeDocument/2006/relationships">
+  <p:cSld>
+    <p:bg>
+      <p:bgPr>
+        <a:solidFill>
+          <a:srgbClr val="FFFFFF"/>
+        </a:solidFill>
+        <a:effectLst/>
+      </p:bgPr>
+    </p:bg>
+    <p:spTree>
+      <p:nvGrpSpPr>
+        <p:cNvPr id="1" name=""/>
+        <p:cNvGrpSpPr/>
+        <p:nvPr/>
+      </p:nvGrpSpPr>
+      <p:grpSpPr/>
+      <p:sp>
+        <p:nvSpPr>
+          <p:cNvPr id="2" name="TextBox 1"/>
+          <p:cNvSpPr txBox="1"/>
+          <p:nvPr/>
+        </p:nvSpPr>
+        <p:spPr>
+          <a:xfrm>
+            <a:off x="548640" y="320040"/>
+            <a:ext cx="11094415" cy="274320"/>
+          </a:xfrm>
+          <a:prstGeom prst="rect">
+            <a:avLst/>
+          </a:prstGeom>
+          <a:noFill/>
+        </p:spPr>
+        <p:txBody>
+          <a:bodyPr wrap="square" anchor="t" lIns="0" rIns="0" tIns="0" bIns="0"/>
+          <a:lstStyle/>
+          <a:p>
+            <a:pPr algn="l"/>
+            <a:r>
+              <a:rPr sz="1100" b="1" i="0">
+                <a:solidFill>
+                  <a:srgbClr val="54595D"/>
+                </a:solidFill>
+                <a:latin typeface="Calibri"/>
+              </a:rPr>
+              <a:t>CORE COMPONENT  ·  Core Paper 2</a:t>
+            </a:r>
+          </a:p>
+        </p:txBody>
+      </p:sp>
+      <p:sp>
+        <p:nvSpPr>
+          <p:cNvPr id="3" name="TextBox 2"/>
+          <p:cNvSpPr txBox="1"/>
+          <p:nvPr/>
+        </p:nvSpPr>
+        <p:spPr>
+          <a:xfrm>
+            <a:off x="548640" y="566928"/>
+            <a:ext cx="11094415" cy="822960"/>
+          </a:xfrm>
+          <a:prstGeom prst="rect">
+            <a:avLst/>
+          </a:prstGeom>
+          <a:noFill/>
+        </p:spPr>
+        <p:txBody>
+          <a:bodyPr wrap="square" anchor="ctr" lIns="0" rIns="0" tIns="0" bIns="0"/>
+          <a:lstStyle/>
+          <a:p>
+            <a:pPr algn="l"/>
+            <a:r>
+              <a:rPr sz="3200" b="1" i="0">
+                <a:solidFill>
+                  <a:srgbClr val="03306E"/>
+                </a:solidFill>
+                <a:latin typeface="Cambria"/>
+              </a:rPr>
+              <a:t>Common protocols</a:t>
+            </a:r>
+          </a:p>
+        </p:txBody>
+      </p:sp>
+      <p:sp>
+        <p:nvSpPr>
+          <p:cNvPr id="4" name="TextBox 3"/>
+          <p:cNvSpPr txBox="1"/>
+          <p:nvPr/>
+        </p:nvSpPr>
+        <p:spPr>
+          <a:xfrm>
+            <a:off x="548640" y="6446520"/>
+            <a:ext cx="8229600" cy="274320"/>
+          </a:xfrm>
+          <a:prstGeom prst="rect">
+            <a:avLst/>
+          </a:prstGeom>
+          <a:noFill/>
+        </p:spPr>
+        <p:txBody>
+          <a:bodyPr wrap="square" anchor="t" lIns="0" rIns="0" tIns="0" bIns="0"/>
+          <a:lstStyle/>
+          <a:p>
+            <a:pPr algn="l"/>
+            <a:r>
+              <a:rPr sz="1000" b="0" i="0">
+                <a:solidFill>
+                  <a:srgbClr val="54595D"/>
+                </a:solidFill>
+                <a:latin typeface="Calibri"/>
+              </a:rPr>
+              <a:t>Digital Software Development T Level  ·  Networks</a:t>
+            </a:r>
+          </a:p>
+        </p:txBody>
+      </p:sp>
+      <p:sp>
+        <p:nvSpPr>
+          <p:cNvPr id="5" name="TextBox 4"/>
+          <p:cNvSpPr txBox="1"/>
+          <p:nvPr/>
+        </p:nvSpPr>
+        <p:spPr>
+          <a:xfrm>
+            <a:off x="10728655" y="6446520"/>
+            <a:ext cx="914400" cy="274320"/>
+          </a:xfrm>
+          <a:prstGeom prst="rect">
+            <a:avLst/>
+          </a:prstGeom>
+          <a:noFill/>
+        </p:spPr>
+        <p:txBody>
+          <a:bodyPr wrap="square" anchor="t" lIns="0" rIns="0" tIns="0" bIns="0"/>
+          <a:lstStyle/>
+          <a:p>
+            <a:pPr algn="r"/>
+            <a:r>
+              <a:rPr sz="1000" b="0" i="0">
+                <a:solidFill>
+                  <a:srgbClr val="54595D"/>
+                </a:solidFill>
+                <a:latin typeface="Calibri"/>
+              </a:rPr>
+              <a:t>11</a:t>
+            </a:r>
+          </a:p>
+        </p:txBody>
+      </p:sp>
+      <p:graphicFrame>
+        <p:nvGraphicFramePr>
+          <p:cNvPr id="6" name="Table 5"/>
+          <p:cNvGraphicFramePr>
+            <a:graphicFrameLocks noGrp="1"/>
+          </p:cNvGraphicFramePr>
+          <p:nvPr/>
+        </p:nvGraphicFramePr>
+        <p:xfrm>
+          <a:off x="548640" y="1600200"/>
+          <a:ext cx="11094414" cy="4526280"/>
+        </p:xfrm>
+        <a:graphic>
+          <a:graphicData uri="http://schemas.openxmlformats.org/drawingml/2006/table">
+            <a:tbl>
+              <a:tblPr firstRow="1" bandRow="1">
+                <a:tableStyleId>{5C22544A-7EE6-4342-B048-85BDC9FD1C3A}</a:tableStyleId>
+              </a:tblPr>
+              <a:tblGrid>
+                <a:gridCol w="2064077"/>
+                <a:gridCol w="3354125"/>
+                <a:gridCol w="5676212"/>
+              </a:tblGrid>
+              <a:tr h="905256">
+                <a:tc>
+                  <a:txBody>
+                    <a:bodyPr wrap="square"/>
+                    <a:lstStyle/>
+                    <a:p>
+                      <a:r>
+                        <a:rPr sz="1600" b="1">
+                          <a:solidFill>
+                            <a:srgbClr val="FFFFFF"/>
+                          </a:solidFill>
+                          <a:latin typeface="Calibri"/>
+                        </a:rPr>
+                        <a:t>Group</a:t>
+                      </a:r>
+                    </a:p>
+                  </a:txBody>
+                  <a:tcPr marL="91440" marR="91440" anchor="ctr">
+                    <a:solidFill>
+                      <a:srgbClr val="03306E"/>
+                    </a:solidFill>
+                  </a:tcPr>
+                </a:tc>
+                <a:tc>
+                  <a:txBody>
+                    <a:bodyPr wrap="square"/>
+                    <a:lstStyle/>
+                    <a:p>
+                      <a:r>
+                        <a:rPr sz="1600" b="1">
+                          <a:solidFill>
+                            <a:srgbClr val="FFFFFF"/>
+                          </a:solidFill>
+                          <a:latin typeface="Calibri"/>
+                        </a:rPr>
+                        <a:t>Protocols</a:t>
+                      </a:r>
+                    </a:p>
+                  </a:txBody>
+                  <a:tcPr marL="91440" marR="91440" anchor="ctr">
+                    <a:solidFill>
+                      <a:srgbClr val="03306E"/>
+                    </a:solidFill>
+                  </a:tcPr>
+                </a:tc>
+                <a:tc>
+                  <a:txBody>
+                    <a:bodyPr wrap="square"/>
+                    <a:lstStyle/>
+                    <a:p>
+                      <a:r>
+                        <a:rPr sz="1600" b="1">
+                          <a:solidFill>
+                            <a:srgbClr val="FFFFFF"/>
+                          </a:solidFill>
+                          <a:latin typeface="Calibri"/>
+                        </a:rPr>
+                        <a:t>Purpose</a:t>
+                      </a:r>
+                    </a:p>
+                  </a:txBody>
+                  <a:tcPr marL="91440" marR="91440" anchor="ctr">
+                    <a:solidFill>
+                      <a:srgbClr val="03306E"/>
+                    </a:solidFill>
+                  </a:tcPr>
+                </a:tc>
+              </a:tr>
+              <a:tr h="905256">
+                <a:tc>
+                  <a:txBody>
+                    <a:bodyPr wrap="square"/>
+                    <a:lstStyle/>
+                    <a:p>
+                      <a:r>
+                        <a:rPr sz="1600" b="1">
+                          <a:solidFill>
+                            <a:srgbClr val="03306E"/>
+                          </a:solidFill>
+                          <a:latin typeface="Calibri"/>
+                        </a:rPr>
+                        <a:t>Web</a:t>
+                      </a:r>
+                    </a:p>
+                  </a:txBody>
+                  <a:tcPr marL="91440" marR="91440" anchor="ctr">
+                    <a:solidFill>
+                      <a:srgbClr val="FFFFFF"/>
+                    </a:solidFill>
+                  </a:tcPr>
+                </a:tc>
+                <a:tc>
+                  <a:txBody>
+                    <a:bodyPr wrap="square"/>
+                    <a:lstStyle/>
+                    <a:p>
+                      <a:r>
+                        <a:rPr sz="1600" b="0">
+                          <a:solidFill>
+                            <a:srgbClr val="202122"/>
+                          </a:solidFill>
+                          <a:latin typeface="Calibri"/>
+                        </a:rPr>
+                        <a:t>HTTP, HTTPS</a:t>
+                      </a:r>
+                    </a:p>
+                  </a:txBody>
+                  <a:tcPr marL="91440" marR="91440" anchor="ctr">
+                    <a:solidFill>
+                      <a:srgbClr val="FFFFFF"/>
+                    </a:solidFill>
+                  </a:tcPr>
+                </a:tc>
+                <a:tc>
+                  <a:txBody>
+                    <a:bodyPr wrap="square"/>
+                    <a:lstStyle/>
+                    <a:p>
+                      <a:r>
+                        <a:rPr sz="1600" b="0">
+                          <a:solidFill>
+                            <a:srgbClr val="202122"/>
+                          </a:solidFill>
+                          <a:latin typeface="Calibri"/>
+                        </a:rPr>
+                        <a:t>Web pages and APIs; HTTPS is encrypted</a:t>
+                      </a:r>
+                    </a:p>
+                  </a:txBody>
+                  <a:tcPr marL="91440" marR="91440" anchor="ctr">
+                    <a:solidFill>
+                      <a:srgbClr val="FFFFFF"/>
+                    </a:solidFill>
+                  </a:tcPr>
+                </a:tc>
+              </a:tr>
+              <a:tr h="905256">
+                <a:tc>
+                  <a:txBody>
+                    <a:bodyPr wrap="square"/>
+                    <a:lstStyle/>
+                    <a:p>
+                      <a:r>
+                        <a:rPr sz="1600" b="1">
+                          <a:solidFill>
+                            <a:srgbClr val="03306E"/>
+                          </a:solidFill>
+                          <a:latin typeface="Calibri"/>
+                        </a:rPr>
+                        <a:t>Mail</a:t>
+                      </a:r>
+                    </a:p>
+                  </a:txBody>
+                  <a:tcPr marL="91440" marR="91440" anchor="ctr">
+                    <a:solidFill>
+                      <a:srgbClr val="EAF3FF"/>
+                    </a:solidFill>
+                  </a:tcPr>
+                </a:tc>
+                <a:tc>
+                  <a:txBody>
+                    <a:bodyPr wrap="square"/>
+                    <a:lstStyle/>
+                    <a:p>
+                      <a:r>
+                        <a:rPr sz="1600" b="0">
+                          <a:solidFill>
+                            <a:srgbClr val="202122"/>
+                          </a:solidFill>
+                          <a:latin typeface="Calibri"/>
+                        </a:rPr>
+                        <a:t>SMTP, POP, IMAP</a:t>
+                      </a:r>
+                    </a:p>
+                  </a:txBody>
+                  <a:tcPr marL="91440" marR="91440" anchor="ctr">
+                    <a:solidFill>
+                      <a:srgbClr val="EAF3FF"/>
+                    </a:solidFill>
+                  </a:tcPr>
+                </a:tc>
+                <a:tc>
+                  <a:txBody>
+                    <a:bodyPr wrap="square"/>
+                    <a:lstStyle/>
+                    <a:p>
+                      <a:r>
+                        <a:rPr sz="1600" b="0">
+                          <a:solidFill>
+                            <a:srgbClr val="202122"/>
+                          </a:solidFill>
+                          <a:latin typeface="Calibri"/>
+                        </a:rPr>
+                        <a:t>Send, download or sync mail</a:t>
+                      </a:r>
+                    </a:p>
+                  </a:txBody>
+                  <a:tcPr marL="91440" marR="91440" anchor="ctr">
+                    <a:solidFill>
+                      <a:srgbClr val="EAF3FF"/>
+                    </a:solidFill>
+                  </a:tcPr>
+                </a:tc>
+              </a:tr>
+              <a:tr h="905256">
+                <a:tc>
+                  <a:txBody>
+                    <a:bodyPr wrap="square"/>
+                    <a:lstStyle/>
+                    <a:p>
+                      <a:r>
+                        <a:rPr sz="1600" b="1">
+                          <a:solidFill>
+                            <a:srgbClr val="03306E"/>
+                          </a:solidFill>
+                          <a:latin typeface="Calibri"/>
+                        </a:rPr>
+                        <a:t>Routing</a:t>
+                      </a:r>
+                    </a:p>
+                  </a:txBody>
+                  <a:tcPr marL="91440" marR="91440" anchor="ctr">
+                    <a:solidFill>
+                      <a:srgbClr val="FFFFFF"/>
+                    </a:solidFill>
+                  </a:tcPr>
+                </a:tc>
+                <a:tc>
+                  <a:txBody>
+                    <a:bodyPr wrap="square"/>
+                    <a:lstStyle/>
+                    <a:p>
+                      <a:r>
+                        <a:rPr sz="1600" b="0">
+                          <a:solidFill>
+                            <a:srgbClr val="202122"/>
+                          </a:solidFill>
+                          <a:latin typeface="Calibri"/>
+                        </a:rPr>
+                        <a:t>RIP, OSPF</a:t>
+                      </a:r>
+                    </a:p>
+                  </a:txBody>
+                  <a:tcPr marL="91440" marR="91440" anchor="ctr">
+                    <a:solidFill>
+                      <a:srgbClr val="FFFFFF"/>
+                    </a:solidFill>
+                  </a:tcPr>
+                </a:tc>
+                <a:tc>
+                  <a:txBody>
+                    <a:bodyPr wrap="square"/>
+                    <a:lstStyle/>
+                    <a:p>
+                      <a:r>
+                        <a:rPr sz="1600" b="0">
+                          <a:solidFill>
+                            <a:srgbClr val="202122"/>
+                          </a:solidFill>
+                          <a:latin typeface="Calibri"/>
+                        </a:rPr>
+                        <a:t>Routers share routes</a:t>
+                      </a:r>
+                    </a:p>
+                  </a:txBody>
+                  <a:tcPr marL="91440" marR="91440" anchor="ctr">
+                    <a:solidFill>
+                      <a:srgbClr val="FFFFFF"/>
+                    </a:solidFill>
+                  </a:tcPr>
+                </a:tc>
+              </a:tr>
+              <a:tr h="905256">
+                <a:tc>
+                  <a:txBody>
+                    <a:bodyPr wrap="square"/>
+                    <a:lstStyle/>
+                    <a:p>
+                      <a:r>
+                        <a:rPr sz="1600" b="1">
+                          <a:solidFill>
+                            <a:srgbClr val="03306E"/>
+                          </a:solidFill>
+                          <a:latin typeface="Calibri"/>
+                        </a:rPr>
+                        <a:t>Application</a:t>
+                      </a:r>
+                    </a:p>
+                  </a:txBody>
+                  <a:tcPr marL="91440" marR="91440" anchor="ctr">
+                    <a:solidFill>
+                      <a:srgbClr val="EAF3FF"/>
+                    </a:solidFill>
+                  </a:tcPr>
+                </a:tc>
+                <a:tc>
+                  <a:txBody>
+                    <a:bodyPr wrap="square"/>
+                    <a:lstStyle/>
+                    <a:p>
+                      <a:r>
+                        <a:rPr sz="1600" b="0">
+                          <a:solidFill>
+                            <a:srgbClr val="202122"/>
+                          </a:solidFill>
+                          <a:latin typeface="Calibri"/>
+                        </a:rPr>
+                        <a:t>FTP, SFTP, DHCP, DNS</a:t>
+                      </a:r>
+                    </a:p>
+                  </a:txBody>
+                  <a:tcPr marL="91440" marR="91440" anchor="ctr">
+                    <a:solidFill>
+                      <a:srgbClr val="EAF3FF"/>
+                    </a:solidFill>
+                  </a:tcPr>
+                </a:tc>
+                <a:tc>
+                  <a:txBody>
+                    <a:bodyPr wrap="square"/>
+                    <a:lstStyle/>
+                    <a:p>
+                      <a:r>
+                        <a:rPr sz="1600" b="0">
+                          <a:solidFill>
+                            <a:srgbClr val="202122"/>
+                          </a:solidFill>
+                          <a:latin typeface="Calibri"/>
+                        </a:rPr>
+                        <a:t>File transfer, IP addresses, name lookup</a:t>
+                      </a:r>
+                    </a:p>
+                  </a:txBody>
+                  <a:tcPr marL="91440" marR="91440" anchor="ctr">
+                    <a:solidFill>
+                      <a:srgbClr val="EAF3FF"/>
+                    </a:solidFill>
+                  </a:tcPr>
+                </a:tc>
+              </a:tr>
+            </a:tbl>
+          </a:graphicData>
+        </a:graphic>
+      </p:graphicFrame>
+    </p:spTree>
+  </p:cSld>
+  <p:clrMapOvr>
+    <a:masterClrMapping/>
+  </p:clrMapOvr>
+</p:sld>
+</file>
+
+<file path=ppt/slides/slide12.xml><?xml version="1.0" encoding="utf-8"?>
+<p:sld xmlns:a="http://schemas.openxmlformats.org/drawingml/2006/main" xmlns:p="http://schemas.openxmlformats.org/presentationml/2006/main" xmlns:r="http://schemas.openxmlformats.org/officeDocument/2006/relationships">
+  <p:cSld>
+    <p:bg>
+      <p:bgPr>
+        <a:solidFill>
+          <a:srgbClr val="FFFFFF"/>
+        </a:solidFill>
+        <a:effectLst/>
+      </p:bgPr>
+    </p:bg>
+    <p:spTree>
+      <p:nvGrpSpPr>
+        <p:cNvPr id="1" name=""/>
+        <p:cNvGrpSpPr/>
+        <p:nvPr/>
+      </p:nvGrpSpPr>
+      <p:grpSpPr/>
+      <p:sp>
+        <p:nvSpPr>
+          <p:cNvPr id="2" name="TextBox 1"/>
+          <p:cNvSpPr txBox="1"/>
+          <p:nvPr/>
+        </p:nvSpPr>
+        <p:spPr>
+          <a:xfrm>
+            <a:off x="548640" y="320040"/>
+            <a:ext cx="11094415" cy="274320"/>
+          </a:xfrm>
+          <a:prstGeom prst="rect">
+            <a:avLst/>
+          </a:prstGeom>
+          <a:noFill/>
+        </p:spPr>
+        <p:txBody>
+          <a:bodyPr wrap="square" anchor="t" lIns="0" rIns="0" tIns="0" bIns="0"/>
+          <a:lstStyle/>
+          <a:p>
+            <a:pPr algn="l"/>
+            <a:r>
+              <a:rPr sz="1100" b="1" i="0">
+                <a:solidFill>
+                  <a:srgbClr val="54595D"/>
+                </a:solidFill>
+                <a:latin typeface="Calibri"/>
+              </a:rPr>
+              <a:t>CORE COMPONENT  ·  Core Paper 2</a:t>
+            </a:r>
+          </a:p>
+        </p:txBody>
+      </p:sp>
+      <p:sp>
+        <p:nvSpPr>
+          <p:cNvPr id="3" name="TextBox 2"/>
+          <p:cNvSpPr txBox="1"/>
+          <p:nvPr/>
+        </p:nvSpPr>
+        <p:spPr>
+          <a:xfrm>
+            <a:off x="548640" y="566928"/>
+            <a:ext cx="11094415" cy="822960"/>
+          </a:xfrm>
+          <a:prstGeom prst="rect">
+            <a:avLst/>
+          </a:prstGeom>
+          <a:noFill/>
+        </p:spPr>
+        <p:txBody>
+          <a:bodyPr wrap="square" anchor="ctr" lIns="0" rIns="0" tIns="0" bIns="0"/>
+          <a:lstStyle/>
+          <a:p>
+            <a:pPr algn="l"/>
+            <a:r>
+              <a:rPr sz="3200" b="1" i="0">
+                <a:solidFill>
+                  <a:srgbClr val="03306E"/>
+                </a:solidFill>
+                <a:latin typeface="Cambria"/>
+              </a:rPr>
+              <a:t>Quick check: Common protocols</a:t>
+            </a:r>
+          </a:p>
+        </p:txBody>
+      </p:sp>
+      <p:sp>
+        <p:nvSpPr>
+          <p:cNvPr id="4" name="TextBox 3"/>
+          <p:cNvSpPr txBox="1"/>
+          <p:nvPr/>
+        </p:nvSpPr>
+        <p:spPr>
+          <a:xfrm>
+            <a:off x="548640" y="6446520"/>
+            <a:ext cx="8229600" cy="274320"/>
+          </a:xfrm>
+          <a:prstGeom prst="rect">
+            <a:avLst/>
+          </a:prstGeom>
+          <a:noFill/>
+        </p:spPr>
+        <p:txBody>
+          <a:bodyPr wrap="square" anchor="t" lIns="0" rIns="0" tIns="0" bIns="0"/>
+          <a:lstStyle/>
+          <a:p>
+            <a:pPr algn="l"/>
+            <a:r>
+              <a:rPr sz="1000" b="0" i="0">
+                <a:solidFill>
+                  <a:srgbClr val="54595D"/>
+                </a:solidFill>
+                <a:latin typeface="Calibri"/>
+              </a:rPr>
+              <a:t>Digital Software Development T Level  ·  Networks</a:t>
+            </a:r>
+          </a:p>
+        </p:txBody>
+      </p:sp>
+      <p:sp>
+        <p:nvSpPr>
+          <p:cNvPr id="5" name="TextBox 4"/>
+          <p:cNvSpPr txBox="1"/>
+          <p:nvPr/>
+        </p:nvSpPr>
+        <p:spPr>
+          <a:xfrm>
+            <a:off x="10728655" y="6446520"/>
+            <a:ext cx="914400" cy="274320"/>
+          </a:xfrm>
+          <a:prstGeom prst="rect">
+            <a:avLst/>
+          </a:prstGeom>
+          <a:noFill/>
+        </p:spPr>
+        <p:txBody>
+          <a:bodyPr wrap="square" anchor="t" lIns="0" rIns="0" tIns="0" bIns="0"/>
+          <a:lstStyle/>
+          <a:p>
+            <a:pPr algn="r"/>
+            <a:r>
+              <a:rPr sz="1000" b="0" i="0">
+                <a:solidFill>
+                  <a:srgbClr val="54595D"/>
+                </a:solidFill>
+                <a:latin typeface="Calibri"/>
+              </a:rPr>
+              <a:t>12</a:t>
+            </a:r>
+          </a:p>
+        </p:txBody>
+      </p:sp>
+      <p:sp>
+        <p:nvSpPr>
+          <p:cNvPr id="6" name="Oval 5"/>
+          <p:cNvSpPr/>
+          <p:nvPr/>
+        </p:nvSpPr>
+        <p:spPr>
+          <a:xfrm>
+            <a:off x="548640" y="1691640"/>
+            <a:ext cx="502920" cy="502920"/>
+          </a:xfrm>
+          <a:prstGeom prst="ellipse">
+            <a:avLst/>
+          </a:prstGeom>
+          <a:solidFill>
+            <a:srgbClr val="F2B705"/>
+          </a:solidFill>
+          <a:ln>
+            <a:noFill/>
+          </a:ln>
+          <a:effectLst/>
+        </p:spPr>
+        <p:style>
+          <a:lnRef idx="1">
+            <a:schemeClr val="accent1"/>
+          </a:lnRef>
+          <a:fillRef idx="3">
+            <a:schemeClr val="accent1"/>
+          </a:fillRef>
+          <a:effectRef idx="2">
+            <a:schemeClr val="accent1"/>
+          </a:effectRef>
+          <a:fontRef idx="minor">
+            <a:schemeClr val="lt1"/>
+          </a:fontRef>
+        </p:style>
+        <p:txBody>
+          <a:bodyPr rtlCol="0" anchor="ctr" lIns="0" rIns="0" tIns="0" bIns="0"/>
+          <a:lstStyle/>
+          <a:p>
+            <a:pPr algn="ctr"/>
+            <a:r>
+              <a:rPr sz="1600" b="1">
+                <a:solidFill>
+                  <a:srgbClr val="202122"/>
+                </a:solidFill>
+                <a:latin typeface="Calibri"/>
+              </a:rPr>
+              <a:t>1</a:t>
+            </a:r>
+          </a:p>
+        </p:txBody>
+      </p:sp>
+      <p:sp>
+        <p:nvSpPr>
+          <p:cNvPr id="7" name="TextBox 6"/>
+          <p:cNvSpPr txBox="1"/>
+          <p:nvPr/>
+        </p:nvSpPr>
+        <p:spPr>
+          <a:xfrm>
+            <a:off x="1371600" y="1645920"/>
+            <a:ext cx="10271455" cy="1188720"/>
+          </a:xfrm>
+          <a:prstGeom prst="rect">
+            <a:avLst/>
+          </a:prstGeom>
+          <a:noFill/>
+        </p:spPr>
+        <p:txBody>
+          <a:bodyPr wrap="square" anchor="t" lIns="0" rIns="0" tIns="0" bIns="0"/>
+          <a:lstStyle/>
+          <a:p>
+            <a:pPr algn="l"/>
+            <a:r>
+              <a:rPr sz="2400" b="0" i="0">
+                <a:solidFill>
+                  <a:srgbClr val="202122"/>
+                </a:solidFill>
+                <a:latin typeface="Calibri"/>
+              </a:rPr>
+              <a:t>Which protocol should APIs use?</a:t>
+            </a:r>
+          </a:p>
+        </p:txBody>
+      </p:sp>
+      <p:sp>
+        <p:nvSpPr>
+          <p:cNvPr id="8" name="Oval 7"/>
+          <p:cNvSpPr/>
+          <p:nvPr/>
+        </p:nvSpPr>
+        <p:spPr>
+          <a:xfrm>
+            <a:off x="548640" y="3108960"/>
+            <a:ext cx="502920" cy="502920"/>
+          </a:xfrm>
+          <a:prstGeom prst="ellipse">
+            <a:avLst/>
+          </a:prstGeom>
+          <a:solidFill>
+            <a:srgbClr val="F2B705"/>
+          </a:solidFill>
+          <a:ln>
+            <a:noFill/>
+          </a:ln>
+          <a:effectLst/>
+        </p:spPr>
+        <p:style>
+          <a:lnRef idx="1">
+            <a:schemeClr val="accent1"/>
+          </a:lnRef>
+          <a:fillRef idx="3">
+            <a:schemeClr val="accent1"/>
+          </a:fillRef>
+          <a:effectRef idx="2">
+            <a:schemeClr val="accent1"/>
+          </a:effectRef>
+          <a:fontRef idx="minor">
+            <a:schemeClr val="lt1"/>
+          </a:fontRef>
+        </p:style>
+        <p:txBody>
+          <a:bodyPr rtlCol="0" anchor="ctr" lIns="0" rIns="0" tIns="0" bIns="0"/>
+          <a:lstStyle/>
+          <a:p>
+            <a:pPr algn="ctr"/>
+            <a:r>
+              <a:rPr sz="1600" b="1">
+                <a:solidFill>
+                  <a:srgbClr val="202122"/>
+                </a:solidFill>
+                <a:latin typeface="Calibri"/>
+              </a:rPr>
+              <a:t>2</a:t>
+            </a:r>
+          </a:p>
+        </p:txBody>
+      </p:sp>
+      <p:sp>
+        <p:nvSpPr>
+          <p:cNvPr id="9" name="TextBox 8"/>
+          <p:cNvSpPr txBox="1"/>
+          <p:nvPr/>
+        </p:nvSpPr>
+        <p:spPr>
+          <a:xfrm>
+            <a:off x="1371600" y="3063240"/>
+            <a:ext cx="10271455" cy="1188720"/>
+          </a:xfrm>
+          <a:prstGeom prst="rect">
+            <a:avLst/>
+          </a:prstGeom>
+          <a:noFill/>
+        </p:spPr>
+        <p:txBody>
+          <a:bodyPr wrap="square" anchor="t" lIns="0" rIns="0" tIns="0" bIns="0"/>
+          <a:lstStyle/>
+          <a:p>
+            <a:pPr algn="l"/>
+            <a:r>
+              <a:rPr sz="2400" b="0" i="0">
+                <a:solidFill>
+                  <a:srgbClr val="202122"/>
+                </a:solidFill>
+                <a:latin typeface="Calibri"/>
+              </a:rPr>
+              <a:t>What does DNS do?</a:t>
+            </a:r>
+          </a:p>
+        </p:txBody>
+      </p:sp>
+      <p:sp>
+        <p:nvSpPr>
+          <p:cNvPr id="10" name="Oval 9"/>
+          <p:cNvSpPr/>
+          <p:nvPr/>
+        </p:nvSpPr>
+        <p:spPr>
+          <a:xfrm>
+            <a:off x="548640" y="4526280"/>
+            <a:ext cx="502920" cy="502920"/>
+          </a:xfrm>
+          <a:prstGeom prst="ellipse">
+            <a:avLst/>
+          </a:prstGeom>
+          <a:solidFill>
+            <a:srgbClr val="F2B705"/>
+          </a:solidFill>
+          <a:ln>
+            <a:noFill/>
+          </a:ln>
+          <a:effectLst/>
+        </p:spPr>
+        <p:style>
+          <a:lnRef idx="1">
+            <a:schemeClr val="accent1"/>
+          </a:lnRef>
+          <a:fillRef idx="3">
+            <a:schemeClr val="accent1"/>
+          </a:fillRef>
+          <a:effectRef idx="2">
+            <a:schemeClr val="accent1"/>
+          </a:effectRef>
+          <a:fontRef idx="minor">
+            <a:schemeClr val="lt1"/>
+          </a:fontRef>
+        </p:style>
+        <p:txBody>
+          <a:bodyPr rtlCol="0" anchor="ctr" lIns="0" rIns="0" tIns="0" bIns="0"/>
+          <a:lstStyle/>
+          <a:p>
+            <a:pPr algn="ctr"/>
+            <a:r>
+              <a:rPr sz="1600" b="1">
+                <a:solidFill>
+                  <a:srgbClr val="202122"/>
+                </a:solidFill>
+                <a:latin typeface="Calibri"/>
+              </a:rPr>
+              <a:t>3</a:t>
+            </a:r>
+          </a:p>
+        </p:txBody>
+      </p:sp>
+      <p:sp>
+        <p:nvSpPr>
+          <p:cNvPr id="11" name="TextBox 10"/>
+          <p:cNvSpPr txBox="1"/>
+          <p:nvPr/>
+        </p:nvSpPr>
+        <p:spPr>
+          <a:xfrm>
+            <a:off x="1371600" y="4480560"/>
+            <a:ext cx="10271455" cy="1188720"/>
+          </a:xfrm>
+          <a:prstGeom prst="rect">
+            <a:avLst/>
+          </a:prstGeom>
+          <a:noFill/>
+        </p:spPr>
+        <p:txBody>
+          <a:bodyPr wrap="square" anchor="t" lIns="0" rIns="0" tIns="0" bIns="0"/>
+          <a:lstStyle/>
+          <a:p>
+            <a:pPr algn="l"/>
+            <a:r>
+              <a:rPr sz="2400" b="0" i="0">
+                <a:solidFill>
+                  <a:srgbClr val="202122"/>
+                </a:solidFill>
+                <a:latin typeface="Calibri"/>
+              </a:rPr>
+              <a:t>What is the difference between FTP and SFTP?</a:t>
+            </a:r>
+          </a:p>
+        </p:txBody>
+      </p:sp>
+      <p:sp>
+        <p:nvSpPr>
+          <p:cNvPr id="12" name="TextBox 11"/>
+          <p:cNvSpPr txBox="1"/>
+          <p:nvPr/>
+        </p:nvSpPr>
+        <p:spPr>
+          <a:xfrm>
+            <a:off x="548640" y="5852160"/>
+            <a:ext cx="11094415" cy="365760"/>
+          </a:xfrm>
+          <a:prstGeom prst="rect">
+            <a:avLst/>
+          </a:prstGeom>
+          <a:noFill/>
+        </p:spPr>
+        <p:txBody>
+          <a:bodyPr wrap="square" anchor="t" lIns="0" rIns="0" tIns="0" bIns="0"/>
+          <a:lstStyle/>
+          <a:p>
+            <a:pPr algn="l"/>
+            <a:r>
+              <a:rPr sz="1300" b="0" i="1">
+                <a:solidFill>
+                  <a:srgbClr val="54595D"/>
+                </a:solidFill>
+                <a:latin typeface="Calibri"/>
+              </a:rPr>
+              <a:t>Answer on mini whiteboards or in your book. Answers are in the speaker notes.</a:t>
+            </a:r>
+          </a:p>
+        </p:txBody>
+      </p:sp>
+    </p:spTree>
+  </p:cSld>
+  <p:clrMapOvr>
+    <a:masterClrMapping/>
+  </p:clrMapOvr>
+</p:sld>
+</file>
+
+<file path=ppt/slides/slide13.xml><?xml version="1.0" encoding="utf-8"?>
+<p:sld xmlns:a="http://schemas.openxmlformats.org/drawingml/2006/main" xmlns:p="http://schemas.openxmlformats.org/presentationml/2006/main" xmlns:r="http://schemas.openxmlformats.org/officeDocument/2006/relationships">
+  <p:cSld>
+    <p:bg>
+      <p:bgPr>
+        <a:solidFill>
+          <a:srgbClr val="FFFFFF"/>
+        </a:solidFill>
+        <a:effectLst/>
+      </p:bgPr>
+    </p:bg>
+    <p:spTree>
+      <p:nvGrpSpPr>
+        <p:cNvPr id="1" name=""/>
+        <p:cNvGrpSpPr/>
+        <p:nvPr/>
+      </p:nvGrpSpPr>
+      <p:grpSpPr/>
+      <p:sp>
+        <p:nvSpPr>
+          <p:cNvPr id="2" name="TextBox 1"/>
+          <p:cNvSpPr txBox="1"/>
+          <p:nvPr/>
+        </p:nvSpPr>
+        <p:spPr>
+          <a:xfrm>
+            <a:off x="548640" y="320040"/>
+            <a:ext cx="11094415" cy="274320"/>
+          </a:xfrm>
+          <a:prstGeom prst="rect">
+            <a:avLst/>
+          </a:prstGeom>
+          <a:noFill/>
+        </p:spPr>
+        <p:txBody>
+          <a:bodyPr wrap="square" anchor="t" lIns="0" rIns="0" tIns="0" bIns="0"/>
+          <a:lstStyle/>
+          <a:p>
+            <a:pPr algn="l"/>
+            <a:r>
+              <a:rPr sz="1100" b="1" i="0">
+                <a:solidFill>
+                  <a:srgbClr val="54595D"/>
+                </a:solidFill>
+                <a:latin typeface="Calibri"/>
+              </a:rPr>
+              <a:t>CORE COMPONENT  ·  Core Paper 2</a:t>
+            </a:r>
+          </a:p>
+        </p:txBody>
+      </p:sp>
+      <p:sp>
+        <p:nvSpPr>
+          <p:cNvPr id="3" name="TextBox 2"/>
+          <p:cNvSpPr txBox="1"/>
+          <p:nvPr/>
+        </p:nvSpPr>
+        <p:spPr>
+          <a:xfrm>
+            <a:off x="548640" y="566928"/>
+            <a:ext cx="11094415" cy="822960"/>
+          </a:xfrm>
+          <a:prstGeom prst="rect">
+            <a:avLst/>
+          </a:prstGeom>
+          <a:noFill/>
+        </p:spPr>
+        <p:txBody>
+          <a:bodyPr wrap="square" anchor="ctr" lIns="0" rIns="0" tIns="0" bIns="0"/>
+          <a:lstStyle/>
+          <a:p>
+            <a:pPr algn="l"/>
+            <a:r>
+              <a:rPr sz="3200" b="1" i="0">
+                <a:solidFill>
+                  <a:srgbClr val="03306E"/>
+                </a:solidFill>
+                <a:latin typeface="Cambria"/>
+              </a:rPr>
+              <a:t>Check your understanding</a:t>
+            </a:r>
+          </a:p>
+        </p:txBody>
+      </p:sp>
+      <p:sp>
+        <p:nvSpPr>
+          <p:cNvPr id="4" name="TextBox 3"/>
+          <p:cNvSpPr txBox="1"/>
+          <p:nvPr/>
+        </p:nvSpPr>
+        <p:spPr>
+          <a:xfrm>
+            <a:off x="548640" y="6446520"/>
+            <a:ext cx="8229600" cy="274320"/>
+          </a:xfrm>
+          <a:prstGeom prst="rect">
+            <a:avLst/>
+          </a:prstGeom>
+          <a:noFill/>
+        </p:spPr>
+        <p:txBody>
+          <a:bodyPr wrap="square" anchor="t" lIns="0" rIns="0" tIns="0" bIns="0"/>
+          <a:lstStyle/>
+          <a:p>
+            <a:pPr algn="l"/>
+            <a:r>
+              <a:rPr sz="1000" b="0" i="0">
+                <a:solidFill>
+                  <a:srgbClr val="54595D"/>
+                </a:solidFill>
+                <a:latin typeface="Calibri"/>
+              </a:rPr>
+              <a:t>Digital Software Development T Level  ·  Networks</a:t>
+            </a:r>
+          </a:p>
+        </p:txBody>
+      </p:sp>
+      <p:sp>
+        <p:nvSpPr>
+          <p:cNvPr id="5" name="TextBox 4"/>
+          <p:cNvSpPr txBox="1"/>
+          <p:nvPr/>
+        </p:nvSpPr>
+        <p:spPr>
+          <a:xfrm>
+            <a:off x="10728655" y="6446520"/>
+            <a:ext cx="914400" cy="274320"/>
+          </a:xfrm>
+          <a:prstGeom prst="rect">
+            <a:avLst/>
+          </a:prstGeom>
+          <a:noFill/>
+        </p:spPr>
+        <p:txBody>
+          <a:bodyPr wrap="square" anchor="t" lIns="0" rIns="0" tIns="0" bIns="0"/>
+          <a:lstStyle/>
+          <a:p>
+            <a:pPr algn="r"/>
+            <a:r>
+              <a:rPr sz="1000" b="0" i="0">
+                <a:solidFill>
+                  <a:srgbClr val="54595D"/>
+                </a:solidFill>
+                <a:latin typeface="Calibri"/>
+              </a:rPr>
+              <a:t>13</a:t>
+            </a:r>
+          </a:p>
+        </p:txBody>
+      </p:sp>
+      <p:sp>
+        <p:nvSpPr>
+          <p:cNvPr id="6" name="Oval 5"/>
+          <p:cNvSpPr/>
+          <p:nvPr/>
+        </p:nvSpPr>
+        <p:spPr>
+          <a:xfrm>
+            <a:off x="548640" y="1618488"/>
+            <a:ext cx="411480" cy="411480"/>
+          </a:xfrm>
+          <a:prstGeom prst="ellipse">
+            <a:avLst/>
+          </a:prstGeom>
+          <a:solidFill>
+            <a:srgbClr val="F2B705"/>
+          </a:solidFill>
+          <a:ln>
+            <a:noFill/>
+          </a:ln>
+          <a:effectLst/>
+        </p:spPr>
+        <p:style>
+          <a:lnRef idx="1">
+            <a:schemeClr val="accent1"/>
+          </a:lnRef>
+          <a:fillRef idx="3">
+            <a:schemeClr val="accent1"/>
+          </a:fillRef>
+          <a:effectRef idx="2">
+            <a:schemeClr val="accent1"/>
+          </a:effectRef>
+          <a:fontRef idx="minor">
+            <a:schemeClr val="lt1"/>
+          </a:fontRef>
+        </p:style>
+        <p:txBody>
+          <a:bodyPr rtlCol="0" anchor="ctr" lIns="0" rIns="0" tIns="0" bIns="0"/>
+          <a:lstStyle/>
+          <a:p>
+            <a:pPr algn="ctr"/>
+            <a:r>
+              <a:rPr sz="1400" b="1">
+                <a:solidFill>
+                  <a:srgbClr val="202122"/>
+                </a:solidFill>
+                <a:latin typeface="Calibri"/>
+              </a:rPr>
+              <a:t>1</a:t>
+            </a:r>
+          </a:p>
+        </p:txBody>
+      </p:sp>
+      <p:sp>
+        <p:nvSpPr>
+          <p:cNvPr id="7" name="TextBox 6"/>
+          <p:cNvSpPr txBox="1"/>
+          <p:nvPr/>
+        </p:nvSpPr>
+        <p:spPr>
+          <a:xfrm>
+            <a:off x="1234440" y="1600200"/>
+            <a:ext cx="10408615" cy="1030986"/>
+          </a:xfrm>
+          <a:prstGeom prst="rect">
+            <a:avLst/>
+          </a:prstGeom>
+          <a:noFill/>
+        </p:spPr>
+        <p:txBody>
+          <a:bodyPr wrap="square" anchor="t" lIns="0" rIns="0" tIns="0" bIns="0"/>
+          <a:lstStyle/>
+          <a:p>
+            <a:pPr algn="l"/>
+            <a:r>
+              <a:rPr sz="2200" b="0" i="0">
+                <a:solidFill>
+                  <a:srgbClr val="202122"/>
+                </a:solidFill>
+                <a:latin typeface="Calibri"/>
+              </a:rPr>
+              <a:t>Which layer handles routing in the OSI model?</a:t>
+            </a:r>
+          </a:p>
+        </p:txBody>
+      </p:sp>
+      <p:sp>
+        <p:nvSpPr>
+          <p:cNvPr id="8" name="Oval 7"/>
+          <p:cNvSpPr/>
+          <p:nvPr/>
+        </p:nvSpPr>
+        <p:spPr>
+          <a:xfrm>
+            <a:off x="548640" y="2814066"/>
+            <a:ext cx="411480" cy="411480"/>
+          </a:xfrm>
+          <a:prstGeom prst="ellipse">
+            <a:avLst/>
+          </a:prstGeom>
+          <a:solidFill>
+            <a:srgbClr val="F2B705"/>
+          </a:solidFill>
+          <a:ln>
+            <a:noFill/>
+          </a:ln>
+          <a:effectLst/>
+        </p:spPr>
+        <p:style>
+          <a:lnRef idx="1">
+            <a:schemeClr val="accent1"/>
+          </a:lnRef>
+          <a:fillRef idx="3">
+            <a:schemeClr val="accent1"/>
+          </a:fillRef>
+          <a:effectRef idx="2">
+            <a:schemeClr val="accent1"/>
+          </a:effectRef>
+          <a:fontRef idx="minor">
+            <a:schemeClr val="lt1"/>
+          </a:fontRef>
+        </p:style>
+        <p:txBody>
+          <a:bodyPr rtlCol="0" anchor="ctr" lIns="0" rIns="0" tIns="0" bIns="0"/>
+          <a:lstStyle/>
+          <a:p>
+            <a:pPr algn="ctr"/>
+            <a:r>
+              <a:rPr sz="1400" b="1">
+                <a:solidFill>
+                  <a:srgbClr val="202122"/>
+                </a:solidFill>
+                <a:latin typeface="Calibri"/>
+              </a:rPr>
+              <a:t>2</a:t>
+            </a:r>
+          </a:p>
+        </p:txBody>
+      </p:sp>
+      <p:sp>
+        <p:nvSpPr>
+          <p:cNvPr id="9" name="TextBox 8"/>
+          <p:cNvSpPr txBox="1"/>
+          <p:nvPr/>
+        </p:nvSpPr>
+        <p:spPr>
+          <a:xfrm>
+            <a:off x="1234440" y="2795778"/>
+            <a:ext cx="10408615" cy="1030986"/>
+          </a:xfrm>
+          <a:prstGeom prst="rect">
+            <a:avLst/>
+          </a:prstGeom>
+          <a:noFill/>
+        </p:spPr>
+        <p:txBody>
+          <a:bodyPr wrap="square" anchor="t" lIns="0" rIns="0" tIns="0" bIns="0"/>
+          <a:lstStyle/>
+          <a:p>
+            <a:pPr algn="l"/>
+            <a:r>
+              <a:rPr sz="2200" b="0" i="0">
+                <a:solidFill>
+                  <a:srgbClr val="202122"/>
+                </a:solidFill>
+                <a:latin typeface="Calibri"/>
+              </a:rPr>
+              <a:t>What is a CRC for?</a:t>
+            </a:r>
+          </a:p>
+        </p:txBody>
+      </p:sp>
+      <p:sp>
+        <p:nvSpPr>
+          <p:cNvPr id="10" name="Oval 9"/>
+          <p:cNvSpPr/>
+          <p:nvPr/>
+        </p:nvSpPr>
+        <p:spPr>
+          <a:xfrm>
+            <a:off x="548640" y="4009644"/>
+            <a:ext cx="411480" cy="411480"/>
+          </a:xfrm>
+          <a:prstGeom prst="ellipse">
+            <a:avLst/>
+          </a:prstGeom>
+          <a:solidFill>
+            <a:srgbClr val="F2B705"/>
+          </a:solidFill>
+          <a:ln>
+            <a:noFill/>
+          </a:ln>
+          <a:effectLst/>
+        </p:spPr>
+        <p:style>
+          <a:lnRef idx="1">
+            <a:schemeClr val="accent1"/>
+          </a:lnRef>
+          <a:fillRef idx="3">
+            <a:schemeClr val="accent1"/>
+          </a:fillRef>
+          <a:effectRef idx="2">
+            <a:schemeClr val="accent1"/>
+          </a:effectRef>
+          <a:fontRef idx="minor">
+            <a:schemeClr val="lt1"/>
+          </a:fontRef>
+        </p:style>
+        <p:txBody>
+          <a:bodyPr rtlCol="0" anchor="ctr" lIns="0" rIns="0" tIns="0" bIns="0"/>
+          <a:lstStyle/>
+          <a:p>
+            <a:pPr algn="ctr"/>
+            <a:r>
+              <a:rPr sz="1400" b="1">
+                <a:solidFill>
+                  <a:srgbClr val="202122"/>
+                </a:solidFill>
+                <a:latin typeface="Calibri"/>
+              </a:rPr>
+              <a:t>3</a:t>
+            </a:r>
+          </a:p>
+        </p:txBody>
+      </p:sp>
+      <p:sp>
+        <p:nvSpPr>
+          <p:cNvPr id="11" name="TextBox 10"/>
+          <p:cNvSpPr txBox="1"/>
+          <p:nvPr/>
+        </p:nvSpPr>
+        <p:spPr>
+          <a:xfrm>
+            <a:off x="1234440" y="3991356"/>
+            <a:ext cx="10408615" cy="1030986"/>
+          </a:xfrm>
+          <a:prstGeom prst="rect">
+            <a:avLst/>
+          </a:prstGeom>
+          <a:noFill/>
+        </p:spPr>
+        <p:txBody>
+          <a:bodyPr wrap="square" anchor="t" lIns="0" rIns="0" tIns="0" bIns="0"/>
+          <a:lstStyle/>
+          <a:p>
+            <a:pPr algn="l"/>
+            <a:r>
+              <a:rPr sz="2200" b="0" i="0">
+                <a:solidFill>
+                  <a:srgbClr val="202122"/>
+                </a:solidFill>
+                <a:latin typeface="Calibri"/>
+              </a:rPr>
+              <a:t>Which protocol turns a domain name into an IP address?</a:t>
+            </a:r>
+          </a:p>
+        </p:txBody>
+      </p:sp>
+      <p:sp>
+        <p:nvSpPr>
+          <p:cNvPr id="12" name="Oval 11"/>
+          <p:cNvSpPr/>
+          <p:nvPr/>
+        </p:nvSpPr>
+        <p:spPr>
+          <a:xfrm>
+            <a:off x="548640" y="5205221"/>
+            <a:ext cx="411480" cy="411480"/>
+          </a:xfrm>
+          <a:prstGeom prst="ellipse">
+            <a:avLst/>
+          </a:prstGeom>
+          <a:solidFill>
+            <a:srgbClr val="F2B705"/>
+          </a:solidFill>
+          <a:ln>
+            <a:noFill/>
+          </a:ln>
+          <a:effectLst/>
+        </p:spPr>
+        <p:style>
+          <a:lnRef idx="1">
+            <a:schemeClr val="accent1"/>
+          </a:lnRef>
+          <a:fillRef idx="3">
+            <a:schemeClr val="accent1"/>
+          </a:fillRef>
+          <a:effectRef idx="2">
+            <a:schemeClr val="accent1"/>
+          </a:effectRef>
+          <a:fontRef idx="minor">
+            <a:schemeClr val="lt1"/>
+          </a:fontRef>
+        </p:style>
+        <p:txBody>
+          <a:bodyPr rtlCol="0" anchor="ctr" lIns="0" rIns="0" tIns="0" bIns="0"/>
+          <a:lstStyle/>
+          <a:p>
+            <a:pPr algn="ctr"/>
+            <a:r>
+              <a:rPr sz="1400" b="1">
+                <a:solidFill>
+                  <a:srgbClr val="202122"/>
+                </a:solidFill>
+                <a:latin typeface="Calibri"/>
+              </a:rPr>
+              <a:t>4</a:t>
+            </a:r>
+          </a:p>
+        </p:txBody>
+      </p:sp>
+      <p:sp>
+        <p:nvSpPr>
+          <p:cNvPr id="13" name="TextBox 12"/>
+          <p:cNvSpPr txBox="1"/>
+          <p:nvPr/>
+        </p:nvSpPr>
+        <p:spPr>
+          <a:xfrm>
+            <a:off x="1234440" y="5186933"/>
+            <a:ext cx="10408615" cy="1030986"/>
+          </a:xfrm>
+          <a:prstGeom prst="rect">
+            <a:avLst/>
+          </a:prstGeom>
+          <a:noFill/>
+        </p:spPr>
+        <p:txBody>
+          <a:bodyPr wrap="square" anchor="t" lIns="0" rIns="0" tIns="0" bIns="0"/>
+          <a:lstStyle/>
+          <a:p>
+            <a:pPr algn="l"/>
+            <a:r>
+              <a:rPr sz="2200" b="0" i="0">
+                <a:solidFill>
+                  <a:srgbClr val="202122"/>
+                </a:solidFill>
+                <a:latin typeface="Calibri"/>
+              </a:rPr>
+              <a:t>What is latency?</a:t>
+            </a:r>
+          </a:p>
+        </p:txBody>
+      </p:sp>
+    </p:spTree>
+  </p:cSld>
+  <p:clrMapOvr>
+    <a:masterClrMapping/>
+  </p:clrMapOvr>
+</p:sld>
+</file>
+
+<file path=ppt/slides/slide14.xml><?xml version="1.0" encoding="utf-8"?>
+<p:sld xmlns:a="http://schemas.openxmlformats.org/drawingml/2006/main" xmlns:p="http://schemas.openxmlformats.org/presentationml/2006/main" xmlns:r="http://schemas.openxmlformats.org/officeDocument/2006/relationships">
+  <p:cSld>
+    <p:bg>
+      <p:bgPr>
+        <a:solidFill>
+          <a:srgbClr val="FFFFFF"/>
+        </a:solidFill>
+        <a:effectLst/>
+      </p:bgPr>
+    </p:bg>
+    <p:spTree>
+      <p:nvGrpSpPr>
+        <p:cNvPr id="1" name=""/>
+        <p:cNvGrpSpPr/>
+        <p:nvPr/>
+      </p:nvGrpSpPr>
+      <p:grpSpPr/>
+      <p:sp>
+        <p:nvSpPr>
+          <p:cNvPr id="2" name="TextBox 1"/>
+          <p:cNvSpPr txBox="1"/>
+          <p:nvPr/>
+        </p:nvSpPr>
+        <p:spPr>
+          <a:xfrm>
+            <a:off x="548640" y="320040"/>
+            <a:ext cx="11094415" cy="274320"/>
+          </a:xfrm>
+          <a:prstGeom prst="rect">
+            <a:avLst/>
+          </a:prstGeom>
+          <a:noFill/>
+        </p:spPr>
+        <p:txBody>
+          <a:bodyPr wrap="square" anchor="t" lIns="0" rIns="0" tIns="0" bIns="0"/>
+          <a:lstStyle/>
+          <a:p>
+            <a:pPr algn="l"/>
+            <a:r>
+              <a:rPr sz="1100" b="1" i="0">
+                <a:solidFill>
+                  <a:srgbClr val="54595D"/>
+                </a:solidFill>
+                <a:latin typeface="Calibri"/>
+              </a:rPr>
+              <a:t>CORE COMPONENT  ·  Core Paper 2</a:t>
+            </a:r>
+          </a:p>
+        </p:txBody>
+      </p:sp>
+      <p:sp>
+        <p:nvSpPr>
+          <p:cNvPr id="3" name="TextBox 2"/>
+          <p:cNvSpPr txBox="1"/>
+          <p:nvPr/>
+        </p:nvSpPr>
+        <p:spPr>
+          <a:xfrm>
+            <a:off x="548640" y="566928"/>
+            <a:ext cx="11094415" cy="822960"/>
+          </a:xfrm>
+          <a:prstGeom prst="rect">
+            <a:avLst/>
+          </a:prstGeom>
+          <a:noFill/>
+        </p:spPr>
+        <p:txBody>
+          <a:bodyPr wrap="square" anchor="ctr" lIns="0" rIns="0" tIns="0" bIns="0"/>
+          <a:lstStyle/>
+          <a:p>
+            <a:pPr algn="l"/>
+            <a:r>
+              <a:rPr sz="3200" b="1" i="0">
+                <a:solidFill>
+                  <a:srgbClr val="03306E"/>
+                </a:solidFill>
+                <a:latin typeface="Cambria"/>
+              </a:rPr>
+              <a:t>Answers</a:t>
+            </a:r>
+          </a:p>
+        </p:txBody>
+      </p:sp>
+      <p:sp>
+        <p:nvSpPr>
+          <p:cNvPr id="4" name="TextBox 3"/>
+          <p:cNvSpPr txBox="1"/>
+          <p:nvPr/>
+        </p:nvSpPr>
+        <p:spPr>
+          <a:xfrm>
+            <a:off x="548640" y="6446520"/>
+            <a:ext cx="8229600" cy="274320"/>
+          </a:xfrm>
+          <a:prstGeom prst="rect">
+            <a:avLst/>
+          </a:prstGeom>
+          <a:noFill/>
+        </p:spPr>
+        <p:txBody>
+          <a:bodyPr wrap="square" anchor="t" lIns="0" rIns="0" tIns="0" bIns="0"/>
+          <a:lstStyle/>
+          <a:p>
+            <a:pPr algn="l"/>
+            <a:r>
+              <a:rPr sz="1000" b="0" i="0">
+                <a:solidFill>
+                  <a:srgbClr val="54595D"/>
+                </a:solidFill>
+                <a:latin typeface="Calibri"/>
+              </a:rPr>
+              <a:t>Digital Software Development T Level  ·  Networks</a:t>
+            </a:r>
+          </a:p>
+        </p:txBody>
+      </p:sp>
+      <p:sp>
+        <p:nvSpPr>
+          <p:cNvPr id="5" name="TextBox 4"/>
+          <p:cNvSpPr txBox="1"/>
+          <p:nvPr/>
+        </p:nvSpPr>
+        <p:spPr>
+          <a:xfrm>
+            <a:off x="10728655" y="6446520"/>
+            <a:ext cx="914400" cy="274320"/>
+          </a:xfrm>
+          <a:prstGeom prst="rect">
+            <a:avLst/>
+          </a:prstGeom>
+          <a:noFill/>
+        </p:spPr>
+        <p:txBody>
+          <a:bodyPr wrap="square" anchor="t" lIns="0" rIns="0" tIns="0" bIns="0"/>
+          <a:lstStyle/>
+          <a:p>
+            <a:pPr algn="r"/>
+            <a:r>
+              <a:rPr sz="1000" b="0" i="0">
+                <a:solidFill>
+                  <a:srgbClr val="54595D"/>
+                </a:solidFill>
+                <a:latin typeface="Calibri"/>
+              </a:rPr>
+              <a:t>14</a:t>
+            </a:r>
+          </a:p>
+        </p:txBody>
+      </p:sp>
+      <p:sp>
+        <p:nvSpPr>
+          <p:cNvPr id="6" name="Oval 5"/>
+          <p:cNvSpPr/>
+          <p:nvPr/>
+        </p:nvSpPr>
+        <p:spPr>
+          <a:xfrm>
+            <a:off x="548640" y="1618488"/>
+            <a:ext cx="411480" cy="411480"/>
+          </a:xfrm>
+          <a:prstGeom prst="ellipse">
+            <a:avLst/>
+          </a:prstGeom>
+          <a:solidFill>
+            <a:srgbClr val="F2B705"/>
+          </a:solidFill>
+          <a:ln>
+            <a:noFill/>
+          </a:ln>
+          <a:effectLst/>
+        </p:spPr>
+        <p:style>
+          <a:lnRef idx="1">
+            <a:schemeClr val="accent1"/>
+          </a:lnRef>
+          <a:fillRef idx="3">
+            <a:schemeClr val="accent1"/>
+          </a:fillRef>
+          <a:effectRef idx="2">
+            <a:schemeClr val="accent1"/>
+          </a:effectRef>
+          <a:fontRef idx="minor">
+            <a:schemeClr val="lt1"/>
+          </a:fontRef>
+        </p:style>
+        <p:txBody>
+          <a:bodyPr rtlCol="0" anchor="ctr" lIns="0" rIns="0" tIns="0" bIns="0"/>
+          <a:lstStyle/>
+          <a:p>
+            <a:pPr algn="ctr"/>
+            <a:r>
+              <a:rPr sz="1400" b="1">
+                <a:solidFill>
+                  <a:srgbClr val="202122"/>
+                </a:solidFill>
+                <a:latin typeface="Calibri"/>
+              </a:rPr>
+              <a:t>1</a:t>
+            </a:r>
+          </a:p>
+        </p:txBody>
+      </p:sp>
+      <p:sp>
+        <p:nvSpPr>
+          <p:cNvPr id="7" name="TextBox 6"/>
+          <p:cNvSpPr txBox="1"/>
+          <p:nvPr/>
+        </p:nvSpPr>
+        <p:spPr>
+          <a:xfrm>
+            <a:off x="1234440" y="1600200"/>
+            <a:ext cx="10408615" cy="1030986"/>
+          </a:xfrm>
+          <a:prstGeom prst="rect">
+            <a:avLst/>
+          </a:prstGeom>
+          <a:noFill/>
+        </p:spPr>
+        <p:txBody>
+          <a:bodyPr wrap="square" anchor="t" lIns="0" rIns="0" tIns="0" bIns="0"/>
+          <a:lstStyle/>
+          <a:p>
+            <a:pPr algn="l"/>
+            <a:r>
+              <a:rPr sz="1800" b="0" i="0">
+                <a:solidFill>
+                  <a:srgbClr val="54595D"/>
+                </a:solidFill>
+                <a:latin typeface="Calibri"/>
+              </a:rPr>
+              <a:t>Which layer handles routing in the OSI model?</a:t>
+            </a:r>
+          </a:p>
+          <a:p>
+            <a:r>
+              <a:rPr sz="1800" b="1">
+                <a:solidFill>
+                  <a:srgbClr val="03306E"/>
+                </a:solidFill>
+                <a:latin typeface="Calibri"/>
+              </a:rPr>
+              <a:t>Layer 3, network.</a:t>
+            </a:r>
+          </a:p>
+        </p:txBody>
+      </p:sp>
+      <p:sp>
+        <p:nvSpPr>
+          <p:cNvPr id="8" name="Oval 7"/>
+          <p:cNvSpPr/>
+          <p:nvPr/>
+        </p:nvSpPr>
+        <p:spPr>
+          <a:xfrm>
+            <a:off x="548640" y="2814066"/>
+            <a:ext cx="411480" cy="411480"/>
+          </a:xfrm>
+          <a:prstGeom prst="ellipse">
+            <a:avLst/>
+          </a:prstGeom>
+          <a:solidFill>
+            <a:srgbClr val="F2B705"/>
+          </a:solidFill>
+          <a:ln>
+            <a:noFill/>
+          </a:ln>
+          <a:effectLst/>
+        </p:spPr>
+        <p:style>
+          <a:lnRef idx="1">
+            <a:schemeClr val="accent1"/>
+          </a:lnRef>
+          <a:fillRef idx="3">
+            <a:schemeClr val="accent1"/>
+          </a:fillRef>
+          <a:effectRef idx="2">
+            <a:schemeClr val="accent1"/>
+          </a:effectRef>
+          <a:fontRef idx="minor">
+            <a:schemeClr val="lt1"/>
+          </a:fontRef>
+        </p:style>
+        <p:txBody>
+          <a:bodyPr rtlCol="0" anchor="ctr" lIns="0" rIns="0" tIns="0" bIns="0"/>
+          <a:lstStyle/>
+          <a:p>
+            <a:pPr algn="ctr"/>
+            <a:r>
+              <a:rPr sz="1400" b="1">
+                <a:solidFill>
+                  <a:srgbClr val="202122"/>
+                </a:solidFill>
+                <a:latin typeface="Calibri"/>
+              </a:rPr>
+              <a:t>2</a:t>
+            </a:r>
+          </a:p>
+        </p:txBody>
+      </p:sp>
+      <p:sp>
+        <p:nvSpPr>
+          <p:cNvPr id="9" name="TextBox 8"/>
+          <p:cNvSpPr txBox="1"/>
+          <p:nvPr/>
+        </p:nvSpPr>
+        <p:spPr>
+          <a:xfrm>
+            <a:off x="1234440" y="2795778"/>
+            <a:ext cx="10408615" cy="1030986"/>
+          </a:xfrm>
+          <a:prstGeom prst="rect">
+            <a:avLst/>
+          </a:prstGeom>
+          <a:noFill/>
+        </p:spPr>
+        <p:txBody>
+          <a:bodyPr wrap="square" anchor="t" lIns="0" rIns="0" tIns="0" bIns="0"/>
+          <a:lstStyle/>
+          <a:p>
+            <a:pPr algn="l"/>
+            <a:r>
+              <a:rPr sz="1800" b="0" i="0">
+                <a:solidFill>
+                  <a:srgbClr val="54595D"/>
+                </a:solidFill>
+                <a:latin typeface="Calibri"/>
+              </a:rPr>
+              <a:t>What is a CRC for?</a:t>
+            </a:r>
+          </a:p>
+          <a:p>
+            <a:r>
+              <a:rPr sz="1800" b="1">
+                <a:solidFill>
+                  <a:srgbClr val="03306E"/>
+                </a:solidFill>
+                <a:latin typeface="Calibri"/>
+              </a:rPr>
+              <a:t>Detecting errors in transmitted data.</a:t>
+            </a:r>
+          </a:p>
+        </p:txBody>
+      </p:sp>
+      <p:sp>
+        <p:nvSpPr>
+          <p:cNvPr id="10" name="Oval 9"/>
+          <p:cNvSpPr/>
+          <p:nvPr/>
+        </p:nvSpPr>
+        <p:spPr>
+          <a:xfrm>
+            <a:off x="548640" y="4009644"/>
+            <a:ext cx="411480" cy="411480"/>
+          </a:xfrm>
+          <a:prstGeom prst="ellipse">
+            <a:avLst/>
+          </a:prstGeom>
+          <a:solidFill>
+            <a:srgbClr val="F2B705"/>
+          </a:solidFill>
+          <a:ln>
+            <a:noFill/>
+          </a:ln>
+          <a:effectLst/>
+        </p:spPr>
+        <p:style>
+          <a:lnRef idx="1">
+            <a:schemeClr val="accent1"/>
+          </a:lnRef>
+          <a:fillRef idx="3">
+            <a:schemeClr val="accent1"/>
+          </a:fillRef>
+          <a:effectRef idx="2">
+            <a:schemeClr val="accent1"/>
+          </a:effectRef>
+          <a:fontRef idx="minor">
+            <a:schemeClr val="lt1"/>
+          </a:fontRef>
+        </p:style>
+        <p:txBody>
+          <a:bodyPr rtlCol="0" anchor="ctr" lIns="0" rIns="0" tIns="0" bIns="0"/>
+          <a:lstStyle/>
+          <a:p>
+            <a:pPr algn="ctr"/>
+            <a:r>
+              <a:rPr sz="1400" b="1">
+                <a:solidFill>
+                  <a:srgbClr val="202122"/>
+                </a:solidFill>
+                <a:latin typeface="Calibri"/>
+              </a:rPr>
+              <a:t>3</a:t>
+            </a:r>
+          </a:p>
+        </p:txBody>
+      </p:sp>
+      <p:sp>
+        <p:nvSpPr>
+          <p:cNvPr id="11" name="TextBox 10"/>
+          <p:cNvSpPr txBox="1"/>
+          <p:nvPr/>
+        </p:nvSpPr>
+        <p:spPr>
+          <a:xfrm>
+            <a:off x="1234440" y="3991356"/>
+            <a:ext cx="10408615" cy="1030986"/>
+          </a:xfrm>
+          <a:prstGeom prst="rect">
+            <a:avLst/>
+          </a:prstGeom>
+          <a:noFill/>
+        </p:spPr>
+        <p:txBody>
+          <a:bodyPr wrap="square" anchor="t" lIns="0" rIns="0" tIns="0" bIns="0"/>
+          <a:lstStyle/>
+          <a:p>
+            <a:pPr algn="l"/>
+            <a:r>
+              <a:rPr sz="1800" b="0" i="0">
+                <a:solidFill>
+                  <a:srgbClr val="54595D"/>
+                </a:solidFill>
+                <a:latin typeface="Calibri"/>
+              </a:rPr>
+              <a:t>Which protocol turns a domain name into an IP address?</a:t>
+            </a:r>
+          </a:p>
+          <a:p>
+            <a:r>
+              <a:rPr sz="1800" b="1">
+                <a:solidFill>
+                  <a:srgbClr val="03306E"/>
+                </a:solidFill>
+                <a:latin typeface="Calibri"/>
+              </a:rPr>
+              <a:t>DNS.</a:t>
+            </a:r>
+          </a:p>
+        </p:txBody>
+      </p:sp>
+      <p:sp>
+        <p:nvSpPr>
+          <p:cNvPr id="12" name="Oval 11"/>
+          <p:cNvSpPr/>
+          <p:nvPr/>
+        </p:nvSpPr>
+        <p:spPr>
+          <a:xfrm>
+            <a:off x="548640" y="5205221"/>
+            <a:ext cx="411480" cy="411480"/>
+          </a:xfrm>
+          <a:prstGeom prst="ellipse">
+            <a:avLst/>
+          </a:prstGeom>
+          <a:solidFill>
+            <a:srgbClr val="F2B705"/>
+          </a:solidFill>
+          <a:ln>
+            <a:noFill/>
+          </a:ln>
+          <a:effectLst/>
+        </p:spPr>
+        <p:style>
+          <a:lnRef idx="1">
+            <a:schemeClr val="accent1"/>
+          </a:lnRef>
+          <a:fillRef idx="3">
+            <a:schemeClr val="accent1"/>
+          </a:fillRef>
+          <a:effectRef idx="2">
+            <a:schemeClr val="accent1"/>
+          </a:effectRef>
+          <a:fontRef idx="minor">
+            <a:schemeClr val="lt1"/>
+          </a:fontRef>
+        </p:style>
+        <p:txBody>
+          <a:bodyPr rtlCol="0" anchor="ctr" lIns="0" rIns="0" tIns="0" bIns="0"/>
+          <a:lstStyle/>
+          <a:p>
+            <a:pPr algn="ctr"/>
+            <a:r>
+              <a:rPr sz="1400" b="1">
+                <a:solidFill>
+                  <a:srgbClr val="202122"/>
+                </a:solidFill>
+                <a:latin typeface="Calibri"/>
+              </a:rPr>
+              <a:t>4</a:t>
+            </a:r>
+          </a:p>
+        </p:txBody>
+      </p:sp>
+      <p:sp>
+        <p:nvSpPr>
+          <p:cNvPr id="13" name="TextBox 12"/>
+          <p:cNvSpPr txBox="1"/>
+          <p:nvPr/>
+        </p:nvSpPr>
+        <p:spPr>
+          <a:xfrm>
+            <a:off x="1234440" y="5186933"/>
+            <a:ext cx="10408615" cy="1030986"/>
+          </a:xfrm>
+          <a:prstGeom prst="rect">
+            <a:avLst/>
+          </a:prstGeom>
+          <a:noFill/>
+        </p:spPr>
+        <p:txBody>
+          <a:bodyPr wrap="square" anchor="t" lIns="0" rIns="0" tIns="0" bIns="0"/>
+          <a:lstStyle/>
+          <a:p>
+            <a:pPr algn="l"/>
+            <a:r>
+              <a:rPr sz="1800" b="0" i="0">
+                <a:solidFill>
+                  <a:srgbClr val="54595D"/>
+                </a:solidFill>
+                <a:latin typeface="Calibri"/>
+              </a:rPr>
+              <a:t>What is latency?</a:t>
+            </a:r>
+          </a:p>
+          <a:p>
+            <a:r>
+              <a:rPr sz="1800" b="1">
+                <a:solidFill>
+                  <a:srgbClr val="03306E"/>
+                </a:solidFill>
+                <a:latin typeface="Calibri"/>
+              </a:rPr>
+              <a:t>The delay before data arrives.</a:t>
+            </a:r>
+          </a:p>
+        </p:txBody>
+      </p:sp>
+    </p:spTree>
+  </p:cSld>
+  <p:clrMapOvr>
+    <a:masterClrMapping/>
+  </p:clrMapOvr>
+</p:sld>
+</file>
+
+<file path=ppt/slides/slide15.xml><?xml version="1.0" encoding="utf-8"?>
+<p:sld xmlns:a="http://schemas.openxmlformats.org/drawingml/2006/main" xmlns:p="http://schemas.openxmlformats.org/presentationml/2006/main" xmlns:r="http://schemas.openxmlformats.org/officeDocument/2006/relationships">
+  <p:cSld>
+    <p:bg>
+      <p:bgPr>
+        <a:solidFill>
+          <a:srgbClr val="FFFFFF"/>
+        </a:solidFill>
+        <a:effectLst/>
+      </p:bgPr>
+    </p:bg>
+    <p:spTree>
+      <p:nvGrpSpPr>
+        <p:cNvPr id="1" name=""/>
+        <p:cNvGrpSpPr/>
+        <p:nvPr/>
+      </p:nvGrpSpPr>
+      <p:grpSpPr/>
+      <p:sp>
+        <p:nvSpPr>
+          <p:cNvPr id="2" name="TextBox 1"/>
+          <p:cNvSpPr txBox="1"/>
+          <p:nvPr/>
+        </p:nvSpPr>
+        <p:spPr>
+          <a:xfrm>
+            <a:off x="548640" y="320040"/>
+            <a:ext cx="11094415" cy="274320"/>
+          </a:xfrm>
+          <a:prstGeom prst="rect">
+            <a:avLst/>
+          </a:prstGeom>
+          <a:noFill/>
+        </p:spPr>
+        <p:txBody>
+          <a:bodyPr wrap="square" anchor="t" lIns="0" rIns="0" tIns="0" bIns="0"/>
+          <a:lstStyle/>
+          <a:p>
+            <a:pPr algn="l"/>
+            <a:r>
+              <a:rPr sz="1100" b="1" i="0">
+                <a:solidFill>
+                  <a:srgbClr val="54595D"/>
+                </a:solidFill>
+                <a:latin typeface="Calibri"/>
+              </a:rPr>
+              <a:t>CORE COMPONENT  ·  Core Paper 2</a:t>
+            </a:r>
+          </a:p>
+        </p:txBody>
+      </p:sp>
+      <p:sp>
+        <p:nvSpPr>
+          <p:cNvPr id="3" name="TextBox 2"/>
+          <p:cNvSpPr txBox="1"/>
+          <p:nvPr/>
+        </p:nvSpPr>
+        <p:spPr>
+          <a:xfrm>
+            <a:off x="548640" y="566928"/>
+            <a:ext cx="11094415" cy="822960"/>
+          </a:xfrm>
+          <a:prstGeom prst="rect">
+            <a:avLst/>
+          </a:prstGeom>
+          <a:noFill/>
+        </p:spPr>
+        <p:txBody>
+          <a:bodyPr wrap="square" anchor="ctr" lIns="0" rIns="0" tIns="0" bIns="0"/>
+          <a:lstStyle/>
+          <a:p>
+            <a:pPr algn="l"/>
+            <a:r>
+              <a:rPr sz="3200" b="1" i="0">
+                <a:solidFill>
+                  <a:srgbClr val="03306E"/>
+                </a:solidFill>
+                <a:latin typeface="Cambria"/>
+              </a:rPr>
+              <a:t>Activity: Trace an API call</a:t>
+            </a:r>
+          </a:p>
+        </p:txBody>
+      </p:sp>
+      <p:sp>
+        <p:nvSpPr>
+          <p:cNvPr id="4" name="TextBox 3"/>
+          <p:cNvSpPr txBox="1"/>
+          <p:nvPr/>
+        </p:nvSpPr>
+        <p:spPr>
+          <a:xfrm>
+            <a:off x="548640" y="6446520"/>
+            <a:ext cx="8229600" cy="274320"/>
+          </a:xfrm>
+          <a:prstGeom prst="rect">
+            <a:avLst/>
+          </a:prstGeom>
+          <a:noFill/>
+        </p:spPr>
+        <p:txBody>
+          <a:bodyPr wrap="square" anchor="t" lIns="0" rIns="0" tIns="0" bIns="0"/>
+          <a:lstStyle/>
+          <a:p>
+            <a:pPr algn="l"/>
+            <a:r>
+              <a:rPr sz="1000" b="0" i="0">
+                <a:solidFill>
+                  <a:srgbClr val="54595D"/>
+                </a:solidFill>
+                <a:latin typeface="Calibri"/>
+              </a:rPr>
+              <a:t>Digital Software Development T Level  ·  Networks</a:t>
+            </a:r>
+          </a:p>
+        </p:txBody>
+      </p:sp>
+      <p:sp>
+        <p:nvSpPr>
+          <p:cNvPr id="5" name="TextBox 4"/>
+          <p:cNvSpPr txBox="1"/>
+          <p:nvPr/>
+        </p:nvSpPr>
+        <p:spPr>
+          <a:xfrm>
+            <a:off x="10728655" y="6446520"/>
+            <a:ext cx="914400" cy="274320"/>
+          </a:xfrm>
+          <a:prstGeom prst="rect">
+            <a:avLst/>
+          </a:prstGeom>
+          <a:noFill/>
+        </p:spPr>
+        <p:txBody>
+          <a:bodyPr wrap="square" anchor="t" lIns="0" rIns="0" tIns="0" bIns="0"/>
+          <a:lstStyle/>
+          <a:p>
+            <a:pPr algn="r"/>
+            <a:r>
+              <a:rPr sz="1000" b="0" i="0">
+                <a:solidFill>
+                  <a:srgbClr val="54595D"/>
+                </a:solidFill>
+                <a:latin typeface="Calibri"/>
+              </a:rPr>
+              <a:t>15</a:t>
+            </a:r>
+          </a:p>
+        </p:txBody>
+      </p:sp>
+      <p:sp>
+        <p:nvSpPr>
+          <p:cNvPr id="6" name="Rounded Rectangle 5"/>
+          <p:cNvSpPr/>
+          <p:nvPr/>
+        </p:nvSpPr>
+        <p:spPr>
+          <a:xfrm>
+            <a:off x="548640" y="1508760"/>
+            <a:ext cx="2011680" cy="457200"/>
+          </a:xfrm>
+          <a:prstGeom prst="roundRect">
+            <a:avLst>
+              <a:gd name="adj" fmla="val 50000"/>
+            </a:avLst>
+          </a:prstGeom>
+          <a:solidFill>
+            <a:srgbClr val="F2B705"/>
+          </a:solidFill>
+          <a:ln>
+            <a:noFill/>
+          </a:ln>
+          <a:effectLst/>
+        </p:spPr>
+        <p:style>
+          <a:lnRef idx="1">
+            <a:schemeClr val="accent1"/>
+          </a:lnRef>
+          <a:fillRef idx="3">
+            <a:schemeClr val="accent1"/>
+          </a:fillRef>
+          <a:effectRef idx="2">
+            <a:schemeClr val="accent1"/>
+          </a:effectRef>
+          <a:fontRef idx="minor">
+            <a:schemeClr val="lt1"/>
+          </a:fontRef>
+        </p:style>
+        <p:txBody>
+          <a:bodyPr rtlCol="0" anchor="ctr"/>
+          <a:lstStyle/>
+          <a:p/>
+        </p:txBody>
+      </p:sp>
+      <p:sp>
+        <p:nvSpPr>
+          <p:cNvPr id="7" name="TextBox 6"/>
+          <p:cNvSpPr txBox="1"/>
+          <p:nvPr/>
+        </p:nvSpPr>
+        <p:spPr>
+          <a:xfrm>
+            <a:off x="548640" y="1508760"/>
+            <a:ext cx="2011680" cy="457200"/>
+          </a:xfrm>
+          <a:prstGeom prst="rect">
+            <a:avLst/>
+          </a:prstGeom>
+          <a:noFill/>
+        </p:spPr>
+        <p:txBody>
+          <a:bodyPr wrap="square" anchor="ctr" lIns="0" rIns="0" tIns="0" bIns="0"/>
+          <a:lstStyle/>
+          <a:p>
+            <a:pPr algn="ctr"/>
+            <a:r>
+              <a:rPr sz="1400" b="1" i="0">
+                <a:solidFill>
+                  <a:srgbClr val="202122"/>
+                </a:solidFill>
+                <a:latin typeface="Calibri"/>
+              </a:rPr>
+              <a:t>20 minutes</a:t>
+            </a:r>
+          </a:p>
+        </p:txBody>
+      </p:sp>
+      <p:sp>
+        <p:nvSpPr>
+          <p:cNvPr id="8" name="TextBox 7"/>
+          <p:cNvSpPr txBox="1"/>
+          <p:nvPr/>
+        </p:nvSpPr>
+        <p:spPr>
+          <a:xfrm>
+            <a:off x="2743200" y="1508760"/>
+            <a:ext cx="4754880" cy="457200"/>
+          </a:xfrm>
+          <a:prstGeom prst="rect">
+            <a:avLst/>
+          </a:prstGeom>
+          <a:noFill/>
+        </p:spPr>
+        <p:txBody>
+          <a:bodyPr wrap="square" anchor="ctr" lIns="0" rIns="0" tIns="0" bIns="0"/>
+          <a:lstStyle/>
+          <a:p>
+            <a:pPr algn="l"/>
+            <a:r>
+              <a:rPr sz="1400" b="0" i="1">
+                <a:solidFill>
+                  <a:srgbClr val="54595D"/>
+                </a:solidFill>
+                <a:latin typeface="Calibri"/>
+              </a:rPr>
+              <a:t>Pairs</a:t>
+            </a:r>
+          </a:p>
+        </p:txBody>
+      </p:sp>
+      <p:sp>
+        <p:nvSpPr>
+          <p:cNvPr id="9" name="Oval 8"/>
+          <p:cNvSpPr/>
+          <p:nvPr/>
+        </p:nvSpPr>
+        <p:spPr>
+          <a:xfrm>
+            <a:off x="548640" y="2482596"/>
+            <a:ext cx="384048" cy="384048"/>
+          </a:xfrm>
+          <a:prstGeom prst="ellipse">
+            <a:avLst/>
+          </a:prstGeom>
+          <a:solidFill>
+            <a:srgbClr val="0645AD"/>
+          </a:solidFill>
+          <a:ln>
+            <a:noFill/>
+          </a:ln>
+          <a:effectLst/>
+        </p:spPr>
+        <p:style>
+          <a:lnRef idx="1">
+            <a:schemeClr val="accent1"/>
+          </a:lnRef>
+          <a:fillRef idx="3">
+            <a:schemeClr val="accent1"/>
+          </a:fillRef>
+          <a:effectRef idx="2">
+            <a:schemeClr val="accent1"/>
+          </a:effectRef>
+          <a:fontRef idx="minor">
+            <a:schemeClr val="lt1"/>
+          </a:fontRef>
+        </p:style>
+        <p:txBody>
+          <a:bodyPr rtlCol="0" anchor="ctr" lIns="0" rIns="0" tIns="0" bIns="0"/>
+          <a:lstStyle/>
+          <a:p>
+            <a:pPr algn="ctr"/>
+            <a:r>
+              <a:rPr sz="1300" b="1">
+                <a:solidFill>
+                  <a:srgbClr val="FFFFFF"/>
+                </a:solidFill>
+                <a:latin typeface="Calibri"/>
+              </a:rPr>
+              <a:t>1</a:t>
+            </a:r>
+          </a:p>
+        </p:txBody>
+      </p:sp>
+      <p:sp>
+        <p:nvSpPr>
+          <p:cNvPr id="10" name="TextBox 9"/>
+          <p:cNvSpPr txBox="1"/>
+          <p:nvPr/>
+        </p:nvSpPr>
+        <p:spPr>
+          <a:xfrm>
+            <a:off x="1143000" y="2240280"/>
+            <a:ext cx="5943600" cy="868680"/>
+          </a:xfrm>
+          <a:prstGeom prst="rect">
+            <a:avLst/>
+          </a:prstGeom>
+          <a:noFill/>
+        </p:spPr>
+        <p:txBody>
+          <a:bodyPr wrap="square" anchor="ctr" lIns="0" rIns="0" tIns="0" bIns="0"/>
+          <a:lstStyle/>
+          <a:p>
+            <a:pPr algn="l"/>
+            <a:r>
+              <a:rPr sz="1700" b="0" i="0">
+                <a:solidFill>
+                  <a:srgbClr val="202122"/>
+                </a:solidFill>
+                <a:latin typeface="Calibri"/>
+              </a:rPr>
+              <a:t>Draw what happens when an app requests weather data from an API.</a:t>
+            </a:r>
+          </a:p>
+        </p:txBody>
+      </p:sp>
+      <p:sp>
+        <p:nvSpPr>
+          <p:cNvPr id="11" name="Oval 10"/>
+          <p:cNvSpPr/>
+          <p:nvPr/>
+        </p:nvSpPr>
+        <p:spPr>
+          <a:xfrm>
+            <a:off x="548640" y="3461004"/>
+            <a:ext cx="384048" cy="384048"/>
+          </a:xfrm>
+          <a:prstGeom prst="ellipse">
+            <a:avLst/>
+          </a:prstGeom>
+          <a:solidFill>
+            <a:srgbClr val="0645AD"/>
+          </a:solidFill>
+          <a:ln>
+            <a:noFill/>
+          </a:ln>
+          <a:effectLst/>
+        </p:spPr>
+        <p:style>
+          <a:lnRef idx="1">
+            <a:schemeClr val="accent1"/>
+          </a:lnRef>
+          <a:fillRef idx="3">
+            <a:schemeClr val="accent1"/>
+          </a:fillRef>
+          <a:effectRef idx="2">
+            <a:schemeClr val="accent1"/>
+          </a:effectRef>
+          <a:fontRef idx="minor">
+            <a:schemeClr val="lt1"/>
+          </a:fontRef>
+        </p:style>
+        <p:txBody>
+          <a:bodyPr rtlCol="0" anchor="ctr" lIns="0" rIns="0" tIns="0" bIns="0"/>
+          <a:lstStyle/>
+          <a:p>
+            <a:pPr algn="ctr"/>
+            <a:r>
+              <a:rPr sz="1300" b="1">
+                <a:solidFill>
+                  <a:srgbClr val="FFFFFF"/>
+                </a:solidFill>
+                <a:latin typeface="Calibri"/>
+              </a:rPr>
+              <a:t>2</a:t>
+            </a:r>
+          </a:p>
+        </p:txBody>
+      </p:sp>
+      <p:sp>
+        <p:nvSpPr>
+          <p:cNvPr id="12" name="TextBox 11"/>
+          <p:cNvSpPr txBox="1"/>
+          <p:nvPr/>
+        </p:nvSpPr>
+        <p:spPr>
+          <a:xfrm>
+            <a:off x="1143000" y="3218688"/>
+            <a:ext cx="5943600" cy="868680"/>
+          </a:xfrm>
+          <a:prstGeom prst="rect">
+            <a:avLst/>
+          </a:prstGeom>
+          <a:noFill/>
+        </p:spPr>
+        <p:txBody>
+          <a:bodyPr wrap="square" anchor="ctr" lIns="0" rIns="0" tIns="0" bIns="0"/>
+          <a:lstStyle/>
+          <a:p>
+            <a:pPr algn="l"/>
+            <a:r>
+              <a:rPr sz="1700" b="0" i="0">
+                <a:solidFill>
+                  <a:srgbClr val="202122"/>
+                </a:solidFill>
+                <a:latin typeface="Calibri"/>
+              </a:rPr>
+              <a:t>Label the protocols used (DNS, HTTPS, TCP/IP).</a:t>
+            </a:r>
+          </a:p>
+        </p:txBody>
+      </p:sp>
+      <p:sp>
+        <p:nvSpPr>
+          <p:cNvPr id="13" name="Oval 12"/>
+          <p:cNvSpPr/>
+          <p:nvPr/>
+        </p:nvSpPr>
+        <p:spPr>
+          <a:xfrm>
+            <a:off x="548640" y="4439412"/>
+            <a:ext cx="384048" cy="384048"/>
+          </a:xfrm>
+          <a:prstGeom prst="ellipse">
+            <a:avLst/>
+          </a:prstGeom>
+          <a:solidFill>
+            <a:srgbClr val="0645AD"/>
+          </a:solidFill>
+          <a:ln>
+            <a:noFill/>
+          </a:ln>
+          <a:effectLst/>
+        </p:spPr>
+        <p:style>
+          <a:lnRef idx="1">
+            <a:schemeClr val="accent1"/>
+          </a:lnRef>
+          <a:fillRef idx="3">
+            <a:schemeClr val="accent1"/>
+          </a:fillRef>
+          <a:effectRef idx="2">
+            <a:schemeClr val="accent1"/>
+          </a:effectRef>
+          <a:fontRef idx="minor">
+            <a:schemeClr val="lt1"/>
+          </a:fontRef>
+        </p:style>
+        <p:txBody>
+          <a:bodyPr rtlCol="0" anchor="ctr" lIns="0" rIns="0" tIns="0" bIns="0"/>
+          <a:lstStyle/>
+          <a:p>
+            <a:pPr algn="ctr"/>
+            <a:r>
+              <a:rPr sz="1300" b="1">
+                <a:solidFill>
+                  <a:srgbClr val="FFFFFF"/>
+                </a:solidFill>
+                <a:latin typeface="Calibri"/>
+              </a:rPr>
+              <a:t>3</a:t>
+            </a:r>
+          </a:p>
+        </p:txBody>
+      </p:sp>
+      <p:sp>
+        <p:nvSpPr>
+          <p:cNvPr id="14" name="TextBox 13"/>
+          <p:cNvSpPr txBox="1"/>
+          <p:nvPr/>
+        </p:nvSpPr>
+        <p:spPr>
+          <a:xfrm>
+            <a:off x="1143000" y="4197096"/>
+            <a:ext cx="5943600" cy="868680"/>
+          </a:xfrm>
+          <a:prstGeom prst="rect">
+            <a:avLst/>
+          </a:prstGeom>
+          <a:noFill/>
+        </p:spPr>
+        <p:txBody>
+          <a:bodyPr wrap="square" anchor="ctr" lIns="0" rIns="0" tIns="0" bIns="0"/>
+          <a:lstStyle/>
+          <a:p>
+            <a:pPr algn="l"/>
+            <a:r>
+              <a:rPr sz="1700" b="0" i="0">
+                <a:solidFill>
+                  <a:srgbClr val="202122"/>
+                </a:solidFill>
+                <a:latin typeface="Calibri"/>
+              </a:rPr>
+              <a:t>Show which OSI layers are involved.</a:t>
+            </a:r>
+          </a:p>
+        </p:txBody>
+      </p:sp>
+      <p:sp>
+        <p:nvSpPr>
+          <p:cNvPr id="15" name="Oval 14"/>
+          <p:cNvSpPr/>
+          <p:nvPr/>
+        </p:nvSpPr>
+        <p:spPr>
+          <a:xfrm>
+            <a:off x="548640" y="5417820"/>
+            <a:ext cx="384048" cy="384048"/>
+          </a:xfrm>
+          <a:prstGeom prst="ellipse">
+            <a:avLst/>
+          </a:prstGeom>
+          <a:solidFill>
+            <a:srgbClr val="0645AD"/>
+          </a:solidFill>
+          <a:ln>
+            <a:noFill/>
+          </a:ln>
+          <a:effectLst/>
+        </p:spPr>
+        <p:style>
+          <a:lnRef idx="1">
+            <a:schemeClr val="accent1"/>
+          </a:lnRef>
+          <a:fillRef idx="3">
+            <a:schemeClr val="accent1"/>
+          </a:fillRef>
+          <a:effectRef idx="2">
+            <a:schemeClr val="accent1"/>
+          </a:effectRef>
+          <a:fontRef idx="minor">
+            <a:schemeClr val="lt1"/>
+          </a:fontRef>
+        </p:style>
+        <p:txBody>
+          <a:bodyPr rtlCol="0" anchor="ctr" lIns="0" rIns="0" tIns="0" bIns="0"/>
+          <a:lstStyle/>
+          <a:p>
+            <a:pPr algn="ctr"/>
+            <a:r>
+              <a:rPr sz="1300" b="1">
+                <a:solidFill>
+                  <a:srgbClr val="FFFFFF"/>
+                </a:solidFill>
+                <a:latin typeface="Calibri"/>
+              </a:rPr>
+              <a:t>4</a:t>
+            </a:r>
+          </a:p>
+        </p:txBody>
+      </p:sp>
+      <p:sp>
+        <p:nvSpPr>
+          <p:cNvPr id="16" name="TextBox 15"/>
+          <p:cNvSpPr txBox="1"/>
+          <p:nvPr/>
+        </p:nvSpPr>
+        <p:spPr>
+          <a:xfrm>
+            <a:off x="1143000" y="5175504"/>
+            <a:ext cx="5943600" cy="868680"/>
+          </a:xfrm>
+          <a:prstGeom prst="rect">
+            <a:avLst/>
+          </a:prstGeom>
+          <a:noFill/>
+        </p:spPr>
+        <p:txBody>
+          <a:bodyPr wrap="square" anchor="ctr" lIns="0" rIns="0" tIns="0" bIns="0"/>
+          <a:lstStyle/>
+          <a:p>
+            <a:pPr algn="l"/>
+            <a:r>
+              <a:rPr sz="1700" b="0" i="0">
+                <a:solidFill>
+                  <a:srgbClr val="202122"/>
+                </a:solidFill>
+                <a:latin typeface="Calibri"/>
+              </a:rPr>
+              <a:t>Suggest what the app should do if packets are lost.</a:t>
+            </a:r>
+          </a:p>
+        </p:txBody>
+      </p:sp>
+      <p:sp>
+        <p:nvSpPr>
+          <p:cNvPr id="17" name="Rounded Rectangle 16"/>
+          <p:cNvSpPr/>
+          <p:nvPr/>
+        </p:nvSpPr>
+        <p:spPr>
+          <a:xfrm>
+            <a:off x="7772400" y="1508760"/>
+            <a:ext cx="3867912" cy="4572000"/>
+          </a:xfrm>
+          <a:prstGeom prst="roundRect">
+            <a:avLst>
+              <a:gd name="adj" fmla="val 8000"/>
+            </a:avLst>
+          </a:prstGeom>
+          <a:solidFill>
+            <a:srgbClr val="EAF3FF"/>
+          </a:solidFill>
+          <a:ln>
+            <a:noFill/>
+          </a:ln>
+          <a:effectLst/>
+        </p:spPr>
+        <p:style>
+          <a:lnRef idx="1">
+            <a:schemeClr val="accent1"/>
+          </a:lnRef>
+          <a:fillRef idx="3">
+            <a:schemeClr val="accent1"/>
+          </a:fillRef>
+          <a:effectRef idx="2">
+            <a:schemeClr val="accent1"/>
+          </a:effectRef>
+          <a:fontRef idx="minor">
+            <a:schemeClr val="lt1"/>
+          </a:fontRef>
+        </p:style>
+        <p:txBody>
+          <a:bodyPr rtlCol="0" anchor="ctr"/>
+          <a:lstStyle/>
+          <a:p/>
+        </p:txBody>
+      </p:sp>
+      <p:sp>
+        <p:nvSpPr>
+          <p:cNvPr id="18" name="TextBox 17"/>
+          <p:cNvSpPr txBox="1"/>
+          <p:nvPr/>
+        </p:nvSpPr>
+        <p:spPr>
+          <a:xfrm>
+            <a:off x="8046720" y="1737360"/>
+            <a:ext cx="3291840" cy="365760"/>
+          </a:xfrm>
+          <a:prstGeom prst="rect">
+            <a:avLst/>
+          </a:prstGeom>
+          <a:noFill/>
+        </p:spPr>
+        <p:txBody>
+          <a:bodyPr wrap="square" anchor="t" lIns="0" rIns="0" tIns="0" bIns="0"/>
+          <a:lstStyle/>
+          <a:p>
+            <a:pPr algn="l"/>
+            <a:r>
+              <a:rPr sz="1300" b="1" i="0">
+                <a:solidFill>
+                  <a:srgbClr val="0645AD"/>
+                </a:solidFill>
+                <a:latin typeface="Calibri"/>
+              </a:rPr>
+              <a:t>SUCCESS CRITERIA</a:t>
+            </a:r>
+          </a:p>
+        </p:txBody>
+      </p:sp>
+      <p:sp>
+        <p:nvSpPr>
+          <p:cNvPr id="19" name="TextBox 18"/>
+          <p:cNvSpPr txBox="1"/>
+          <p:nvPr/>
+        </p:nvSpPr>
+        <p:spPr>
+          <a:xfrm>
+            <a:off x="8046720" y="2240280"/>
+            <a:ext cx="3337560" cy="3657600"/>
+          </a:xfrm>
+          <a:prstGeom prst="rect">
+            <a:avLst/>
+          </a:prstGeom>
+          <a:noFill/>
+        </p:spPr>
+        <p:txBody>
+          <a:bodyPr wrap="square" lIns="0" rIns="0" tIns="0" bIns="0">
+            <a:spAutoFit/>
+          </a:bodyPr>
+          <a:lstStyle/>
+          <a:p>
+            <a:pPr marL="274320" indent="-274320">
+              <a:spcAft>
+                <a:spcPts val="810"/>
+              </a:spcAft>
+              <a:buClr>
+                <a:srgbClr val="0645AD"/>
+              </a:buClr>
+              <a:buFont typeface="Arial"/>
+              <a:buChar char="•"/>
+            </a:pPr>
+            <a:r>
+              <a:rPr sz="1800" b="0">
+                <a:solidFill>
+                  <a:srgbClr val="202122"/>
+                </a:solidFill>
+                <a:latin typeface="Calibri"/>
+              </a:rPr>
+              <a:t>DNS lookup included</a:t>
+            </a:r>
+          </a:p>
+          <a:p>
+            <a:pPr marL="274320" indent="-274320">
+              <a:spcAft>
+                <a:spcPts val="810"/>
+              </a:spcAft>
+              <a:buClr>
+                <a:srgbClr val="0645AD"/>
+              </a:buClr>
+              <a:buFont typeface="Arial"/>
+              <a:buChar char="•"/>
+            </a:pPr>
+            <a:r>
+              <a:rPr sz="1800" b="0">
+                <a:solidFill>
+                  <a:srgbClr val="202122"/>
+                </a:solidFill>
+                <a:latin typeface="Calibri"/>
+              </a:rPr>
+              <a:t>Layers in the right order</a:t>
+            </a:r>
+          </a:p>
+          <a:p>
+            <a:pPr marL="274320" indent="-274320">
+              <a:spcAft>
+                <a:spcPts val="810"/>
+              </a:spcAft>
+              <a:buClr>
+                <a:srgbClr val="0645AD"/>
+              </a:buClr>
+              <a:buFont typeface="Arial"/>
+              <a:buChar char="•"/>
+            </a:pPr>
+            <a:r>
+              <a:rPr sz="1800" b="0">
+                <a:solidFill>
+                  <a:srgbClr val="202122"/>
+                </a:solidFill>
+                <a:latin typeface="Calibri"/>
+              </a:rPr>
+              <a:t>Sensible error handling</a:t>
+            </a:r>
+          </a:p>
+        </p:txBody>
+      </p:sp>
+    </p:spTree>
+  </p:cSld>
+  <p:clrMapOvr>
+    <a:masterClrMapping/>
+  </p:clrMapOvr>
+</p:sld>
+</file>
+
+<file path=ppt/slides/slide16.xml><?xml version="1.0" encoding="utf-8"?>
+<p:sld xmlns:a="http://schemas.openxmlformats.org/drawingml/2006/main" xmlns:p="http://schemas.openxmlformats.org/presentationml/2006/main" xmlns:r="http://schemas.openxmlformats.org/officeDocument/2006/relationships">
+  <p:cSld>
+    <p:bg>
+      <p:bgPr>
+        <a:solidFill>
           <a:srgbClr val="03306E"/>
         </a:solidFill>
         <a:effectLst/>
@@ -5299,22 +8733,93 @@
       </p:sp>
       <p:sp>
         <p:nvSpPr>
-          <p:cNvPr id="6" name="Rounded Rectangle 5"/>
+          <p:cNvPr id="6" name="TextBox 5"/>
+          <p:cNvSpPr txBox="1"/>
+          <p:nvPr/>
+        </p:nvSpPr>
+        <p:spPr>
+          <a:xfrm>
+            <a:off x="548640" y="1554480"/>
+            <a:ext cx="6720840" cy="4617720"/>
+          </a:xfrm>
+          <a:prstGeom prst="rect">
+            <a:avLst/>
+          </a:prstGeom>
+          <a:noFill/>
+        </p:spPr>
+        <p:txBody>
+          <a:bodyPr wrap="square" lIns="0" rIns="0" tIns="0" bIns="0">
+            <a:spAutoFit/>
+          </a:bodyPr>
+          <a:lstStyle/>
+          <a:p>
+            <a:pPr>
+              <a:spcAft>
+                <a:spcPts val="1320"/>
+              </a:spcAft>
+            </a:pPr>
+            <a:r>
+              <a:rPr sz="2200" b="0">
+                <a:solidFill>
+                  <a:srgbClr val="202122"/>
+                </a:solidFill>
+                <a:latin typeface="Calibri"/>
+              </a:rPr>
+              <a:t>Networks range from PANs (around one person) and LANs (one site) to MANs (a city) and WANs (countries). A VPN creates a private, encrypted connection across a public network.</a:t>
+            </a:r>
+          </a:p>
+          <a:p>
+            <a:pPr>
+              <a:spcAft>
+                <a:spcPts val="1320"/>
+              </a:spcAft>
+            </a:pPr>
+            <a:r>
+              <a:rPr sz="2200" b="0">
+                <a:solidFill>
+                  <a:srgbClr val="202122"/>
+                </a:solidFill>
+                <a:latin typeface="Calibri"/>
+              </a:rPr>
+              <a:t>In a star topology every device connects to a central switch; in a mesh devices connect to many others for resilience; a tree links stars in a hierarchy.</a:t>
+            </a:r>
+          </a:p>
+          <a:p>
+            <a:pPr>
+              <a:spcAft>
+                <a:spcPts val="1320"/>
+              </a:spcAft>
+            </a:pPr>
+            <a:r>
+              <a:rPr sz="2200" b="0">
+                <a:solidFill>
+                  <a:srgbClr val="202122"/>
+                </a:solidFill>
+                <a:latin typeface="Calibri"/>
+              </a:rPr>
+              <a:t>In the client-server model, servers provide services such as APIs and databases to clients, which is how most apps work. In peer-to-peer, devices are equal and share directly.</a:t>
+            </a:r>
+          </a:p>
+        </p:txBody>
+      </p:sp>
+      <p:sp>
+        <p:nvSpPr>
+          <p:cNvPr id="7" name="Rounded Rectangle 6"/>
           <p:cNvSpPr/>
           <p:nvPr/>
         </p:nvSpPr>
         <p:spPr>
           <a:xfrm>
-            <a:off x="548640" y="1600200"/>
-            <a:ext cx="5410047" cy="2148840"/>
+            <a:off x="7772400" y="1554480"/>
+            <a:ext cx="3867912" cy="4526280"/>
           </a:xfrm>
           <a:prstGeom prst="roundRect">
             <a:avLst>
-              <a:gd name="adj" fmla="val 6000"/>
+              <a:gd name="adj" fmla="val 8000"/>
             </a:avLst>
           </a:prstGeom>
           <a:solidFill>
-            <a:srgbClr val="EAF3FF"/>
+            <a:srgbClr val="03306E"/>
           </a:solidFill>
           <a:ln>
             <a:noFill/>
@@ -5343,14 +8848,14 @@
       </p:sp>
       <p:sp>
         <p:nvSpPr>
-          <p:cNvPr id="7" name="Oval 6"/>
+          <p:cNvPr id="8" name="Oval 7"/>
           <p:cNvSpPr/>
           <p:nvPr/>
         </p:nvSpPr>
         <p:spPr>
           <a:xfrm>
-            <a:off x="777240" y="1828800"/>
-            <a:ext cx="457200" cy="457200"/>
+            <a:off x="8046720" y="1828800"/>
+            <a:ext cx="548640" cy="548640"/>
           </a:xfrm>
           <a:prstGeom prst="ellipse">
             <a:avLst/>
@@ -5383,46 +8888,13 @@
           <a:p>
             <a:pPr algn="ctr"/>
             <a:r>
-              <a:rPr sz="1500" b="1">
+              <a:rPr sz="1300" b="1">
                 <a:solidFill>
                   <a:srgbClr val="202122"/>
                 </a:solidFill>
                 <a:latin typeface="Calibri"/>
               </a:rPr>
-              <a:t>1</a:t>
-            </a:r>
-          </a:p>
-        </p:txBody>
-      </p:sp>
-      <p:sp>
-        <p:nvSpPr>
-          <p:cNvPr id="8" name="TextBox 7"/>
-          <p:cNvSpPr txBox="1"/>
-          <p:nvPr/>
-        </p:nvSpPr>
-        <p:spPr>
-          <a:xfrm>
-            <a:off x="1371600" y="1801368"/>
-            <a:ext cx="4404207" cy="512064"/>
-          </a:xfrm>
-          <a:prstGeom prst="rect">
-            <a:avLst/>
-          </a:prstGeom>
-          <a:noFill/>
-        </p:spPr>
-        <p:txBody>
-          <a:bodyPr wrap="square" anchor="ctr" lIns="0" rIns="0" tIns="0" bIns="0"/>
-          <a:lstStyle/>
-          <a:p>
-            <a:pPr algn="l"/>
-            <a:r>
-              <a:rPr sz="1900" b="1" i="0">
-                <a:solidFill>
-                  <a:srgbClr val="03306E"/>
-                </a:solidFill>
-                <a:latin typeface="Calibri"/>
-              </a:rPr>
-              <a:t>PAN, LAN, MAN, WAN</a:t>
+              <a:t>e.g.</a:t>
             </a:r>
           </a:p>
         </p:txBody>
@@ -5435,8 +8907,8 @@
         </p:nvSpPr>
         <p:spPr>
           <a:xfrm>
-            <a:off x="777240" y="2468880"/>
-            <a:ext cx="4952847" cy="1143000"/>
+            <a:off x="8046720" y="2560320"/>
+            <a:ext cx="3291840" cy="365760"/>
           </a:xfrm>
           <a:prstGeom prst="rect">
             <a:avLst/>
@@ -5449,124 +8921,27 @@
           <a:p>
             <a:pPr algn="l"/>
             <a:r>
-              <a:rPr sz="2000" b="0" i="0">
-                <a:solidFill>
-                  <a:srgbClr val="202122"/>
-                </a:solidFill>
-                <a:latin typeface="Calibri"/>
-              </a:rPr>
-              <a:t>Personal, local, metropolitan and wide area networks.</a:t>
-            </a:r>
-          </a:p>
-        </p:txBody>
-      </p:sp>
-      <p:sp>
-        <p:nvSpPr>
-          <p:cNvPr id="10" name="Rounded Rectangle 9"/>
-          <p:cNvSpPr/>
-          <p:nvPr/>
-        </p:nvSpPr>
-        <p:spPr>
-          <a:xfrm>
-            <a:off x="6233007" y="1600200"/>
-            <a:ext cx="5410047" cy="2148840"/>
-          </a:xfrm>
-          <a:prstGeom prst="roundRect">
-            <a:avLst>
-              <a:gd name="adj" fmla="val 6000"/>
-            </a:avLst>
-          </a:prstGeom>
-          <a:solidFill>
-            <a:srgbClr val="EAF3FF"/>
-          </a:solidFill>
-          <a:ln>
-            <a:noFill/>
-          </a:ln>
-          <a:effectLst/>
-        </p:spPr>
-        <p:style>
-          <a:lnRef idx="1">
-            <a:schemeClr val="accent1"/>
-          </a:lnRef>
-          <a:fillRef idx="3">
-            <a:schemeClr val="accent1"/>
-          </a:fillRef>
-          <a:effectRef idx="2">
-            <a:schemeClr val="accent1"/>
-          </a:effectRef>
-          <a:fontRef idx="minor">
-            <a:schemeClr val="lt1"/>
-          </a:fontRef>
-        </p:style>
-        <p:txBody>
-          <a:bodyPr rtlCol="0" anchor="ctr"/>
-          <a:lstStyle/>
-          <a:p/>
-        </p:txBody>
-      </p:sp>
-      <p:sp>
-        <p:nvSpPr>
-          <p:cNvPr id="11" name="Oval 10"/>
-          <p:cNvSpPr/>
-          <p:nvPr/>
-        </p:nvSpPr>
-        <p:spPr>
-          <a:xfrm>
-            <a:off x="6461607" y="1828800"/>
-            <a:ext cx="457200" cy="457200"/>
-          </a:xfrm>
-          <a:prstGeom prst="ellipse">
-            <a:avLst/>
-          </a:prstGeom>
-          <a:solidFill>
-            <a:srgbClr val="F2B705"/>
-          </a:solidFill>
-          <a:ln>
-            <a:noFill/>
-          </a:ln>
-          <a:effectLst/>
-        </p:spPr>
-        <p:style>
-          <a:lnRef idx="1">
-            <a:schemeClr val="accent1"/>
-          </a:lnRef>
-          <a:fillRef idx="3">
-            <a:schemeClr val="accent1"/>
-          </a:fillRef>
-          <a:effectRef idx="2">
-            <a:schemeClr val="accent1"/>
-          </a:effectRef>
-          <a:fontRef idx="minor">
-            <a:schemeClr val="lt1"/>
-          </a:fontRef>
-        </p:style>
-        <p:txBody>
-          <a:bodyPr rtlCol="0" anchor="ctr" lIns="0" rIns="0" tIns="0" bIns="0"/>
-          <a:lstStyle/>
-          <a:p>
-            <a:pPr algn="ctr"/>
-            <a:r>
-              <a:rPr sz="1500" b="1">
-                <a:solidFill>
-                  <a:srgbClr val="202122"/>
-                </a:solidFill>
-                <a:latin typeface="Calibri"/>
-              </a:rPr>
-              <a:t>2</a:t>
-            </a:r>
-          </a:p>
-        </p:txBody>
-      </p:sp>
-      <p:sp>
-        <p:nvSpPr>
-          <p:cNvPr id="12" name="TextBox 11"/>
+              <a:rPr sz="1300" b="1" i="0">
+                <a:solidFill>
+                  <a:srgbClr val="A9C8F0"/>
+                </a:solidFill>
+                <a:latin typeface="Calibri"/>
+              </a:rPr>
+              <a:t>EXAMPLE</a:t>
+            </a:r>
+          </a:p>
+        </p:txBody>
+      </p:sp>
+      <p:sp>
+        <p:nvSpPr>
+          <p:cNvPr id="10" name="TextBox 9"/>
           <p:cNvSpPr txBox="1"/>
           <p:nvPr/>
         </p:nvSpPr>
         <p:spPr>
           <a:xfrm>
-            <a:off x="7055967" y="1801368"/>
-            <a:ext cx="4404207" cy="512064"/>
+            <a:off x="8046720" y="2971800"/>
+            <a:ext cx="3291840" cy="2971800"/>
           </a:xfrm>
           <a:prstGeom prst="rect">
             <a:avLst/>
@@ -5574,377 +8949,18 @@
           <a:noFill/>
         </p:spPr>
         <p:txBody>
-          <a:bodyPr wrap="square" anchor="ctr" lIns="0" rIns="0" tIns="0" bIns="0"/>
+          <a:bodyPr wrap="square" anchor="t" lIns="0" rIns="0" tIns="0" bIns="0"/>
           <a:lstStyle/>
           <a:p>
             <a:pPr algn="l"/>
             <a:r>
-              <a:rPr sz="1900" b="1" i="0">
-                <a:solidFill>
-                  <a:srgbClr val="03306E"/>
-                </a:solidFill>
-                <a:latin typeface="Calibri"/>
-              </a:rPr>
-              <a:t>VPN</a:t>
-            </a:r>
-          </a:p>
-        </p:txBody>
-      </p:sp>
-      <p:sp>
-        <p:nvSpPr>
-          <p:cNvPr id="13" name="TextBox 12"/>
-          <p:cNvSpPr txBox="1"/>
-          <p:nvPr/>
-        </p:nvSpPr>
-        <p:spPr>
-          <a:xfrm>
-            <a:off x="6461607" y="2468880"/>
-            <a:ext cx="4952847" cy="1143000"/>
-          </a:xfrm>
-          <a:prstGeom prst="rect">
-            <a:avLst/>
-          </a:prstGeom>
-          <a:noFill/>
-        </p:spPr>
-        <p:txBody>
-          <a:bodyPr wrap="square" anchor="t" lIns="0" rIns="0" tIns="0" bIns="0"/>
-          <a:lstStyle/>
-          <a:p>
-            <a:pPr algn="l"/>
-            <a:r>
-              <a:rPr sz="2000" b="0" i="0">
-                <a:solidFill>
-                  <a:srgbClr val="202122"/>
-                </a:solidFill>
-                <a:latin typeface="Calibri"/>
-              </a:rPr>
-              <a:t>A private, encrypted connection across a public network.</a:t>
-            </a:r>
-          </a:p>
-        </p:txBody>
-      </p:sp>
-      <p:sp>
-        <p:nvSpPr>
-          <p:cNvPr id="14" name="Rounded Rectangle 13"/>
-          <p:cNvSpPr/>
-          <p:nvPr/>
-        </p:nvSpPr>
-        <p:spPr>
-          <a:xfrm>
-            <a:off x="548640" y="4023360"/>
-            <a:ext cx="5410047" cy="2148840"/>
-          </a:xfrm>
-          <a:prstGeom prst="roundRect">
-            <a:avLst>
-              <a:gd name="adj" fmla="val 6000"/>
-            </a:avLst>
-          </a:prstGeom>
-          <a:solidFill>
-            <a:srgbClr val="EAF3FF"/>
-          </a:solidFill>
-          <a:ln>
-            <a:noFill/>
-          </a:ln>
-          <a:effectLst/>
-        </p:spPr>
-        <p:style>
-          <a:lnRef idx="1">
-            <a:schemeClr val="accent1"/>
-          </a:lnRef>
-          <a:fillRef idx="3">
-            <a:schemeClr val="accent1"/>
-          </a:fillRef>
-          <a:effectRef idx="2">
-            <a:schemeClr val="accent1"/>
-          </a:effectRef>
-          <a:fontRef idx="minor">
-            <a:schemeClr val="lt1"/>
-          </a:fontRef>
-        </p:style>
-        <p:txBody>
-          <a:bodyPr rtlCol="0" anchor="ctr"/>
-          <a:lstStyle/>
-          <a:p/>
-        </p:txBody>
-      </p:sp>
-      <p:sp>
-        <p:nvSpPr>
-          <p:cNvPr id="15" name="Oval 14"/>
-          <p:cNvSpPr/>
-          <p:nvPr/>
-        </p:nvSpPr>
-        <p:spPr>
-          <a:xfrm>
-            <a:off x="777240" y="4251960"/>
-            <a:ext cx="457200" cy="457200"/>
-          </a:xfrm>
-          <a:prstGeom prst="ellipse">
-            <a:avLst/>
-          </a:prstGeom>
-          <a:solidFill>
-            <a:srgbClr val="F2B705"/>
-          </a:solidFill>
-          <a:ln>
-            <a:noFill/>
-          </a:ln>
-          <a:effectLst/>
-        </p:spPr>
-        <p:style>
-          <a:lnRef idx="1">
-            <a:schemeClr val="accent1"/>
-          </a:lnRef>
-          <a:fillRef idx="3">
-            <a:schemeClr val="accent1"/>
-          </a:fillRef>
-          <a:effectRef idx="2">
-            <a:schemeClr val="accent1"/>
-          </a:effectRef>
-          <a:fontRef idx="minor">
-            <a:schemeClr val="lt1"/>
-          </a:fontRef>
-        </p:style>
-        <p:txBody>
-          <a:bodyPr rtlCol="0" anchor="ctr" lIns="0" rIns="0" tIns="0" bIns="0"/>
-          <a:lstStyle/>
-          <a:p>
-            <a:pPr algn="ctr"/>
-            <a:r>
-              <a:rPr sz="1500" b="1">
-                <a:solidFill>
-                  <a:srgbClr val="202122"/>
-                </a:solidFill>
-                <a:latin typeface="Calibri"/>
-              </a:rPr>
-              <a:t>3</a:t>
-            </a:r>
-          </a:p>
-        </p:txBody>
-      </p:sp>
-      <p:sp>
-        <p:nvSpPr>
-          <p:cNvPr id="16" name="TextBox 15"/>
-          <p:cNvSpPr txBox="1"/>
-          <p:nvPr/>
-        </p:nvSpPr>
-        <p:spPr>
-          <a:xfrm>
-            <a:off x="1371600" y="4224528"/>
-            <a:ext cx="4404207" cy="512064"/>
-          </a:xfrm>
-          <a:prstGeom prst="rect">
-            <a:avLst/>
-          </a:prstGeom>
-          <a:noFill/>
-        </p:spPr>
-        <p:txBody>
-          <a:bodyPr wrap="square" anchor="ctr" lIns="0" rIns="0" tIns="0" bIns="0"/>
-          <a:lstStyle/>
-          <a:p>
-            <a:pPr algn="l"/>
-            <a:r>
-              <a:rPr sz="1900" b="1" i="0">
-                <a:solidFill>
-                  <a:srgbClr val="03306E"/>
-                </a:solidFill>
-                <a:latin typeface="Calibri"/>
-              </a:rPr>
-              <a:t>Topologies</a:t>
-            </a:r>
-          </a:p>
-        </p:txBody>
-      </p:sp>
-      <p:sp>
-        <p:nvSpPr>
-          <p:cNvPr id="17" name="TextBox 16"/>
-          <p:cNvSpPr txBox="1"/>
-          <p:nvPr/>
-        </p:nvSpPr>
-        <p:spPr>
-          <a:xfrm>
-            <a:off x="777240" y="4892040"/>
-            <a:ext cx="4952847" cy="1143000"/>
-          </a:xfrm>
-          <a:prstGeom prst="rect">
-            <a:avLst/>
-          </a:prstGeom>
-          <a:noFill/>
-        </p:spPr>
-        <p:txBody>
-          <a:bodyPr wrap="square" anchor="t" lIns="0" rIns="0" tIns="0" bIns="0"/>
-          <a:lstStyle/>
-          <a:p>
-            <a:pPr algn="l"/>
-            <a:r>
-              <a:rPr sz="2000" b="0" i="0">
-                <a:solidFill>
-                  <a:srgbClr val="202122"/>
-                </a:solidFill>
-                <a:latin typeface="Calibri"/>
-              </a:rPr>
-              <a:t>Star, mesh and tree; logical versus physical.</a:t>
-            </a:r>
-          </a:p>
-        </p:txBody>
-      </p:sp>
-      <p:sp>
-        <p:nvSpPr>
-          <p:cNvPr id="18" name="Rounded Rectangle 17"/>
-          <p:cNvSpPr/>
-          <p:nvPr/>
-        </p:nvSpPr>
-        <p:spPr>
-          <a:xfrm>
-            <a:off x="6233007" y="4023360"/>
-            <a:ext cx="5410047" cy="2148840"/>
-          </a:xfrm>
-          <a:prstGeom prst="roundRect">
-            <a:avLst>
-              <a:gd name="adj" fmla="val 6000"/>
-            </a:avLst>
-          </a:prstGeom>
-          <a:solidFill>
-            <a:srgbClr val="EAF3FF"/>
-          </a:solidFill>
-          <a:ln>
-            <a:noFill/>
-          </a:ln>
-          <a:effectLst/>
-        </p:spPr>
-        <p:style>
-          <a:lnRef idx="1">
-            <a:schemeClr val="accent1"/>
-          </a:lnRef>
-          <a:fillRef idx="3">
-            <a:schemeClr val="accent1"/>
-          </a:fillRef>
-          <a:effectRef idx="2">
-            <a:schemeClr val="accent1"/>
-          </a:effectRef>
-          <a:fontRef idx="minor">
-            <a:schemeClr val="lt1"/>
-          </a:fontRef>
-        </p:style>
-        <p:txBody>
-          <a:bodyPr rtlCol="0" anchor="ctr"/>
-          <a:lstStyle/>
-          <a:p/>
-        </p:txBody>
-      </p:sp>
-      <p:sp>
-        <p:nvSpPr>
-          <p:cNvPr id="19" name="Oval 18"/>
-          <p:cNvSpPr/>
-          <p:nvPr/>
-        </p:nvSpPr>
-        <p:spPr>
-          <a:xfrm>
-            <a:off x="6461607" y="4251960"/>
-            <a:ext cx="457200" cy="457200"/>
-          </a:xfrm>
-          <a:prstGeom prst="ellipse">
-            <a:avLst/>
-          </a:prstGeom>
-          <a:solidFill>
-            <a:srgbClr val="F2B705"/>
-          </a:solidFill>
-          <a:ln>
-            <a:noFill/>
-          </a:ln>
-          <a:effectLst/>
-        </p:spPr>
-        <p:style>
-          <a:lnRef idx="1">
-            <a:schemeClr val="accent1"/>
-          </a:lnRef>
-          <a:fillRef idx="3">
-            <a:schemeClr val="accent1"/>
-          </a:fillRef>
-          <a:effectRef idx="2">
-            <a:schemeClr val="accent1"/>
-          </a:effectRef>
-          <a:fontRef idx="minor">
-            <a:schemeClr val="lt1"/>
-          </a:fontRef>
-        </p:style>
-        <p:txBody>
-          <a:bodyPr rtlCol="0" anchor="ctr" lIns="0" rIns="0" tIns="0" bIns="0"/>
-          <a:lstStyle/>
-          <a:p>
-            <a:pPr algn="ctr"/>
-            <a:r>
-              <a:rPr sz="1500" b="1">
-                <a:solidFill>
-                  <a:srgbClr val="202122"/>
-                </a:solidFill>
-                <a:latin typeface="Calibri"/>
-              </a:rPr>
-              <a:t>4</a:t>
-            </a:r>
-          </a:p>
-        </p:txBody>
-      </p:sp>
-      <p:sp>
-        <p:nvSpPr>
-          <p:cNvPr id="20" name="TextBox 19"/>
-          <p:cNvSpPr txBox="1"/>
-          <p:nvPr/>
-        </p:nvSpPr>
-        <p:spPr>
-          <a:xfrm>
-            <a:off x="7055967" y="4224528"/>
-            <a:ext cx="4404207" cy="512064"/>
-          </a:xfrm>
-          <a:prstGeom prst="rect">
-            <a:avLst/>
-          </a:prstGeom>
-          <a:noFill/>
-        </p:spPr>
-        <p:txBody>
-          <a:bodyPr wrap="square" anchor="ctr" lIns="0" rIns="0" tIns="0" bIns="0"/>
-          <a:lstStyle/>
-          <a:p>
-            <a:pPr algn="l"/>
-            <a:r>
-              <a:rPr sz="1900" b="1" i="0">
-                <a:solidFill>
-                  <a:srgbClr val="03306E"/>
-                </a:solidFill>
-                <a:latin typeface="Calibri"/>
-              </a:rPr>
-              <a:t>Models</a:t>
-            </a:r>
-          </a:p>
-        </p:txBody>
-      </p:sp>
-      <p:sp>
-        <p:nvSpPr>
-          <p:cNvPr id="21" name="TextBox 20"/>
-          <p:cNvSpPr txBox="1"/>
-          <p:nvPr/>
-        </p:nvSpPr>
-        <p:spPr>
-          <a:xfrm>
-            <a:off x="6461607" y="4892040"/>
-            <a:ext cx="4952847" cy="1143000"/>
-          </a:xfrm>
-          <a:prstGeom prst="rect">
-            <a:avLst/>
-          </a:prstGeom>
-          <a:noFill/>
-        </p:spPr>
-        <p:txBody>
-          <a:bodyPr wrap="square" anchor="t" lIns="0" rIns="0" tIns="0" bIns="0"/>
-          <a:lstStyle/>
-          <a:p>
-            <a:pPr algn="l"/>
-            <a:r>
-              <a:rPr sz="2000" b="0" i="0">
-                <a:solidFill>
-                  <a:srgbClr val="202122"/>
-                </a:solidFill>
-                <a:latin typeface="Calibri"/>
-              </a:rPr>
-              <a:t>Client-server, thin client, peer-to-peer.</a:t>
+              <a:rPr sz="1900" b="0" i="0">
+                <a:solidFill>
+                  <a:srgbClr val="FFFFFF"/>
+                </a:solidFill>
+                <a:latin typeface="Cambria"/>
+              </a:rPr>
+              <a:t>A mobile app (client) sends requests over a WAN, the internet, to a server running the app's API and database.</a:t>
             </a:r>
           </a:p>
         </p:txBody>
@@ -6036,7 +9052,7 @@
                 </a:solidFill>
                 <a:latin typeface="Cambria"/>
               </a:rPr>
-              <a:t>The OSI and TCP/IP models</a:t>
+              <a:t>Network types and topologies</a:t>
             </a:r>
           </a:p>
         </p:txBody>
@@ -6103,6 +9119,1265 @@
                 <a:latin typeface="Calibri"/>
               </a:rPr>
               <a:t>4</a:t>
+            </a:r>
+          </a:p>
+        </p:txBody>
+      </p:sp>
+      <p:sp>
+        <p:nvSpPr>
+          <p:cNvPr id="6" name="Rounded Rectangle 5"/>
+          <p:cNvSpPr/>
+          <p:nvPr/>
+        </p:nvSpPr>
+        <p:spPr>
+          <a:xfrm>
+            <a:off x="548640" y="1600200"/>
+            <a:ext cx="5410047" cy="2148840"/>
+          </a:xfrm>
+          <a:prstGeom prst="roundRect">
+            <a:avLst>
+              <a:gd name="adj" fmla="val 6000"/>
+            </a:avLst>
+          </a:prstGeom>
+          <a:solidFill>
+            <a:srgbClr val="EAF3FF"/>
+          </a:solidFill>
+          <a:ln>
+            <a:noFill/>
+          </a:ln>
+          <a:effectLst/>
+        </p:spPr>
+        <p:style>
+          <a:lnRef idx="1">
+            <a:schemeClr val="accent1"/>
+          </a:lnRef>
+          <a:fillRef idx="3">
+            <a:schemeClr val="accent1"/>
+          </a:fillRef>
+          <a:effectRef idx="2">
+            <a:schemeClr val="accent1"/>
+          </a:effectRef>
+          <a:fontRef idx="minor">
+            <a:schemeClr val="lt1"/>
+          </a:fontRef>
+        </p:style>
+        <p:txBody>
+          <a:bodyPr rtlCol="0" anchor="ctr"/>
+          <a:lstStyle/>
+          <a:p/>
+        </p:txBody>
+      </p:sp>
+      <p:sp>
+        <p:nvSpPr>
+          <p:cNvPr id="7" name="Oval 6"/>
+          <p:cNvSpPr/>
+          <p:nvPr/>
+        </p:nvSpPr>
+        <p:spPr>
+          <a:xfrm>
+            <a:off x="777240" y="1828800"/>
+            <a:ext cx="457200" cy="457200"/>
+          </a:xfrm>
+          <a:prstGeom prst="ellipse">
+            <a:avLst/>
+          </a:prstGeom>
+          <a:solidFill>
+            <a:srgbClr val="F2B705"/>
+          </a:solidFill>
+          <a:ln>
+            <a:noFill/>
+          </a:ln>
+          <a:effectLst/>
+        </p:spPr>
+        <p:style>
+          <a:lnRef idx="1">
+            <a:schemeClr val="accent1"/>
+          </a:lnRef>
+          <a:fillRef idx="3">
+            <a:schemeClr val="accent1"/>
+          </a:fillRef>
+          <a:effectRef idx="2">
+            <a:schemeClr val="accent1"/>
+          </a:effectRef>
+          <a:fontRef idx="minor">
+            <a:schemeClr val="lt1"/>
+          </a:fontRef>
+        </p:style>
+        <p:txBody>
+          <a:bodyPr rtlCol="0" anchor="ctr" lIns="0" rIns="0" tIns="0" bIns="0"/>
+          <a:lstStyle/>
+          <a:p>
+            <a:pPr algn="ctr"/>
+            <a:r>
+              <a:rPr sz="1500" b="1">
+                <a:solidFill>
+                  <a:srgbClr val="202122"/>
+                </a:solidFill>
+                <a:latin typeface="Calibri"/>
+              </a:rPr>
+              <a:t>1</a:t>
+            </a:r>
+          </a:p>
+        </p:txBody>
+      </p:sp>
+      <p:sp>
+        <p:nvSpPr>
+          <p:cNvPr id="8" name="TextBox 7"/>
+          <p:cNvSpPr txBox="1"/>
+          <p:nvPr/>
+        </p:nvSpPr>
+        <p:spPr>
+          <a:xfrm>
+            <a:off x="1371600" y="1801368"/>
+            <a:ext cx="4404207" cy="512064"/>
+          </a:xfrm>
+          <a:prstGeom prst="rect">
+            <a:avLst/>
+          </a:prstGeom>
+          <a:noFill/>
+        </p:spPr>
+        <p:txBody>
+          <a:bodyPr wrap="square" anchor="ctr" lIns="0" rIns="0" tIns="0" bIns="0"/>
+          <a:lstStyle/>
+          <a:p>
+            <a:pPr algn="l"/>
+            <a:r>
+              <a:rPr sz="1900" b="1" i="0">
+                <a:solidFill>
+                  <a:srgbClr val="03306E"/>
+                </a:solidFill>
+                <a:latin typeface="Calibri"/>
+              </a:rPr>
+              <a:t>PAN, LAN, MAN, WAN</a:t>
+            </a:r>
+          </a:p>
+        </p:txBody>
+      </p:sp>
+      <p:sp>
+        <p:nvSpPr>
+          <p:cNvPr id="9" name="TextBox 8"/>
+          <p:cNvSpPr txBox="1"/>
+          <p:nvPr/>
+        </p:nvSpPr>
+        <p:spPr>
+          <a:xfrm>
+            <a:off x="777240" y="2468880"/>
+            <a:ext cx="4952847" cy="1143000"/>
+          </a:xfrm>
+          <a:prstGeom prst="rect">
+            <a:avLst/>
+          </a:prstGeom>
+          <a:noFill/>
+        </p:spPr>
+        <p:txBody>
+          <a:bodyPr wrap="square" anchor="t" lIns="0" rIns="0" tIns="0" bIns="0"/>
+          <a:lstStyle/>
+          <a:p>
+            <a:pPr algn="l"/>
+            <a:r>
+              <a:rPr sz="2000" b="0" i="0">
+                <a:solidFill>
+                  <a:srgbClr val="202122"/>
+                </a:solidFill>
+                <a:latin typeface="Calibri"/>
+              </a:rPr>
+              <a:t>Personal, local, metropolitan and wide area networks.</a:t>
+            </a:r>
+          </a:p>
+        </p:txBody>
+      </p:sp>
+      <p:sp>
+        <p:nvSpPr>
+          <p:cNvPr id="10" name="Rounded Rectangle 9"/>
+          <p:cNvSpPr/>
+          <p:nvPr/>
+        </p:nvSpPr>
+        <p:spPr>
+          <a:xfrm>
+            <a:off x="6233007" y="1600200"/>
+            <a:ext cx="5410047" cy="2148840"/>
+          </a:xfrm>
+          <a:prstGeom prst="roundRect">
+            <a:avLst>
+              <a:gd name="adj" fmla="val 6000"/>
+            </a:avLst>
+          </a:prstGeom>
+          <a:solidFill>
+            <a:srgbClr val="EAF3FF"/>
+          </a:solidFill>
+          <a:ln>
+            <a:noFill/>
+          </a:ln>
+          <a:effectLst/>
+        </p:spPr>
+        <p:style>
+          <a:lnRef idx="1">
+            <a:schemeClr val="accent1"/>
+          </a:lnRef>
+          <a:fillRef idx="3">
+            <a:schemeClr val="accent1"/>
+          </a:fillRef>
+          <a:effectRef idx="2">
+            <a:schemeClr val="accent1"/>
+          </a:effectRef>
+          <a:fontRef idx="minor">
+            <a:schemeClr val="lt1"/>
+          </a:fontRef>
+        </p:style>
+        <p:txBody>
+          <a:bodyPr rtlCol="0" anchor="ctr"/>
+          <a:lstStyle/>
+          <a:p/>
+        </p:txBody>
+      </p:sp>
+      <p:sp>
+        <p:nvSpPr>
+          <p:cNvPr id="11" name="Oval 10"/>
+          <p:cNvSpPr/>
+          <p:nvPr/>
+        </p:nvSpPr>
+        <p:spPr>
+          <a:xfrm>
+            <a:off x="6461607" y="1828800"/>
+            <a:ext cx="457200" cy="457200"/>
+          </a:xfrm>
+          <a:prstGeom prst="ellipse">
+            <a:avLst/>
+          </a:prstGeom>
+          <a:solidFill>
+            <a:srgbClr val="F2B705"/>
+          </a:solidFill>
+          <a:ln>
+            <a:noFill/>
+          </a:ln>
+          <a:effectLst/>
+        </p:spPr>
+        <p:style>
+          <a:lnRef idx="1">
+            <a:schemeClr val="accent1"/>
+          </a:lnRef>
+          <a:fillRef idx="3">
+            <a:schemeClr val="accent1"/>
+          </a:fillRef>
+          <a:effectRef idx="2">
+            <a:schemeClr val="accent1"/>
+          </a:effectRef>
+          <a:fontRef idx="minor">
+            <a:schemeClr val="lt1"/>
+          </a:fontRef>
+        </p:style>
+        <p:txBody>
+          <a:bodyPr rtlCol="0" anchor="ctr" lIns="0" rIns="0" tIns="0" bIns="0"/>
+          <a:lstStyle/>
+          <a:p>
+            <a:pPr algn="ctr"/>
+            <a:r>
+              <a:rPr sz="1500" b="1">
+                <a:solidFill>
+                  <a:srgbClr val="202122"/>
+                </a:solidFill>
+                <a:latin typeface="Calibri"/>
+              </a:rPr>
+              <a:t>2</a:t>
+            </a:r>
+          </a:p>
+        </p:txBody>
+      </p:sp>
+      <p:sp>
+        <p:nvSpPr>
+          <p:cNvPr id="12" name="TextBox 11"/>
+          <p:cNvSpPr txBox="1"/>
+          <p:nvPr/>
+        </p:nvSpPr>
+        <p:spPr>
+          <a:xfrm>
+            <a:off x="7055967" y="1801368"/>
+            <a:ext cx="4404207" cy="512064"/>
+          </a:xfrm>
+          <a:prstGeom prst="rect">
+            <a:avLst/>
+          </a:prstGeom>
+          <a:noFill/>
+        </p:spPr>
+        <p:txBody>
+          <a:bodyPr wrap="square" anchor="ctr" lIns="0" rIns="0" tIns="0" bIns="0"/>
+          <a:lstStyle/>
+          <a:p>
+            <a:pPr algn="l"/>
+            <a:r>
+              <a:rPr sz="1900" b="1" i="0">
+                <a:solidFill>
+                  <a:srgbClr val="03306E"/>
+                </a:solidFill>
+                <a:latin typeface="Calibri"/>
+              </a:rPr>
+              <a:t>VPN</a:t>
+            </a:r>
+          </a:p>
+        </p:txBody>
+      </p:sp>
+      <p:sp>
+        <p:nvSpPr>
+          <p:cNvPr id="13" name="TextBox 12"/>
+          <p:cNvSpPr txBox="1"/>
+          <p:nvPr/>
+        </p:nvSpPr>
+        <p:spPr>
+          <a:xfrm>
+            <a:off x="6461607" y="2468880"/>
+            <a:ext cx="4952847" cy="1143000"/>
+          </a:xfrm>
+          <a:prstGeom prst="rect">
+            <a:avLst/>
+          </a:prstGeom>
+          <a:noFill/>
+        </p:spPr>
+        <p:txBody>
+          <a:bodyPr wrap="square" anchor="t" lIns="0" rIns="0" tIns="0" bIns="0"/>
+          <a:lstStyle/>
+          <a:p>
+            <a:pPr algn="l"/>
+            <a:r>
+              <a:rPr sz="2000" b="0" i="0">
+                <a:solidFill>
+                  <a:srgbClr val="202122"/>
+                </a:solidFill>
+                <a:latin typeface="Calibri"/>
+              </a:rPr>
+              <a:t>A private, encrypted connection across a public network.</a:t>
+            </a:r>
+          </a:p>
+        </p:txBody>
+      </p:sp>
+      <p:sp>
+        <p:nvSpPr>
+          <p:cNvPr id="14" name="Rounded Rectangle 13"/>
+          <p:cNvSpPr/>
+          <p:nvPr/>
+        </p:nvSpPr>
+        <p:spPr>
+          <a:xfrm>
+            <a:off x="548640" y="4023360"/>
+            <a:ext cx="5410047" cy="2148840"/>
+          </a:xfrm>
+          <a:prstGeom prst="roundRect">
+            <a:avLst>
+              <a:gd name="adj" fmla="val 6000"/>
+            </a:avLst>
+          </a:prstGeom>
+          <a:solidFill>
+            <a:srgbClr val="EAF3FF"/>
+          </a:solidFill>
+          <a:ln>
+            <a:noFill/>
+          </a:ln>
+          <a:effectLst/>
+        </p:spPr>
+        <p:style>
+          <a:lnRef idx="1">
+            <a:schemeClr val="accent1"/>
+          </a:lnRef>
+          <a:fillRef idx="3">
+            <a:schemeClr val="accent1"/>
+          </a:fillRef>
+          <a:effectRef idx="2">
+            <a:schemeClr val="accent1"/>
+          </a:effectRef>
+          <a:fontRef idx="minor">
+            <a:schemeClr val="lt1"/>
+          </a:fontRef>
+        </p:style>
+        <p:txBody>
+          <a:bodyPr rtlCol="0" anchor="ctr"/>
+          <a:lstStyle/>
+          <a:p/>
+        </p:txBody>
+      </p:sp>
+      <p:sp>
+        <p:nvSpPr>
+          <p:cNvPr id="15" name="Oval 14"/>
+          <p:cNvSpPr/>
+          <p:nvPr/>
+        </p:nvSpPr>
+        <p:spPr>
+          <a:xfrm>
+            <a:off x="777240" y="4251960"/>
+            <a:ext cx="457200" cy="457200"/>
+          </a:xfrm>
+          <a:prstGeom prst="ellipse">
+            <a:avLst/>
+          </a:prstGeom>
+          <a:solidFill>
+            <a:srgbClr val="F2B705"/>
+          </a:solidFill>
+          <a:ln>
+            <a:noFill/>
+          </a:ln>
+          <a:effectLst/>
+        </p:spPr>
+        <p:style>
+          <a:lnRef idx="1">
+            <a:schemeClr val="accent1"/>
+          </a:lnRef>
+          <a:fillRef idx="3">
+            <a:schemeClr val="accent1"/>
+          </a:fillRef>
+          <a:effectRef idx="2">
+            <a:schemeClr val="accent1"/>
+          </a:effectRef>
+          <a:fontRef idx="minor">
+            <a:schemeClr val="lt1"/>
+          </a:fontRef>
+        </p:style>
+        <p:txBody>
+          <a:bodyPr rtlCol="0" anchor="ctr" lIns="0" rIns="0" tIns="0" bIns="0"/>
+          <a:lstStyle/>
+          <a:p>
+            <a:pPr algn="ctr"/>
+            <a:r>
+              <a:rPr sz="1500" b="1">
+                <a:solidFill>
+                  <a:srgbClr val="202122"/>
+                </a:solidFill>
+                <a:latin typeface="Calibri"/>
+              </a:rPr>
+              <a:t>3</a:t>
+            </a:r>
+          </a:p>
+        </p:txBody>
+      </p:sp>
+      <p:sp>
+        <p:nvSpPr>
+          <p:cNvPr id="16" name="TextBox 15"/>
+          <p:cNvSpPr txBox="1"/>
+          <p:nvPr/>
+        </p:nvSpPr>
+        <p:spPr>
+          <a:xfrm>
+            <a:off x="1371600" y="4224528"/>
+            <a:ext cx="4404207" cy="512064"/>
+          </a:xfrm>
+          <a:prstGeom prst="rect">
+            <a:avLst/>
+          </a:prstGeom>
+          <a:noFill/>
+        </p:spPr>
+        <p:txBody>
+          <a:bodyPr wrap="square" anchor="ctr" lIns="0" rIns="0" tIns="0" bIns="0"/>
+          <a:lstStyle/>
+          <a:p>
+            <a:pPr algn="l"/>
+            <a:r>
+              <a:rPr sz="1900" b="1" i="0">
+                <a:solidFill>
+                  <a:srgbClr val="03306E"/>
+                </a:solidFill>
+                <a:latin typeface="Calibri"/>
+              </a:rPr>
+              <a:t>Topologies</a:t>
+            </a:r>
+          </a:p>
+        </p:txBody>
+      </p:sp>
+      <p:sp>
+        <p:nvSpPr>
+          <p:cNvPr id="17" name="TextBox 16"/>
+          <p:cNvSpPr txBox="1"/>
+          <p:nvPr/>
+        </p:nvSpPr>
+        <p:spPr>
+          <a:xfrm>
+            <a:off x="777240" y="4892040"/>
+            <a:ext cx="4952847" cy="1143000"/>
+          </a:xfrm>
+          <a:prstGeom prst="rect">
+            <a:avLst/>
+          </a:prstGeom>
+          <a:noFill/>
+        </p:spPr>
+        <p:txBody>
+          <a:bodyPr wrap="square" anchor="t" lIns="0" rIns="0" tIns="0" bIns="0"/>
+          <a:lstStyle/>
+          <a:p>
+            <a:pPr algn="l"/>
+            <a:r>
+              <a:rPr sz="2000" b="0" i="0">
+                <a:solidFill>
+                  <a:srgbClr val="202122"/>
+                </a:solidFill>
+                <a:latin typeface="Calibri"/>
+              </a:rPr>
+              <a:t>Star, mesh and tree; logical versus physical.</a:t>
+            </a:r>
+          </a:p>
+        </p:txBody>
+      </p:sp>
+      <p:sp>
+        <p:nvSpPr>
+          <p:cNvPr id="18" name="Rounded Rectangle 17"/>
+          <p:cNvSpPr/>
+          <p:nvPr/>
+        </p:nvSpPr>
+        <p:spPr>
+          <a:xfrm>
+            <a:off x="6233007" y="4023360"/>
+            <a:ext cx="5410047" cy="2148840"/>
+          </a:xfrm>
+          <a:prstGeom prst="roundRect">
+            <a:avLst>
+              <a:gd name="adj" fmla="val 6000"/>
+            </a:avLst>
+          </a:prstGeom>
+          <a:solidFill>
+            <a:srgbClr val="EAF3FF"/>
+          </a:solidFill>
+          <a:ln>
+            <a:noFill/>
+          </a:ln>
+          <a:effectLst/>
+        </p:spPr>
+        <p:style>
+          <a:lnRef idx="1">
+            <a:schemeClr val="accent1"/>
+          </a:lnRef>
+          <a:fillRef idx="3">
+            <a:schemeClr val="accent1"/>
+          </a:fillRef>
+          <a:effectRef idx="2">
+            <a:schemeClr val="accent1"/>
+          </a:effectRef>
+          <a:fontRef idx="minor">
+            <a:schemeClr val="lt1"/>
+          </a:fontRef>
+        </p:style>
+        <p:txBody>
+          <a:bodyPr rtlCol="0" anchor="ctr"/>
+          <a:lstStyle/>
+          <a:p/>
+        </p:txBody>
+      </p:sp>
+      <p:sp>
+        <p:nvSpPr>
+          <p:cNvPr id="19" name="Oval 18"/>
+          <p:cNvSpPr/>
+          <p:nvPr/>
+        </p:nvSpPr>
+        <p:spPr>
+          <a:xfrm>
+            <a:off x="6461607" y="4251960"/>
+            <a:ext cx="457200" cy="457200"/>
+          </a:xfrm>
+          <a:prstGeom prst="ellipse">
+            <a:avLst/>
+          </a:prstGeom>
+          <a:solidFill>
+            <a:srgbClr val="F2B705"/>
+          </a:solidFill>
+          <a:ln>
+            <a:noFill/>
+          </a:ln>
+          <a:effectLst/>
+        </p:spPr>
+        <p:style>
+          <a:lnRef idx="1">
+            <a:schemeClr val="accent1"/>
+          </a:lnRef>
+          <a:fillRef idx="3">
+            <a:schemeClr val="accent1"/>
+          </a:fillRef>
+          <a:effectRef idx="2">
+            <a:schemeClr val="accent1"/>
+          </a:effectRef>
+          <a:fontRef idx="minor">
+            <a:schemeClr val="lt1"/>
+          </a:fontRef>
+        </p:style>
+        <p:txBody>
+          <a:bodyPr rtlCol="0" anchor="ctr" lIns="0" rIns="0" tIns="0" bIns="0"/>
+          <a:lstStyle/>
+          <a:p>
+            <a:pPr algn="ctr"/>
+            <a:r>
+              <a:rPr sz="1500" b="1">
+                <a:solidFill>
+                  <a:srgbClr val="202122"/>
+                </a:solidFill>
+                <a:latin typeface="Calibri"/>
+              </a:rPr>
+              <a:t>4</a:t>
+            </a:r>
+          </a:p>
+        </p:txBody>
+      </p:sp>
+      <p:sp>
+        <p:nvSpPr>
+          <p:cNvPr id="20" name="TextBox 19"/>
+          <p:cNvSpPr txBox="1"/>
+          <p:nvPr/>
+        </p:nvSpPr>
+        <p:spPr>
+          <a:xfrm>
+            <a:off x="7055967" y="4224528"/>
+            <a:ext cx="4404207" cy="512064"/>
+          </a:xfrm>
+          <a:prstGeom prst="rect">
+            <a:avLst/>
+          </a:prstGeom>
+          <a:noFill/>
+        </p:spPr>
+        <p:txBody>
+          <a:bodyPr wrap="square" anchor="ctr" lIns="0" rIns="0" tIns="0" bIns="0"/>
+          <a:lstStyle/>
+          <a:p>
+            <a:pPr algn="l"/>
+            <a:r>
+              <a:rPr sz="1900" b="1" i="0">
+                <a:solidFill>
+                  <a:srgbClr val="03306E"/>
+                </a:solidFill>
+                <a:latin typeface="Calibri"/>
+              </a:rPr>
+              <a:t>Models</a:t>
+            </a:r>
+          </a:p>
+        </p:txBody>
+      </p:sp>
+      <p:sp>
+        <p:nvSpPr>
+          <p:cNvPr id="21" name="TextBox 20"/>
+          <p:cNvSpPr txBox="1"/>
+          <p:nvPr/>
+        </p:nvSpPr>
+        <p:spPr>
+          <a:xfrm>
+            <a:off x="6461607" y="4892040"/>
+            <a:ext cx="4952847" cy="1143000"/>
+          </a:xfrm>
+          <a:prstGeom prst="rect">
+            <a:avLst/>
+          </a:prstGeom>
+          <a:noFill/>
+        </p:spPr>
+        <p:txBody>
+          <a:bodyPr wrap="square" anchor="t" lIns="0" rIns="0" tIns="0" bIns="0"/>
+          <a:lstStyle/>
+          <a:p>
+            <a:pPr algn="l"/>
+            <a:r>
+              <a:rPr sz="2000" b="0" i="0">
+                <a:solidFill>
+                  <a:srgbClr val="202122"/>
+                </a:solidFill>
+                <a:latin typeface="Calibri"/>
+              </a:rPr>
+              <a:t>Client-server, thin client, peer-to-peer.</a:t>
+            </a:r>
+          </a:p>
+        </p:txBody>
+      </p:sp>
+    </p:spTree>
+  </p:cSld>
+  <p:clrMapOvr>
+    <a:masterClrMapping/>
+  </p:clrMapOvr>
+</p:sld>
+</file>
+
+<file path=ppt/slides/slide5.xml><?xml version="1.0" encoding="utf-8"?>
+<p:sld xmlns:a="http://schemas.openxmlformats.org/drawingml/2006/main" xmlns:p="http://schemas.openxmlformats.org/presentationml/2006/main" xmlns:r="http://schemas.openxmlformats.org/officeDocument/2006/relationships">
+  <p:cSld>
+    <p:bg>
+      <p:bgPr>
+        <a:solidFill>
+          <a:srgbClr val="FFFFFF"/>
+        </a:solidFill>
+        <a:effectLst/>
+      </p:bgPr>
+    </p:bg>
+    <p:spTree>
+      <p:nvGrpSpPr>
+        <p:cNvPr id="1" name=""/>
+        <p:cNvGrpSpPr/>
+        <p:nvPr/>
+      </p:nvGrpSpPr>
+      <p:grpSpPr/>
+      <p:sp>
+        <p:nvSpPr>
+          <p:cNvPr id="2" name="TextBox 1"/>
+          <p:cNvSpPr txBox="1"/>
+          <p:nvPr/>
+        </p:nvSpPr>
+        <p:spPr>
+          <a:xfrm>
+            <a:off x="548640" y="320040"/>
+            <a:ext cx="11094415" cy="274320"/>
+          </a:xfrm>
+          <a:prstGeom prst="rect">
+            <a:avLst/>
+          </a:prstGeom>
+          <a:noFill/>
+        </p:spPr>
+        <p:txBody>
+          <a:bodyPr wrap="square" anchor="t" lIns="0" rIns="0" tIns="0" bIns="0"/>
+          <a:lstStyle/>
+          <a:p>
+            <a:pPr algn="l"/>
+            <a:r>
+              <a:rPr sz="1100" b="1" i="0">
+                <a:solidFill>
+                  <a:srgbClr val="54595D"/>
+                </a:solidFill>
+                <a:latin typeface="Calibri"/>
+              </a:rPr>
+              <a:t>CORE COMPONENT  ·  Core Paper 2</a:t>
+            </a:r>
+          </a:p>
+        </p:txBody>
+      </p:sp>
+      <p:sp>
+        <p:nvSpPr>
+          <p:cNvPr id="3" name="TextBox 2"/>
+          <p:cNvSpPr txBox="1"/>
+          <p:nvPr/>
+        </p:nvSpPr>
+        <p:spPr>
+          <a:xfrm>
+            <a:off x="548640" y="566928"/>
+            <a:ext cx="11094415" cy="822960"/>
+          </a:xfrm>
+          <a:prstGeom prst="rect">
+            <a:avLst/>
+          </a:prstGeom>
+          <a:noFill/>
+        </p:spPr>
+        <p:txBody>
+          <a:bodyPr wrap="square" anchor="ctr" lIns="0" rIns="0" tIns="0" bIns="0"/>
+          <a:lstStyle/>
+          <a:p>
+            <a:pPr algn="l"/>
+            <a:r>
+              <a:rPr sz="3200" b="1" i="0">
+                <a:solidFill>
+                  <a:srgbClr val="03306E"/>
+                </a:solidFill>
+                <a:latin typeface="Cambria"/>
+              </a:rPr>
+              <a:t>Quick check: Network types and topologies</a:t>
+            </a:r>
+          </a:p>
+        </p:txBody>
+      </p:sp>
+      <p:sp>
+        <p:nvSpPr>
+          <p:cNvPr id="4" name="TextBox 3"/>
+          <p:cNvSpPr txBox="1"/>
+          <p:nvPr/>
+        </p:nvSpPr>
+        <p:spPr>
+          <a:xfrm>
+            <a:off x="548640" y="6446520"/>
+            <a:ext cx="8229600" cy="274320"/>
+          </a:xfrm>
+          <a:prstGeom prst="rect">
+            <a:avLst/>
+          </a:prstGeom>
+          <a:noFill/>
+        </p:spPr>
+        <p:txBody>
+          <a:bodyPr wrap="square" anchor="t" lIns="0" rIns="0" tIns="0" bIns="0"/>
+          <a:lstStyle/>
+          <a:p>
+            <a:pPr algn="l"/>
+            <a:r>
+              <a:rPr sz="1000" b="0" i="0">
+                <a:solidFill>
+                  <a:srgbClr val="54595D"/>
+                </a:solidFill>
+                <a:latin typeface="Calibri"/>
+              </a:rPr>
+              <a:t>Digital Software Development T Level  ·  Networks</a:t>
+            </a:r>
+          </a:p>
+        </p:txBody>
+      </p:sp>
+      <p:sp>
+        <p:nvSpPr>
+          <p:cNvPr id="5" name="TextBox 4"/>
+          <p:cNvSpPr txBox="1"/>
+          <p:nvPr/>
+        </p:nvSpPr>
+        <p:spPr>
+          <a:xfrm>
+            <a:off x="10728655" y="6446520"/>
+            <a:ext cx="914400" cy="274320"/>
+          </a:xfrm>
+          <a:prstGeom prst="rect">
+            <a:avLst/>
+          </a:prstGeom>
+          <a:noFill/>
+        </p:spPr>
+        <p:txBody>
+          <a:bodyPr wrap="square" anchor="t" lIns="0" rIns="0" tIns="0" bIns="0"/>
+          <a:lstStyle/>
+          <a:p>
+            <a:pPr algn="r"/>
+            <a:r>
+              <a:rPr sz="1000" b="0" i="0">
+                <a:solidFill>
+                  <a:srgbClr val="54595D"/>
+                </a:solidFill>
+                <a:latin typeface="Calibri"/>
+              </a:rPr>
+              <a:t>5</a:t>
+            </a:r>
+          </a:p>
+        </p:txBody>
+      </p:sp>
+      <p:sp>
+        <p:nvSpPr>
+          <p:cNvPr id="6" name="Oval 5"/>
+          <p:cNvSpPr/>
+          <p:nvPr/>
+        </p:nvSpPr>
+        <p:spPr>
+          <a:xfrm>
+            <a:off x="548640" y="1691640"/>
+            <a:ext cx="502920" cy="502920"/>
+          </a:xfrm>
+          <a:prstGeom prst="ellipse">
+            <a:avLst/>
+          </a:prstGeom>
+          <a:solidFill>
+            <a:srgbClr val="F2B705"/>
+          </a:solidFill>
+          <a:ln>
+            <a:noFill/>
+          </a:ln>
+          <a:effectLst/>
+        </p:spPr>
+        <p:style>
+          <a:lnRef idx="1">
+            <a:schemeClr val="accent1"/>
+          </a:lnRef>
+          <a:fillRef idx="3">
+            <a:schemeClr val="accent1"/>
+          </a:fillRef>
+          <a:effectRef idx="2">
+            <a:schemeClr val="accent1"/>
+          </a:effectRef>
+          <a:fontRef idx="minor">
+            <a:schemeClr val="lt1"/>
+          </a:fontRef>
+        </p:style>
+        <p:txBody>
+          <a:bodyPr rtlCol="0" anchor="ctr" lIns="0" rIns="0" tIns="0" bIns="0"/>
+          <a:lstStyle/>
+          <a:p>
+            <a:pPr algn="ctr"/>
+            <a:r>
+              <a:rPr sz="1600" b="1">
+                <a:solidFill>
+                  <a:srgbClr val="202122"/>
+                </a:solidFill>
+                <a:latin typeface="Calibri"/>
+              </a:rPr>
+              <a:t>1</a:t>
+            </a:r>
+          </a:p>
+        </p:txBody>
+      </p:sp>
+      <p:sp>
+        <p:nvSpPr>
+          <p:cNvPr id="7" name="TextBox 6"/>
+          <p:cNvSpPr txBox="1"/>
+          <p:nvPr/>
+        </p:nvSpPr>
+        <p:spPr>
+          <a:xfrm>
+            <a:off x="1371600" y="1645920"/>
+            <a:ext cx="10271455" cy="1188720"/>
+          </a:xfrm>
+          <a:prstGeom prst="rect">
+            <a:avLst/>
+          </a:prstGeom>
+          <a:noFill/>
+        </p:spPr>
+        <p:txBody>
+          <a:bodyPr wrap="square" anchor="t" lIns="0" rIns="0" tIns="0" bIns="0"/>
+          <a:lstStyle/>
+          <a:p>
+            <a:pPr algn="l"/>
+            <a:r>
+              <a:rPr sz="2400" b="0" i="0">
+                <a:solidFill>
+                  <a:srgbClr val="202122"/>
+                </a:solidFill>
+                <a:latin typeface="Calibri"/>
+              </a:rPr>
+              <a:t>What is a VPN?</a:t>
+            </a:r>
+          </a:p>
+        </p:txBody>
+      </p:sp>
+      <p:sp>
+        <p:nvSpPr>
+          <p:cNvPr id="8" name="Oval 7"/>
+          <p:cNvSpPr/>
+          <p:nvPr/>
+        </p:nvSpPr>
+        <p:spPr>
+          <a:xfrm>
+            <a:off x="548640" y="3108960"/>
+            <a:ext cx="502920" cy="502920"/>
+          </a:xfrm>
+          <a:prstGeom prst="ellipse">
+            <a:avLst/>
+          </a:prstGeom>
+          <a:solidFill>
+            <a:srgbClr val="F2B705"/>
+          </a:solidFill>
+          <a:ln>
+            <a:noFill/>
+          </a:ln>
+          <a:effectLst/>
+        </p:spPr>
+        <p:style>
+          <a:lnRef idx="1">
+            <a:schemeClr val="accent1"/>
+          </a:lnRef>
+          <a:fillRef idx="3">
+            <a:schemeClr val="accent1"/>
+          </a:fillRef>
+          <a:effectRef idx="2">
+            <a:schemeClr val="accent1"/>
+          </a:effectRef>
+          <a:fontRef idx="minor">
+            <a:schemeClr val="lt1"/>
+          </a:fontRef>
+        </p:style>
+        <p:txBody>
+          <a:bodyPr rtlCol="0" anchor="ctr" lIns="0" rIns="0" tIns="0" bIns="0"/>
+          <a:lstStyle/>
+          <a:p>
+            <a:pPr algn="ctr"/>
+            <a:r>
+              <a:rPr sz="1600" b="1">
+                <a:solidFill>
+                  <a:srgbClr val="202122"/>
+                </a:solidFill>
+                <a:latin typeface="Calibri"/>
+              </a:rPr>
+              <a:t>2</a:t>
+            </a:r>
+          </a:p>
+        </p:txBody>
+      </p:sp>
+      <p:sp>
+        <p:nvSpPr>
+          <p:cNvPr id="9" name="TextBox 8"/>
+          <p:cNvSpPr txBox="1"/>
+          <p:nvPr/>
+        </p:nvSpPr>
+        <p:spPr>
+          <a:xfrm>
+            <a:off x="1371600" y="3063240"/>
+            <a:ext cx="10271455" cy="1188720"/>
+          </a:xfrm>
+          <a:prstGeom prst="rect">
+            <a:avLst/>
+          </a:prstGeom>
+          <a:noFill/>
+        </p:spPr>
+        <p:txBody>
+          <a:bodyPr wrap="square" anchor="t" lIns="0" rIns="0" tIns="0" bIns="0"/>
+          <a:lstStyle/>
+          <a:p>
+            <a:pPr algn="l"/>
+            <a:r>
+              <a:rPr sz="2400" b="0" i="0">
+                <a:solidFill>
+                  <a:srgbClr val="202122"/>
+                </a:solidFill>
+                <a:latin typeface="Calibri"/>
+              </a:rPr>
+              <a:t>How do most apps use networks?</a:t>
+            </a:r>
+          </a:p>
+        </p:txBody>
+      </p:sp>
+      <p:sp>
+        <p:nvSpPr>
+          <p:cNvPr id="10" name="Oval 9"/>
+          <p:cNvSpPr/>
+          <p:nvPr/>
+        </p:nvSpPr>
+        <p:spPr>
+          <a:xfrm>
+            <a:off x="548640" y="4526280"/>
+            <a:ext cx="502920" cy="502920"/>
+          </a:xfrm>
+          <a:prstGeom prst="ellipse">
+            <a:avLst/>
+          </a:prstGeom>
+          <a:solidFill>
+            <a:srgbClr val="F2B705"/>
+          </a:solidFill>
+          <a:ln>
+            <a:noFill/>
+          </a:ln>
+          <a:effectLst/>
+        </p:spPr>
+        <p:style>
+          <a:lnRef idx="1">
+            <a:schemeClr val="accent1"/>
+          </a:lnRef>
+          <a:fillRef idx="3">
+            <a:schemeClr val="accent1"/>
+          </a:fillRef>
+          <a:effectRef idx="2">
+            <a:schemeClr val="accent1"/>
+          </a:effectRef>
+          <a:fontRef idx="minor">
+            <a:schemeClr val="lt1"/>
+          </a:fontRef>
+        </p:style>
+        <p:txBody>
+          <a:bodyPr rtlCol="0" anchor="ctr" lIns="0" rIns="0" tIns="0" bIns="0"/>
+          <a:lstStyle/>
+          <a:p>
+            <a:pPr algn="ctr"/>
+            <a:r>
+              <a:rPr sz="1600" b="1">
+                <a:solidFill>
+                  <a:srgbClr val="202122"/>
+                </a:solidFill>
+                <a:latin typeface="Calibri"/>
+              </a:rPr>
+              <a:t>3</a:t>
+            </a:r>
+          </a:p>
+        </p:txBody>
+      </p:sp>
+      <p:sp>
+        <p:nvSpPr>
+          <p:cNvPr id="11" name="TextBox 10"/>
+          <p:cNvSpPr txBox="1"/>
+          <p:nvPr/>
+        </p:nvSpPr>
+        <p:spPr>
+          <a:xfrm>
+            <a:off x="1371600" y="4480560"/>
+            <a:ext cx="10271455" cy="1188720"/>
+          </a:xfrm>
+          <a:prstGeom prst="rect">
+            <a:avLst/>
+          </a:prstGeom>
+          <a:noFill/>
+        </p:spPr>
+        <p:txBody>
+          <a:bodyPr wrap="square" anchor="t" lIns="0" rIns="0" tIns="0" bIns="0"/>
+          <a:lstStyle/>
+          <a:p>
+            <a:pPr algn="l"/>
+            <a:r>
+              <a:rPr sz="2400" b="0" i="0">
+                <a:solidFill>
+                  <a:srgbClr val="202122"/>
+                </a:solidFill>
+                <a:latin typeface="Calibri"/>
+              </a:rPr>
+              <a:t>What is the internet?</a:t>
+            </a:r>
+          </a:p>
+        </p:txBody>
+      </p:sp>
+      <p:sp>
+        <p:nvSpPr>
+          <p:cNvPr id="12" name="TextBox 11"/>
+          <p:cNvSpPr txBox="1"/>
+          <p:nvPr/>
+        </p:nvSpPr>
+        <p:spPr>
+          <a:xfrm>
+            <a:off x="548640" y="5852160"/>
+            <a:ext cx="11094415" cy="365760"/>
+          </a:xfrm>
+          <a:prstGeom prst="rect">
+            <a:avLst/>
+          </a:prstGeom>
+          <a:noFill/>
+        </p:spPr>
+        <p:txBody>
+          <a:bodyPr wrap="square" anchor="t" lIns="0" rIns="0" tIns="0" bIns="0"/>
+          <a:lstStyle/>
+          <a:p>
+            <a:pPr algn="l"/>
+            <a:r>
+              <a:rPr sz="1300" b="0" i="1">
+                <a:solidFill>
+                  <a:srgbClr val="54595D"/>
+                </a:solidFill>
+                <a:latin typeface="Calibri"/>
+              </a:rPr>
+              <a:t>Answer on mini whiteboards or in your book. Answers are in the speaker notes.</a:t>
+            </a:r>
+          </a:p>
+        </p:txBody>
+      </p:sp>
+    </p:spTree>
+  </p:cSld>
+  <p:clrMapOvr>
+    <a:masterClrMapping/>
+  </p:clrMapOvr>
+</p:sld>
+</file>
+
+<file path=ppt/slides/slide6.xml><?xml version="1.0" encoding="utf-8"?>
+<p:sld xmlns:a="http://schemas.openxmlformats.org/drawingml/2006/main" xmlns:p="http://schemas.openxmlformats.org/presentationml/2006/main" xmlns:r="http://schemas.openxmlformats.org/officeDocument/2006/relationships">
+  <p:cSld>
+    <p:bg>
+      <p:bgPr>
+        <a:solidFill>
+          <a:srgbClr val="FFFFFF"/>
+        </a:solidFill>
+        <a:effectLst/>
+      </p:bgPr>
+    </p:bg>
+    <p:spTree>
+      <p:nvGrpSpPr>
+        <p:cNvPr id="1" name=""/>
+        <p:cNvGrpSpPr/>
+        <p:nvPr/>
+      </p:nvGrpSpPr>
+      <p:grpSpPr/>
+      <p:sp>
+        <p:nvSpPr>
+          <p:cNvPr id="2" name="TextBox 1"/>
+          <p:cNvSpPr txBox="1"/>
+          <p:nvPr/>
+        </p:nvSpPr>
+        <p:spPr>
+          <a:xfrm>
+            <a:off x="548640" y="320040"/>
+            <a:ext cx="11094415" cy="274320"/>
+          </a:xfrm>
+          <a:prstGeom prst="rect">
+            <a:avLst/>
+          </a:prstGeom>
+          <a:noFill/>
+        </p:spPr>
+        <p:txBody>
+          <a:bodyPr wrap="square" anchor="t" lIns="0" rIns="0" tIns="0" bIns="0"/>
+          <a:lstStyle/>
+          <a:p>
+            <a:pPr algn="l"/>
+            <a:r>
+              <a:rPr sz="1100" b="1" i="0">
+                <a:solidFill>
+                  <a:srgbClr val="54595D"/>
+                </a:solidFill>
+                <a:latin typeface="Calibri"/>
+              </a:rPr>
+              <a:t>CORE COMPONENT  ·  Core Paper 2</a:t>
+            </a:r>
+          </a:p>
+        </p:txBody>
+      </p:sp>
+      <p:sp>
+        <p:nvSpPr>
+          <p:cNvPr id="3" name="TextBox 2"/>
+          <p:cNvSpPr txBox="1"/>
+          <p:nvPr/>
+        </p:nvSpPr>
+        <p:spPr>
+          <a:xfrm>
+            <a:off x="548640" y="566928"/>
+            <a:ext cx="11094415" cy="822960"/>
+          </a:xfrm>
+          <a:prstGeom prst="rect">
+            <a:avLst/>
+          </a:prstGeom>
+          <a:noFill/>
+        </p:spPr>
+        <p:txBody>
+          <a:bodyPr wrap="square" anchor="ctr" lIns="0" rIns="0" tIns="0" bIns="0"/>
+          <a:lstStyle/>
+          <a:p>
+            <a:pPr algn="l"/>
+            <a:r>
+              <a:rPr sz="3200" b="1" i="0">
+                <a:solidFill>
+                  <a:srgbClr val="03306E"/>
+                </a:solidFill>
+                <a:latin typeface="Cambria"/>
+              </a:rPr>
+              <a:t>The OSI and TCP/IP models</a:t>
+            </a:r>
+          </a:p>
+        </p:txBody>
+      </p:sp>
+      <p:sp>
+        <p:nvSpPr>
+          <p:cNvPr id="4" name="TextBox 3"/>
+          <p:cNvSpPr txBox="1"/>
+          <p:nvPr/>
+        </p:nvSpPr>
+        <p:spPr>
+          <a:xfrm>
+            <a:off x="548640" y="6446520"/>
+            <a:ext cx="8229600" cy="274320"/>
+          </a:xfrm>
+          <a:prstGeom prst="rect">
+            <a:avLst/>
+          </a:prstGeom>
+          <a:noFill/>
+        </p:spPr>
+        <p:txBody>
+          <a:bodyPr wrap="square" anchor="t" lIns="0" rIns="0" tIns="0" bIns="0"/>
+          <a:lstStyle/>
+          <a:p>
+            <a:pPr algn="l"/>
+            <a:r>
+              <a:rPr sz="1000" b="0" i="0">
+                <a:solidFill>
+                  <a:srgbClr val="54595D"/>
+                </a:solidFill>
+                <a:latin typeface="Calibri"/>
+              </a:rPr>
+              <a:t>Digital Software Development T Level  ·  Networks</a:t>
+            </a:r>
+          </a:p>
+        </p:txBody>
+      </p:sp>
+      <p:sp>
+        <p:nvSpPr>
+          <p:cNvPr id="5" name="TextBox 4"/>
+          <p:cNvSpPr txBox="1"/>
+          <p:nvPr/>
+        </p:nvSpPr>
+        <p:spPr>
+          <a:xfrm>
+            <a:off x="10728655" y="6446520"/>
+            <a:ext cx="914400" cy="274320"/>
+          </a:xfrm>
+          <a:prstGeom prst="rect">
+            <a:avLst/>
+          </a:prstGeom>
+          <a:noFill/>
+        </p:spPr>
+        <p:txBody>
+          <a:bodyPr wrap="square" anchor="t" lIns="0" rIns="0" tIns="0" bIns="0"/>
+          <a:lstStyle/>
+          <a:p>
+            <a:pPr algn="r"/>
+            <a:r>
+              <a:rPr sz="1000" b="0" i="0">
+                <a:solidFill>
+                  <a:srgbClr val="54595D"/>
+                </a:solidFill>
+                <a:latin typeface="Calibri"/>
+              </a:rPr>
+              <a:t>6</a:t>
             </a:r>
           </a:p>
         </p:txBody>
@@ -6686,995 +10961,6 @@
 </p:sld>
 </file>
 
-<file path=ppt/slides/slide5.xml><?xml version="1.0" encoding="utf-8"?>
-<p:sld xmlns:a="http://schemas.openxmlformats.org/drawingml/2006/main" xmlns:p="http://schemas.openxmlformats.org/presentationml/2006/main" xmlns:r="http://schemas.openxmlformats.org/officeDocument/2006/relationships">
-  <p:cSld>
-    <p:bg>
-      <p:bgPr>
-        <a:solidFill>
-          <a:srgbClr val="FFFFFF"/>
-        </a:solidFill>
-        <a:effectLst/>
-      </p:bgPr>
-    </p:bg>
-    <p:spTree>
-      <p:nvGrpSpPr>
-        <p:cNvPr id="1" name=""/>
-        <p:cNvGrpSpPr/>
-        <p:nvPr/>
-      </p:nvGrpSpPr>
-      <p:grpSpPr/>
-      <p:sp>
-        <p:nvSpPr>
-          <p:cNvPr id="2" name="TextBox 1"/>
-          <p:cNvSpPr txBox="1"/>
-          <p:nvPr/>
-        </p:nvSpPr>
-        <p:spPr>
-          <a:xfrm>
-            <a:off x="548640" y="320040"/>
-            <a:ext cx="11094415" cy="274320"/>
-          </a:xfrm>
-          <a:prstGeom prst="rect">
-            <a:avLst/>
-          </a:prstGeom>
-          <a:noFill/>
-        </p:spPr>
-        <p:txBody>
-          <a:bodyPr wrap="square" anchor="t" lIns="0" rIns="0" tIns="0" bIns="0"/>
-          <a:lstStyle/>
-          <a:p>
-            <a:pPr algn="l"/>
-            <a:r>
-              <a:rPr sz="1100" b="1" i="0">
-                <a:solidFill>
-                  <a:srgbClr val="54595D"/>
-                </a:solidFill>
-                <a:latin typeface="Calibri"/>
-              </a:rPr>
-              <a:t>CORE COMPONENT  ·  Core Paper 2</a:t>
-            </a:r>
-          </a:p>
-        </p:txBody>
-      </p:sp>
-      <p:sp>
-        <p:nvSpPr>
-          <p:cNvPr id="3" name="TextBox 2"/>
-          <p:cNvSpPr txBox="1"/>
-          <p:nvPr/>
-        </p:nvSpPr>
-        <p:spPr>
-          <a:xfrm>
-            <a:off x="548640" y="566928"/>
-            <a:ext cx="11094415" cy="822960"/>
-          </a:xfrm>
-          <a:prstGeom prst="rect">
-            <a:avLst/>
-          </a:prstGeom>
-          <a:noFill/>
-        </p:spPr>
-        <p:txBody>
-          <a:bodyPr wrap="square" anchor="ctr" lIns="0" rIns="0" tIns="0" bIns="0"/>
-          <a:lstStyle/>
-          <a:p>
-            <a:pPr algn="l"/>
-            <a:r>
-              <a:rPr sz="3200" b="1" i="0">
-                <a:solidFill>
-                  <a:srgbClr val="03306E"/>
-                </a:solidFill>
-                <a:latin typeface="Cambria"/>
-              </a:rPr>
-              <a:t>Data packets</a:t>
-            </a:r>
-          </a:p>
-        </p:txBody>
-      </p:sp>
-      <p:sp>
-        <p:nvSpPr>
-          <p:cNvPr id="4" name="TextBox 3"/>
-          <p:cNvSpPr txBox="1"/>
-          <p:nvPr/>
-        </p:nvSpPr>
-        <p:spPr>
-          <a:xfrm>
-            <a:off x="548640" y="6446520"/>
-            <a:ext cx="8229600" cy="274320"/>
-          </a:xfrm>
-          <a:prstGeom prst="rect">
-            <a:avLst/>
-          </a:prstGeom>
-          <a:noFill/>
-        </p:spPr>
-        <p:txBody>
-          <a:bodyPr wrap="square" anchor="t" lIns="0" rIns="0" tIns="0" bIns="0"/>
-          <a:lstStyle/>
-          <a:p>
-            <a:pPr algn="l"/>
-            <a:r>
-              <a:rPr sz="1000" b="0" i="0">
-                <a:solidFill>
-                  <a:srgbClr val="54595D"/>
-                </a:solidFill>
-                <a:latin typeface="Calibri"/>
-              </a:rPr>
-              <a:t>Digital Software Development T Level  ·  Networks</a:t>
-            </a:r>
-          </a:p>
-        </p:txBody>
-      </p:sp>
-      <p:sp>
-        <p:nvSpPr>
-          <p:cNvPr id="5" name="TextBox 4"/>
-          <p:cNvSpPr txBox="1"/>
-          <p:nvPr/>
-        </p:nvSpPr>
-        <p:spPr>
-          <a:xfrm>
-            <a:off x="10728655" y="6446520"/>
-            <a:ext cx="914400" cy="274320"/>
-          </a:xfrm>
-          <a:prstGeom prst="rect">
-            <a:avLst/>
-          </a:prstGeom>
-          <a:noFill/>
-        </p:spPr>
-        <p:txBody>
-          <a:bodyPr wrap="square" anchor="t" lIns="0" rIns="0" tIns="0" bIns="0"/>
-          <a:lstStyle/>
-          <a:p>
-            <a:pPr algn="r"/>
-            <a:r>
-              <a:rPr sz="1000" b="0" i="0">
-                <a:solidFill>
-                  <a:srgbClr val="54595D"/>
-                </a:solidFill>
-                <a:latin typeface="Calibri"/>
-              </a:rPr>
-              <a:t>5</a:t>
-            </a:r>
-          </a:p>
-        </p:txBody>
-      </p:sp>
-      <p:sp>
-        <p:nvSpPr>
-          <p:cNvPr id="6" name="TextBox 5"/>
-          <p:cNvSpPr txBox="1"/>
-          <p:nvPr/>
-        </p:nvSpPr>
-        <p:spPr>
-          <a:xfrm>
-            <a:off x="548640" y="1600200"/>
-            <a:ext cx="6675120" cy="4572000"/>
-          </a:xfrm>
-          <a:prstGeom prst="rect">
-            <a:avLst/>
-          </a:prstGeom>
-          <a:noFill/>
-        </p:spPr>
-        <p:txBody>
-          <a:bodyPr wrap="square" lIns="0" rIns="0" tIns="0" bIns="0">
-            <a:spAutoFit/>
-          </a:bodyPr>
-          <a:lstStyle/>
-          <a:p>
-            <a:pPr marL="274320" indent="-274320">
-              <a:spcAft>
-                <a:spcPts val="1080"/>
-              </a:spcAft>
-              <a:buClr>
-                <a:srgbClr val="0645AD"/>
-              </a:buClr>
-              <a:buFont typeface="Arial"/>
-              <a:buChar char="•"/>
-            </a:pPr>
-            <a:r>
-              <a:rPr sz="2400" b="1">
-                <a:solidFill>
-                  <a:srgbClr val="202122"/>
-                </a:solidFill>
-                <a:latin typeface="Calibri"/>
-              </a:rPr>
-              <a:t>Header:</a:t>
-            </a:r>
-            <a:r>
-              <a:rPr sz="2400" b="0">
-                <a:solidFill>
-                  <a:srgbClr val="202122"/>
-                </a:solidFill>
-                <a:latin typeface="Calibri"/>
-              </a:rPr>
-              <a:t> source and destination addresses, packet number, protocol.</a:t>
-            </a:r>
-          </a:p>
-          <a:p>
-            <a:pPr marL="274320" indent="-274320">
-              <a:spcAft>
-                <a:spcPts val="1080"/>
-              </a:spcAft>
-              <a:buClr>
-                <a:srgbClr val="0645AD"/>
-              </a:buClr>
-              <a:buFont typeface="Arial"/>
-              <a:buChar char="•"/>
-            </a:pPr>
-            <a:r>
-              <a:rPr sz="2400" b="1">
-                <a:solidFill>
-                  <a:srgbClr val="202122"/>
-                </a:solidFill>
-                <a:latin typeface="Calibri"/>
-              </a:rPr>
-              <a:t>Payload:</a:t>
-            </a:r>
-            <a:r>
-              <a:rPr sz="2400" b="0">
-                <a:solidFill>
-                  <a:srgbClr val="202122"/>
-                </a:solidFill>
-                <a:latin typeface="Calibri"/>
-              </a:rPr>
-              <a:t> the data itself.</a:t>
-            </a:r>
-          </a:p>
-          <a:p>
-            <a:pPr marL="274320" indent="-274320">
-              <a:spcAft>
-                <a:spcPts val="1080"/>
-              </a:spcAft>
-              <a:buClr>
-                <a:srgbClr val="0645AD"/>
-              </a:buClr>
-              <a:buFont typeface="Arial"/>
-              <a:buChar char="•"/>
-            </a:pPr>
-            <a:r>
-              <a:rPr sz="2400" b="1">
-                <a:solidFill>
-                  <a:srgbClr val="202122"/>
-                </a:solidFill>
-                <a:latin typeface="Calibri"/>
-              </a:rPr>
-              <a:t>Trailer:</a:t>
-            </a:r>
-            <a:r>
-              <a:rPr sz="2400" b="0">
-                <a:solidFill>
-                  <a:srgbClr val="202122"/>
-                </a:solidFill>
-                <a:latin typeface="Calibri"/>
-              </a:rPr>
-              <a:t> error checking, e.g. a cyclic redundancy check (CRC).</a:t>
-            </a:r>
-          </a:p>
-          <a:p>
-            <a:pPr marL="274320" indent="-274320">
-              <a:spcAft>
-                <a:spcPts val="1080"/>
-              </a:spcAft>
-              <a:buClr>
-                <a:srgbClr val="0645AD"/>
-              </a:buClr>
-              <a:buFont typeface="Arial"/>
-              <a:buChar char="•"/>
-            </a:pPr>
-            <a:r>
-              <a:rPr sz="2400" b="1">
-                <a:solidFill>
-                  <a:srgbClr val="202122"/>
-                </a:solidFill>
-                <a:latin typeface="Calibri"/>
-              </a:rPr>
-              <a:t>Packet switching:</a:t>
-            </a:r>
-            <a:r>
-              <a:rPr sz="2400" b="0">
-                <a:solidFill>
-                  <a:srgbClr val="202122"/>
-                </a:solidFill>
-                <a:latin typeface="Calibri"/>
-              </a:rPr>
-              <a:t> packets take different routes and are reassembled.</a:t>
-            </a:r>
-          </a:p>
-        </p:txBody>
-      </p:sp>
-      <p:sp>
-        <p:nvSpPr>
-          <p:cNvPr id="7" name="Rounded Rectangle 6"/>
-          <p:cNvSpPr/>
-          <p:nvPr/>
-        </p:nvSpPr>
-        <p:spPr>
-          <a:xfrm>
-            <a:off x="7772400" y="1600200"/>
-            <a:ext cx="3867912" cy="4434840"/>
-          </a:xfrm>
-          <a:prstGeom prst="roundRect">
-            <a:avLst>
-              <a:gd name="adj" fmla="val 8000"/>
-            </a:avLst>
-          </a:prstGeom>
-          <a:solidFill>
-            <a:srgbClr val="03306E"/>
-          </a:solidFill>
-          <a:ln>
-            <a:noFill/>
-          </a:ln>
-          <a:effectLst/>
-        </p:spPr>
-        <p:style>
-          <a:lnRef idx="1">
-            <a:schemeClr val="accent1"/>
-          </a:lnRef>
-          <a:fillRef idx="3">
-            <a:schemeClr val="accent1"/>
-          </a:fillRef>
-          <a:effectRef idx="2">
-            <a:schemeClr val="accent1"/>
-          </a:effectRef>
-          <a:fontRef idx="minor">
-            <a:schemeClr val="lt1"/>
-          </a:fontRef>
-        </p:style>
-        <p:txBody>
-          <a:bodyPr rtlCol="0" anchor="ctr"/>
-          <a:lstStyle/>
-          <a:p/>
-        </p:txBody>
-      </p:sp>
-      <p:sp>
-        <p:nvSpPr>
-          <p:cNvPr id="8" name="Oval 7"/>
-          <p:cNvSpPr/>
-          <p:nvPr/>
-        </p:nvSpPr>
-        <p:spPr>
-          <a:xfrm>
-            <a:off x="8046720" y="1874519"/>
-            <a:ext cx="548640" cy="548640"/>
-          </a:xfrm>
-          <a:prstGeom prst="ellipse">
-            <a:avLst/>
-          </a:prstGeom>
-          <a:solidFill>
-            <a:srgbClr val="F2B705"/>
-          </a:solidFill>
-          <a:ln>
-            <a:noFill/>
-          </a:ln>
-          <a:effectLst/>
-        </p:spPr>
-        <p:style>
-          <a:lnRef idx="1">
-            <a:schemeClr val="accent1"/>
-          </a:lnRef>
-          <a:fillRef idx="3">
-            <a:schemeClr val="accent1"/>
-          </a:fillRef>
-          <a:effectRef idx="2">
-            <a:schemeClr val="accent1"/>
-          </a:effectRef>
-          <a:fontRef idx="minor">
-            <a:schemeClr val="lt1"/>
-          </a:fontRef>
-        </p:style>
-        <p:txBody>
-          <a:bodyPr rtlCol="0" anchor="ctr" lIns="0" rIns="0" tIns="0" bIns="0"/>
-          <a:lstStyle/>
-          <a:p>
-            <a:pPr algn="ctr"/>
-            <a:r>
-              <a:rPr sz="2000" b="1">
-                <a:solidFill>
-                  <a:srgbClr val="202122"/>
-                </a:solidFill>
-                <a:latin typeface="Calibri"/>
-              </a:rPr>
-              <a:t>!</a:t>
-            </a:r>
-          </a:p>
-        </p:txBody>
-      </p:sp>
-      <p:sp>
-        <p:nvSpPr>
-          <p:cNvPr id="9" name="TextBox 8"/>
-          <p:cNvSpPr txBox="1"/>
-          <p:nvPr/>
-        </p:nvSpPr>
-        <p:spPr>
-          <a:xfrm>
-            <a:off x="8046720" y="2606040"/>
-            <a:ext cx="3291840" cy="365760"/>
-          </a:xfrm>
-          <a:prstGeom prst="rect">
-            <a:avLst/>
-          </a:prstGeom>
-          <a:noFill/>
-        </p:spPr>
-        <p:txBody>
-          <a:bodyPr wrap="square" anchor="t" lIns="0" rIns="0" tIns="0" bIns="0"/>
-          <a:lstStyle/>
-          <a:p>
-            <a:pPr algn="l"/>
-            <a:r>
-              <a:rPr sz="1300" b="1" i="0">
-                <a:solidFill>
-                  <a:srgbClr val="A9C8F0"/>
-                </a:solidFill>
-                <a:latin typeface="Calibri"/>
-              </a:rPr>
-              <a:t>KEY IDEA</a:t>
-            </a:r>
-          </a:p>
-        </p:txBody>
-      </p:sp>
-      <p:sp>
-        <p:nvSpPr>
-          <p:cNvPr id="10" name="TextBox 9"/>
-          <p:cNvSpPr txBox="1"/>
-          <p:nvPr/>
-        </p:nvSpPr>
-        <p:spPr>
-          <a:xfrm>
-            <a:off x="8046720" y="3017520"/>
-            <a:ext cx="3291840" cy="2926080"/>
-          </a:xfrm>
-          <a:prstGeom prst="rect">
-            <a:avLst/>
-          </a:prstGeom>
-          <a:noFill/>
-        </p:spPr>
-        <p:txBody>
-          <a:bodyPr wrap="square" anchor="t" lIns="0" rIns="0" tIns="0" bIns="0"/>
-          <a:lstStyle/>
-          <a:p>
-            <a:pPr algn="l"/>
-            <a:r>
-              <a:rPr sz="2200" b="0" i="0">
-                <a:solidFill>
-                  <a:srgbClr val="FFFFFF"/>
-                </a:solidFill>
-                <a:latin typeface="Cambria"/>
-              </a:rPr>
-              <a:t>Bandwidth is how much data can flow; latency is the delay. Both affect how fast your app feels.</a:t>
-            </a:r>
-          </a:p>
-        </p:txBody>
-      </p:sp>
-    </p:spTree>
-  </p:cSld>
-  <p:clrMapOvr>
-    <a:masterClrMapping/>
-  </p:clrMapOvr>
-</p:sld>
-</file>
-
-<file path=ppt/slides/slide6.xml><?xml version="1.0" encoding="utf-8"?>
-<p:sld xmlns:a="http://schemas.openxmlformats.org/drawingml/2006/main" xmlns:p="http://schemas.openxmlformats.org/presentationml/2006/main" xmlns:r="http://schemas.openxmlformats.org/officeDocument/2006/relationships">
-  <p:cSld>
-    <p:bg>
-      <p:bgPr>
-        <a:solidFill>
-          <a:srgbClr val="FFFFFF"/>
-        </a:solidFill>
-        <a:effectLst/>
-      </p:bgPr>
-    </p:bg>
-    <p:spTree>
-      <p:nvGrpSpPr>
-        <p:cNvPr id="1" name=""/>
-        <p:cNvGrpSpPr/>
-        <p:nvPr/>
-      </p:nvGrpSpPr>
-      <p:grpSpPr/>
-      <p:sp>
-        <p:nvSpPr>
-          <p:cNvPr id="2" name="TextBox 1"/>
-          <p:cNvSpPr txBox="1"/>
-          <p:nvPr/>
-        </p:nvSpPr>
-        <p:spPr>
-          <a:xfrm>
-            <a:off x="548640" y="320040"/>
-            <a:ext cx="11094415" cy="274320"/>
-          </a:xfrm>
-          <a:prstGeom prst="rect">
-            <a:avLst/>
-          </a:prstGeom>
-          <a:noFill/>
-        </p:spPr>
-        <p:txBody>
-          <a:bodyPr wrap="square" anchor="t" lIns="0" rIns="0" tIns="0" bIns="0"/>
-          <a:lstStyle/>
-          <a:p>
-            <a:pPr algn="l"/>
-            <a:r>
-              <a:rPr sz="1100" b="1" i="0">
-                <a:solidFill>
-                  <a:srgbClr val="54595D"/>
-                </a:solidFill>
-                <a:latin typeface="Calibri"/>
-              </a:rPr>
-              <a:t>CORE COMPONENT  ·  Core Paper 2</a:t>
-            </a:r>
-          </a:p>
-        </p:txBody>
-      </p:sp>
-      <p:sp>
-        <p:nvSpPr>
-          <p:cNvPr id="3" name="TextBox 2"/>
-          <p:cNvSpPr txBox="1"/>
-          <p:nvPr/>
-        </p:nvSpPr>
-        <p:spPr>
-          <a:xfrm>
-            <a:off x="548640" y="566928"/>
-            <a:ext cx="11094415" cy="822960"/>
-          </a:xfrm>
-          <a:prstGeom prst="rect">
-            <a:avLst/>
-          </a:prstGeom>
-          <a:noFill/>
-        </p:spPr>
-        <p:txBody>
-          <a:bodyPr wrap="square" anchor="ctr" lIns="0" rIns="0" tIns="0" bIns="0"/>
-          <a:lstStyle/>
-          <a:p>
-            <a:pPr algn="l"/>
-            <a:r>
-              <a:rPr sz="3200" b="1" i="0">
-                <a:solidFill>
-                  <a:srgbClr val="03306E"/>
-                </a:solidFill>
-                <a:latin typeface="Cambria"/>
-              </a:rPr>
-              <a:t>Common protocols</a:t>
-            </a:r>
-          </a:p>
-        </p:txBody>
-      </p:sp>
-      <p:sp>
-        <p:nvSpPr>
-          <p:cNvPr id="4" name="TextBox 3"/>
-          <p:cNvSpPr txBox="1"/>
-          <p:nvPr/>
-        </p:nvSpPr>
-        <p:spPr>
-          <a:xfrm>
-            <a:off x="548640" y="6446520"/>
-            <a:ext cx="8229600" cy="274320"/>
-          </a:xfrm>
-          <a:prstGeom prst="rect">
-            <a:avLst/>
-          </a:prstGeom>
-          <a:noFill/>
-        </p:spPr>
-        <p:txBody>
-          <a:bodyPr wrap="square" anchor="t" lIns="0" rIns="0" tIns="0" bIns="0"/>
-          <a:lstStyle/>
-          <a:p>
-            <a:pPr algn="l"/>
-            <a:r>
-              <a:rPr sz="1000" b="0" i="0">
-                <a:solidFill>
-                  <a:srgbClr val="54595D"/>
-                </a:solidFill>
-                <a:latin typeface="Calibri"/>
-              </a:rPr>
-              <a:t>Digital Software Development T Level  ·  Networks</a:t>
-            </a:r>
-          </a:p>
-        </p:txBody>
-      </p:sp>
-      <p:sp>
-        <p:nvSpPr>
-          <p:cNvPr id="5" name="TextBox 4"/>
-          <p:cNvSpPr txBox="1"/>
-          <p:nvPr/>
-        </p:nvSpPr>
-        <p:spPr>
-          <a:xfrm>
-            <a:off x="10728655" y="6446520"/>
-            <a:ext cx="914400" cy="274320"/>
-          </a:xfrm>
-          <a:prstGeom prst="rect">
-            <a:avLst/>
-          </a:prstGeom>
-          <a:noFill/>
-        </p:spPr>
-        <p:txBody>
-          <a:bodyPr wrap="square" anchor="t" lIns="0" rIns="0" tIns="0" bIns="0"/>
-          <a:lstStyle/>
-          <a:p>
-            <a:pPr algn="r"/>
-            <a:r>
-              <a:rPr sz="1000" b="0" i="0">
-                <a:solidFill>
-                  <a:srgbClr val="54595D"/>
-                </a:solidFill>
-                <a:latin typeface="Calibri"/>
-              </a:rPr>
-              <a:t>6</a:t>
-            </a:r>
-          </a:p>
-        </p:txBody>
-      </p:sp>
-      <p:graphicFrame>
-        <p:nvGraphicFramePr>
-          <p:cNvPr id="6" name="Table 5"/>
-          <p:cNvGraphicFramePr>
-            <a:graphicFrameLocks noGrp="1"/>
-          </p:cNvGraphicFramePr>
-          <p:nvPr/>
-        </p:nvGraphicFramePr>
-        <p:xfrm>
-          <a:off x="548640" y="1600200"/>
-          <a:ext cx="11094414" cy="4526280"/>
-        </p:xfrm>
-        <a:graphic>
-          <a:graphicData uri="http://schemas.openxmlformats.org/drawingml/2006/table">
-            <a:tbl>
-              <a:tblPr firstRow="1" bandRow="1">
-                <a:tableStyleId>{5C22544A-7EE6-4342-B048-85BDC9FD1C3A}</a:tableStyleId>
-              </a:tblPr>
-              <a:tblGrid>
-                <a:gridCol w="2064077"/>
-                <a:gridCol w="3354125"/>
-                <a:gridCol w="5676212"/>
-              </a:tblGrid>
-              <a:tr h="905256">
-                <a:tc>
-                  <a:txBody>
-                    <a:bodyPr wrap="square"/>
-                    <a:lstStyle/>
-                    <a:p>
-                      <a:r>
-                        <a:rPr sz="1600" b="1">
-                          <a:solidFill>
-                            <a:srgbClr val="FFFFFF"/>
-                          </a:solidFill>
-                          <a:latin typeface="Calibri"/>
-                        </a:rPr>
-                        <a:t>Group</a:t>
-                      </a:r>
-                    </a:p>
-                  </a:txBody>
-                  <a:tcPr marL="91440" marR="91440" anchor="ctr">
-                    <a:solidFill>
-                      <a:srgbClr val="03306E"/>
-                    </a:solidFill>
-                  </a:tcPr>
-                </a:tc>
-                <a:tc>
-                  <a:txBody>
-                    <a:bodyPr wrap="square"/>
-                    <a:lstStyle/>
-                    <a:p>
-                      <a:r>
-                        <a:rPr sz="1600" b="1">
-                          <a:solidFill>
-                            <a:srgbClr val="FFFFFF"/>
-                          </a:solidFill>
-                          <a:latin typeface="Calibri"/>
-                        </a:rPr>
-                        <a:t>Protocols</a:t>
-                      </a:r>
-                    </a:p>
-                  </a:txBody>
-                  <a:tcPr marL="91440" marR="91440" anchor="ctr">
-                    <a:solidFill>
-                      <a:srgbClr val="03306E"/>
-                    </a:solidFill>
-                  </a:tcPr>
-                </a:tc>
-                <a:tc>
-                  <a:txBody>
-                    <a:bodyPr wrap="square"/>
-                    <a:lstStyle/>
-                    <a:p>
-                      <a:r>
-                        <a:rPr sz="1600" b="1">
-                          <a:solidFill>
-                            <a:srgbClr val="FFFFFF"/>
-                          </a:solidFill>
-                          <a:latin typeface="Calibri"/>
-                        </a:rPr>
-                        <a:t>Purpose</a:t>
-                      </a:r>
-                    </a:p>
-                  </a:txBody>
-                  <a:tcPr marL="91440" marR="91440" anchor="ctr">
-                    <a:solidFill>
-                      <a:srgbClr val="03306E"/>
-                    </a:solidFill>
-                  </a:tcPr>
-                </a:tc>
-              </a:tr>
-              <a:tr h="905256">
-                <a:tc>
-                  <a:txBody>
-                    <a:bodyPr wrap="square"/>
-                    <a:lstStyle/>
-                    <a:p>
-                      <a:r>
-                        <a:rPr sz="1600" b="1">
-                          <a:solidFill>
-                            <a:srgbClr val="03306E"/>
-                          </a:solidFill>
-                          <a:latin typeface="Calibri"/>
-                        </a:rPr>
-                        <a:t>Web</a:t>
-                      </a:r>
-                    </a:p>
-                  </a:txBody>
-                  <a:tcPr marL="91440" marR="91440" anchor="ctr">
-                    <a:solidFill>
-                      <a:srgbClr val="FFFFFF"/>
-                    </a:solidFill>
-                  </a:tcPr>
-                </a:tc>
-                <a:tc>
-                  <a:txBody>
-                    <a:bodyPr wrap="square"/>
-                    <a:lstStyle/>
-                    <a:p>
-                      <a:r>
-                        <a:rPr sz="1600" b="0">
-                          <a:solidFill>
-                            <a:srgbClr val="202122"/>
-                          </a:solidFill>
-                          <a:latin typeface="Calibri"/>
-                        </a:rPr>
-                        <a:t>HTTP, HTTPS</a:t>
-                      </a:r>
-                    </a:p>
-                  </a:txBody>
-                  <a:tcPr marL="91440" marR="91440" anchor="ctr">
-                    <a:solidFill>
-                      <a:srgbClr val="FFFFFF"/>
-                    </a:solidFill>
-                  </a:tcPr>
-                </a:tc>
-                <a:tc>
-                  <a:txBody>
-                    <a:bodyPr wrap="square"/>
-                    <a:lstStyle/>
-                    <a:p>
-                      <a:r>
-                        <a:rPr sz="1600" b="0">
-                          <a:solidFill>
-                            <a:srgbClr val="202122"/>
-                          </a:solidFill>
-                          <a:latin typeface="Calibri"/>
-                        </a:rPr>
-                        <a:t>Web pages and APIs; HTTPS is encrypted</a:t>
-                      </a:r>
-                    </a:p>
-                  </a:txBody>
-                  <a:tcPr marL="91440" marR="91440" anchor="ctr">
-                    <a:solidFill>
-                      <a:srgbClr val="FFFFFF"/>
-                    </a:solidFill>
-                  </a:tcPr>
-                </a:tc>
-              </a:tr>
-              <a:tr h="905256">
-                <a:tc>
-                  <a:txBody>
-                    <a:bodyPr wrap="square"/>
-                    <a:lstStyle/>
-                    <a:p>
-                      <a:r>
-                        <a:rPr sz="1600" b="1">
-                          <a:solidFill>
-                            <a:srgbClr val="03306E"/>
-                          </a:solidFill>
-                          <a:latin typeface="Calibri"/>
-                        </a:rPr>
-                        <a:t>Mail</a:t>
-                      </a:r>
-                    </a:p>
-                  </a:txBody>
-                  <a:tcPr marL="91440" marR="91440" anchor="ctr">
-                    <a:solidFill>
-                      <a:srgbClr val="EAF3FF"/>
-                    </a:solidFill>
-                  </a:tcPr>
-                </a:tc>
-                <a:tc>
-                  <a:txBody>
-                    <a:bodyPr wrap="square"/>
-                    <a:lstStyle/>
-                    <a:p>
-                      <a:r>
-                        <a:rPr sz="1600" b="0">
-                          <a:solidFill>
-                            <a:srgbClr val="202122"/>
-                          </a:solidFill>
-                          <a:latin typeface="Calibri"/>
-                        </a:rPr>
-                        <a:t>SMTP, POP, IMAP</a:t>
-                      </a:r>
-                    </a:p>
-                  </a:txBody>
-                  <a:tcPr marL="91440" marR="91440" anchor="ctr">
-                    <a:solidFill>
-                      <a:srgbClr val="EAF3FF"/>
-                    </a:solidFill>
-                  </a:tcPr>
-                </a:tc>
-                <a:tc>
-                  <a:txBody>
-                    <a:bodyPr wrap="square"/>
-                    <a:lstStyle/>
-                    <a:p>
-                      <a:r>
-                        <a:rPr sz="1600" b="0">
-                          <a:solidFill>
-                            <a:srgbClr val="202122"/>
-                          </a:solidFill>
-                          <a:latin typeface="Calibri"/>
-                        </a:rPr>
-                        <a:t>Send, download or sync mail</a:t>
-                      </a:r>
-                    </a:p>
-                  </a:txBody>
-                  <a:tcPr marL="91440" marR="91440" anchor="ctr">
-                    <a:solidFill>
-                      <a:srgbClr val="EAF3FF"/>
-                    </a:solidFill>
-                  </a:tcPr>
-                </a:tc>
-              </a:tr>
-              <a:tr h="905256">
-                <a:tc>
-                  <a:txBody>
-                    <a:bodyPr wrap="square"/>
-                    <a:lstStyle/>
-                    <a:p>
-                      <a:r>
-                        <a:rPr sz="1600" b="1">
-                          <a:solidFill>
-                            <a:srgbClr val="03306E"/>
-                          </a:solidFill>
-                          <a:latin typeface="Calibri"/>
-                        </a:rPr>
-                        <a:t>Routing</a:t>
-                      </a:r>
-                    </a:p>
-                  </a:txBody>
-                  <a:tcPr marL="91440" marR="91440" anchor="ctr">
-                    <a:solidFill>
-                      <a:srgbClr val="FFFFFF"/>
-                    </a:solidFill>
-                  </a:tcPr>
-                </a:tc>
-                <a:tc>
-                  <a:txBody>
-                    <a:bodyPr wrap="square"/>
-                    <a:lstStyle/>
-                    <a:p>
-                      <a:r>
-                        <a:rPr sz="1600" b="0">
-                          <a:solidFill>
-                            <a:srgbClr val="202122"/>
-                          </a:solidFill>
-                          <a:latin typeface="Calibri"/>
-                        </a:rPr>
-                        <a:t>RIP, OSPF</a:t>
-                      </a:r>
-                    </a:p>
-                  </a:txBody>
-                  <a:tcPr marL="91440" marR="91440" anchor="ctr">
-                    <a:solidFill>
-                      <a:srgbClr val="FFFFFF"/>
-                    </a:solidFill>
-                  </a:tcPr>
-                </a:tc>
-                <a:tc>
-                  <a:txBody>
-                    <a:bodyPr wrap="square"/>
-                    <a:lstStyle/>
-                    <a:p>
-                      <a:r>
-                        <a:rPr sz="1600" b="0">
-                          <a:solidFill>
-                            <a:srgbClr val="202122"/>
-                          </a:solidFill>
-                          <a:latin typeface="Calibri"/>
-                        </a:rPr>
-                        <a:t>Routers share routes</a:t>
-                      </a:r>
-                    </a:p>
-                  </a:txBody>
-                  <a:tcPr marL="91440" marR="91440" anchor="ctr">
-                    <a:solidFill>
-                      <a:srgbClr val="FFFFFF"/>
-                    </a:solidFill>
-                  </a:tcPr>
-                </a:tc>
-              </a:tr>
-              <a:tr h="905256">
-                <a:tc>
-                  <a:txBody>
-                    <a:bodyPr wrap="square"/>
-                    <a:lstStyle/>
-                    <a:p>
-                      <a:r>
-                        <a:rPr sz="1600" b="1">
-                          <a:solidFill>
-                            <a:srgbClr val="03306E"/>
-                          </a:solidFill>
-                          <a:latin typeface="Calibri"/>
-                        </a:rPr>
-                        <a:t>Application</a:t>
-                      </a:r>
-                    </a:p>
-                  </a:txBody>
-                  <a:tcPr marL="91440" marR="91440" anchor="ctr">
-                    <a:solidFill>
-                      <a:srgbClr val="EAF3FF"/>
-                    </a:solidFill>
-                  </a:tcPr>
-                </a:tc>
-                <a:tc>
-                  <a:txBody>
-                    <a:bodyPr wrap="square"/>
-                    <a:lstStyle/>
-                    <a:p>
-                      <a:r>
-                        <a:rPr sz="1600" b="0">
-                          <a:solidFill>
-                            <a:srgbClr val="202122"/>
-                          </a:solidFill>
-                          <a:latin typeface="Calibri"/>
-                        </a:rPr>
-                        <a:t>FTP, SFTP, DHCP, DNS</a:t>
-                      </a:r>
-                    </a:p>
-                  </a:txBody>
-                  <a:tcPr marL="91440" marR="91440" anchor="ctr">
-                    <a:solidFill>
-                      <a:srgbClr val="EAF3FF"/>
-                    </a:solidFill>
-                  </a:tcPr>
-                </a:tc>
-                <a:tc>
-                  <a:txBody>
-                    <a:bodyPr wrap="square"/>
-                    <a:lstStyle/>
-                    <a:p>
-                      <a:r>
-                        <a:rPr sz="1600" b="0">
-                          <a:solidFill>
-                            <a:srgbClr val="202122"/>
-                          </a:solidFill>
-                          <a:latin typeface="Calibri"/>
-                        </a:rPr>
-                        <a:t>File transfer, IP addresses, name lookup</a:t>
-                      </a:r>
-                    </a:p>
-                  </a:txBody>
-                  <a:tcPr marL="91440" marR="91440" anchor="ctr">
-                    <a:solidFill>
-                      <a:srgbClr val="EAF3FF"/>
-                    </a:solidFill>
-                  </a:tcPr>
-                </a:tc>
-              </a:tr>
-            </a:tbl>
-          </a:graphicData>
-        </a:graphic>
-      </p:graphicFrame>
-    </p:spTree>
-  </p:cSld>
-  <p:clrMapOvr>
-    <a:masterClrMapping/>
-  </p:clrMapOvr>
-</p:sld>
-</file>
-
 <file path=ppt/slides/slide7.xml><?xml version="1.0" encoding="utf-8"?>
 <p:sld xmlns:a="http://schemas.openxmlformats.org/drawingml/2006/main" xmlns:p="http://schemas.openxmlformats.org/presentationml/2006/main" xmlns:r="http://schemas.openxmlformats.org/officeDocument/2006/relationships">
   <p:cSld>
@@ -7754,7 +11040,7 @@
                 </a:solidFill>
                 <a:latin typeface="Cambria"/>
               </a:rPr>
-              <a:t>Check your understanding</a:t>
+              <a:t>Data packets</a:t>
             </a:r>
           </a:p>
         </p:txBody>
@@ -7827,14 +11113,129 @@
       </p:sp>
       <p:sp>
         <p:nvSpPr>
-          <p:cNvPr id="6" name="Oval 5"/>
+          <p:cNvPr id="6" name="TextBox 5"/>
+          <p:cNvSpPr txBox="1"/>
+          <p:nvPr/>
+        </p:nvSpPr>
+        <p:spPr>
+          <a:xfrm>
+            <a:off x="548640" y="1554480"/>
+            <a:ext cx="6720840" cy="4617720"/>
+          </a:xfrm>
+          <a:prstGeom prst="rect">
+            <a:avLst/>
+          </a:prstGeom>
+          <a:noFill/>
+        </p:spPr>
+        <p:txBody>
+          <a:bodyPr wrap="square" lIns="0" rIns="0" tIns="0" bIns="0">
+            <a:spAutoFit/>
+          </a:bodyPr>
+          <a:lstStyle/>
+          <a:p>
+            <a:pPr>
+              <a:spcAft>
+                <a:spcPts val="1320"/>
+              </a:spcAft>
+            </a:pPr>
+            <a:r>
+              <a:rPr sz="2200" b="0">
+                <a:solidFill>
+                  <a:srgbClr val="202122"/>
+                </a:solidFill>
+                <a:latin typeface="Calibri"/>
+              </a:rPr>
+              <a:t>Data is sent in packets. Each has a header (source and destination addresses, packet number, protocol), a payload (the data) and a trailer with error checking.</a:t>
+            </a:r>
+          </a:p>
+          <a:p>
+            <a:pPr>
+              <a:spcAft>
+                <a:spcPts val="1320"/>
+              </a:spcAft>
+            </a:pPr>
+            <a:r>
+              <a:rPr sz="2200" b="0">
+                <a:solidFill>
+                  <a:srgbClr val="202122"/>
+                </a:solidFill>
+                <a:latin typeface="Calibri"/>
+              </a:rPr>
+              <a:t>Packets may take different routes and are reassembled in order. A cyclic redundancy check (CRC) detects damaged packets so they can be resent. Packets can be lost through congestion or faults.</a:t>
+            </a:r>
+          </a:p>
+          <a:p>
+            <a:pPr>
+              <a:spcAft>
+                <a:spcPts val="1320"/>
+              </a:spcAft>
+            </a:pPr>
+            <a:r>
+              <a:rPr sz="2200" b="0">
+                <a:solidFill>
+                  <a:srgbClr val="202122"/>
+                </a:solidFill>
+                <a:latin typeface="Calibri"/>
+              </a:rPr>
+              <a:t>Bandwidth is how much data can flow; latency is the delay. High latency makes apps feel slow even on a fast connection.</a:t>
+            </a:r>
+          </a:p>
+        </p:txBody>
+      </p:sp>
+      <p:sp>
+        <p:nvSpPr>
+          <p:cNvPr id="7" name="Rounded Rectangle 6"/>
           <p:cNvSpPr/>
           <p:nvPr/>
         </p:nvSpPr>
         <p:spPr>
           <a:xfrm>
-            <a:off x="548640" y="1618488"/>
-            <a:ext cx="411480" cy="411480"/>
+            <a:off x="7772400" y="1554480"/>
+            <a:ext cx="3867912" cy="4526280"/>
+          </a:xfrm>
+          <a:prstGeom prst="roundRect">
+            <a:avLst>
+              <a:gd name="adj" fmla="val 8000"/>
+            </a:avLst>
+          </a:prstGeom>
+          <a:solidFill>
+            <a:srgbClr val="03306E"/>
+          </a:solidFill>
+          <a:ln>
+            <a:noFill/>
+          </a:ln>
+          <a:effectLst/>
+        </p:spPr>
+        <p:style>
+          <a:lnRef idx="1">
+            <a:schemeClr val="accent1"/>
+          </a:lnRef>
+          <a:fillRef idx="3">
+            <a:schemeClr val="accent1"/>
+          </a:fillRef>
+          <a:effectRef idx="2">
+            <a:schemeClr val="accent1"/>
+          </a:effectRef>
+          <a:fontRef idx="minor">
+            <a:schemeClr val="lt1"/>
+          </a:fontRef>
+        </p:style>
+        <p:txBody>
+          <a:bodyPr rtlCol="0" anchor="ctr"/>
+          <a:lstStyle/>
+          <a:p/>
+        </p:txBody>
+      </p:sp>
+      <p:sp>
+        <p:nvSpPr>
+          <p:cNvPr id="8" name="Oval 7"/>
+          <p:cNvSpPr/>
+          <p:nvPr/>
+        </p:nvSpPr>
+        <p:spPr>
+          <a:xfrm>
+            <a:off x="8046720" y="1828800"/>
+            <a:ext cx="548640" cy="548640"/>
           </a:xfrm>
           <a:prstGeom prst="ellipse">
             <a:avLst/>
@@ -7867,99 +11268,13 @@
           <a:p>
             <a:pPr algn="ctr"/>
             <a:r>
-              <a:rPr sz="1400" b="1">
+              <a:rPr sz="1300" b="1">
                 <a:solidFill>
                   <a:srgbClr val="202122"/>
                 </a:solidFill>
                 <a:latin typeface="Calibri"/>
               </a:rPr>
-              <a:t>1</a:t>
-            </a:r>
-          </a:p>
-        </p:txBody>
-      </p:sp>
-      <p:sp>
-        <p:nvSpPr>
-          <p:cNvPr id="7" name="TextBox 6"/>
-          <p:cNvSpPr txBox="1"/>
-          <p:nvPr/>
-        </p:nvSpPr>
-        <p:spPr>
-          <a:xfrm>
-            <a:off x="1234440" y="1600200"/>
-            <a:ext cx="10408615" cy="1030986"/>
-          </a:xfrm>
-          <a:prstGeom prst="rect">
-            <a:avLst/>
-          </a:prstGeom>
-          <a:noFill/>
-        </p:spPr>
-        <p:txBody>
-          <a:bodyPr wrap="square" anchor="t" lIns="0" rIns="0" tIns="0" bIns="0"/>
-          <a:lstStyle/>
-          <a:p>
-            <a:pPr algn="l"/>
-            <a:r>
-              <a:rPr sz="2200" b="0" i="0">
-                <a:solidFill>
-                  <a:srgbClr val="202122"/>
-                </a:solidFill>
-                <a:latin typeface="Calibri"/>
-              </a:rPr>
-              <a:t>Which layer handles routing in the OSI model?</a:t>
-            </a:r>
-          </a:p>
-        </p:txBody>
-      </p:sp>
-      <p:sp>
-        <p:nvSpPr>
-          <p:cNvPr id="8" name="Oval 7"/>
-          <p:cNvSpPr/>
-          <p:nvPr/>
-        </p:nvSpPr>
-        <p:spPr>
-          <a:xfrm>
-            <a:off x="548640" y="2814066"/>
-            <a:ext cx="411480" cy="411480"/>
-          </a:xfrm>
-          <a:prstGeom prst="ellipse">
-            <a:avLst/>
-          </a:prstGeom>
-          <a:solidFill>
-            <a:srgbClr val="F2B705"/>
-          </a:solidFill>
-          <a:ln>
-            <a:noFill/>
-          </a:ln>
-          <a:effectLst/>
-        </p:spPr>
-        <p:style>
-          <a:lnRef idx="1">
-            <a:schemeClr val="accent1"/>
-          </a:lnRef>
-          <a:fillRef idx="3">
-            <a:schemeClr val="accent1"/>
-          </a:fillRef>
-          <a:effectRef idx="2">
-            <a:schemeClr val="accent1"/>
-          </a:effectRef>
-          <a:fontRef idx="minor">
-            <a:schemeClr val="lt1"/>
-          </a:fontRef>
-        </p:style>
-        <p:txBody>
-          <a:bodyPr rtlCol="0" anchor="ctr" lIns="0" rIns="0" tIns="0" bIns="0"/>
-          <a:lstStyle/>
-          <a:p>
-            <a:pPr algn="ctr"/>
-            <a:r>
-              <a:rPr sz="1400" b="1">
-                <a:solidFill>
-                  <a:srgbClr val="202122"/>
-                </a:solidFill>
-                <a:latin typeface="Calibri"/>
-              </a:rPr>
-              <a:t>2</a:t>
+              <a:t>e.g.</a:t>
             </a:r>
           </a:p>
         </p:txBody>
@@ -7972,8 +11287,8 @@
         </p:nvSpPr>
         <p:spPr>
           <a:xfrm>
-            <a:off x="1234440" y="2795778"/>
-            <a:ext cx="10408615" cy="1030986"/>
+            <a:off x="8046720" y="2560320"/>
+            <a:ext cx="3291840" cy="365760"/>
           </a:xfrm>
           <a:prstGeom prst="rect">
             <a:avLst/>
@@ -7986,80 +11301,27 @@
           <a:p>
             <a:pPr algn="l"/>
             <a:r>
-              <a:rPr sz="2200" b="0" i="0">
-                <a:solidFill>
-                  <a:srgbClr val="202122"/>
-                </a:solidFill>
-                <a:latin typeface="Calibri"/>
-              </a:rPr>
-              <a:t>What is a CRC for?</a:t>
-            </a:r>
-          </a:p>
-        </p:txBody>
-      </p:sp>
-      <p:sp>
-        <p:nvSpPr>
-          <p:cNvPr id="10" name="Oval 9"/>
-          <p:cNvSpPr/>
-          <p:nvPr/>
-        </p:nvSpPr>
-        <p:spPr>
-          <a:xfrm>
-            <a:off x="548640" y="4009644"/>
-            <a:ext cx="411480" cy="411480"/>
-          </a:xfrm>
-          <a:prstGeom prst="ellipse">
-            <a:avLst/>
-          </a:prstGeom>
-          <a:solidFill>
-            <a:srgbClr val="F2B705"/>
-          </a:solidFill>
-          <a:ln>
-            <a:noFill/>
-          </a:ln>
-          <a:effectLst/>
-        </p:spPr>
-        <p:style>
-          <a:lnRef idx="1">
-            <a:schemeClr val="accent1"/>
-          </a:lnRef>
-          <a:fillRef idx="3">
-            <a:schemeClr val="accent1"/>
-          </a:fillRef>
-          <a:effectRef idx="2">
-            <a:schemeClr val="accent1"/>
-          </a:effectRef>
-          <a:fontRef idx="minor">
-            <a:schemeClr val="lt1"/>
-          </a:fontRef>
-        </p:style>
-        <p:txBody>
-          <a:bodyPr rtlCol="0" anchor="ctr" lIns="0" rIns="0" tIns="0" bIns="0"/>
-          <a:lstStyle/>
-          <a:p>
-            <a:pPr algn="ctr"/>
-            <a:r>
-              <a:rPr sz="1400" b="1">
-                <a:solidFill>
-                  <a:srgbClr val="202122"/>
-                </a:solidFill>
-                <a:latin typeface="Calibri"/>
-              </a:rPr>
-              <a:t>3</a:t>
-            </a:r>
-          </a:p>
-        </p:txBody>
-      </p:sp>
-      <p:sp>
-        <p:nvSpPr>
-          <p:cNvPr id="11" name="TextBox 10"/>
+              <a:rPr sz="1300" b="1" i="0">
+                <a:solidFill>
+                  <a:srgbClr val="A9C8F0"/>
+                </a:solidFill>
+                <a:latin typeface="Calibri"/>
+              </a:rPr>
+              <a:t>EXAMPLE</a:t>
+            </a:r>
+          </a:p>
+        </p:txBody>
+      </p:sp>
+      <p:sp>
+        <p:nvSpPr>
+          <p:cNvPr id="10" name="TextBox 9"/>
           <p:cNvSpPr txBox="1"/>
           <p:nvPr/>
         </p:nvSpPr>
         <p:spPr>
           <a:xfrm>
-            <a:off x="1234440" y="3991356"/>
-            <a:ext cx="10408615" cy="1030986"/>
+            <a:off x="8046720" y="2971800"/>
+            <a:ext cx="3291840" cy="2971800"/>
           </a:xfrm>
           <a:prstGeom prst="rect">
             <a:avLst/>
@@ -8072,99 +11334,13 @@
           <a:p>
             <a:pPr algn="l"/>
             <a:r>
-              <a:rPr sz="2200" b="0" i="0">
-                <a:solidFill>
-                  <a:srgbClr val="202122"/>
-                </a:solidFill>
-                <a:latin typeface="Calibri"/>
-              </a:rPr>
-              <a:t>Which protocol turns a domain name into an IP address?</a:t>
-            </a:r>
-          </a:p>
-        </p:txBody>
-      </p:sp>
-      <p:sp>
-        <p:nvSpPr>
-          <p:cNvPr id="12" name="Oval 11"/>
-          <p:cNvSpPr/>
-          <p:nvPr/>
-        </p:nvSpPr>
-        <p:spPr>
-          <a:xfrm>
-            <a:off x="548640" y="5205221"/>
-            <a:ext cx="411480" cy="411480"/>
-          </a:xfrm>
-          <a:prstGeom prst="ellipse">
-            <a:avLst/>
-          </a:prstGeom>
-          <a:solidFill>
-            <a:srgbClr val="F2B705"/>
-          </a:solidFill>
-          <a:ln>
-            <a:noFill/>
-          </a:ln>
-          <a:effectLst/>
-        </p:spPr>
-        <p:style>
-          <a:lnRef idx="1">
-            <a:schemeClr val="accent1"/>
-          </a:lnRef>
-          <a:fillRef idx="3">
-            <a:schemeClr val="accent1"/>
-          </a:fillRef>
-          <a:effectRef idx="2">
-            <a:schemeClr val="accent1"/>
-          </a:effectRef>
-          <a:fontRef idx="minor">
-            <a:schemeClr val="lt1"/>
-          </a:fontRef>
-        </p:style>
-        <p:txBody>
-          <a:bodyPr rtlCol="0" anchor="ctr" lIns="0" rIns="0" tIns="0" bIns="0"/>
-          <a:lstStyle/>
-          <a:p>
-            <a:pPr algn="ctr"/>
-            <a:r>
-              <a:rPr sz="1400" b="1">
-                <a:solidFill>
-                  <a:srgbClr val="202122"/>
-                </a:solidFill>
-                <a:latin typeface="Calibri"/>
-              </a:rPr>
-              <a:t>4</a:t>
-            </a:r>
-          </a:p>
-        </p:txBody>
-      </p:sp>
-      <p:sp>
-        <p:nvSpPr>
-          <p:cNvPr id="13" name="TextBox 12"/>
-          <p:cNvSpPr txBox="1"/>
-          <p:nvPr/>
-        </p:nvSpPr>
-        <p:spPr>
-          <a:xfrm>
-            <a:off x="1234440" y="5186933"/>
-            <a:ext cx="10408615" cy="1030986"/>
-          </a:xfrm>
-          <a:prstGeom prst="rect">
-            <a:avLst/>
-          </a:prstGeom>
-          <a:noFill/>
-        </p:spPr>
-        <p:txBody>
-          <a:bodyPr wrap="square" anchor="t" lIns="0" rIns="0" tIns="0" bIns="0"/>
-          <a:lstStyle/>
-          <a:p>
-            <a:pPr algn="l"/>
-            <a:r>
-              <a:rPr sz="2200" b="0" i="0">
-                <a:solidFill>
-                  <a:srgbClr val="202122"/>
-                </a:solidFill>
-                <a:latin typeface="Calibri"/>
-              </a:rPr>
-              <a:t>What is latency?</a:t>
+              <a:rPr sz="1900" b="0" i="0">
+                <a:solidFill>
+                  <a:srgbClr val="FFFFFF"/>
+                </a:solidFill>
+                <a:latin typeface="Cambria"/>
+              </a:rPr>
+              <a:t>A multiplayer game sends small, frequent packets. Low latency matters more than high bandwidth, or players see lag.</a:t>
             </a:r>
           </a:p>
         </p:txBody>
@@ -8256,7 +11432,7 @@
                 </a:solidFill>
                 <a:latin typeface="Cambria"/>
               </a:rPr>
-              <a:t>Answers</a:t>
+              <a:t>Data packets</a:t>
             </a:r>
           </a:p>
         </p:txBody>
@@ -8329,14 +11505,201 @@
       </p:sp>
       <p:sp>
         <p:nvSpPr>
-          <p:cNvPr id="6" name="Oval 5"/>
+          <p:cNvPr id="6" name="TextBox 5"/>
+          <p:cNvSpPr txBox="1"/>
+          <p:nvPr/>
+        </p:nvSpPr>
+        <p:spPr>
+          <a:xfrm>
+            <a:off x="548640" y="1600200"/>
+            <a:ext cx="6675120" cy="4572000"/>
+          </a:xfrm>
+          <a:prstGeom prst="rect">
+            <a:avLst/>
+          </a:prstGeom>
+          <a:noFill/>
+        </p:spPr>
+        <p:txBody>
+          <a:bodyPr wrap="square" lIns="0" rIns="0" tIns="0" bIns="0">
+            <a:spAutoFit/>
+          </a:bodyPr>
+          <a:lstStyle/>
+          <a:p>
+            <a:pPr marL="274320" indent="-274320">
+              <a:spcAft>
+                <a:spcPts val="1080"/>
+              </a:spcAft>
+              <a:buClr>
+                <a:srgbClr val="0645AD"/>
+              </a:buClr>
+              <a:buFont typeface="Arial"/>
+              <a:buChar char="•"/>
+            </a:pPr>
+            <a:r>
+              <a:rPr sz="2400" b="1">
+                <a:solidFill>
+                  <a:srgbClr val="202122"/>
+                </a:solidFill>
+                <a:latin typeface="Calibri"/>
+              </a:rPr>
+              <a:t>Header:</a:t>
+            </a:r>
+            <a:r>
+              <a:rPr sz="2400" b="0">
+                <a:solidFill>
+                  <a:srgbClr val="202122"/>
+                </a:solidFill>
+                <a:latin typeface="Calibri"/>
+              </a:rPr>
+              <a:t> source and destination addresses, packet number, protocol.</a:t>
+            </a:r>
+          </a:p>
+          <a:p>
+            <a:pPr marL="274320" indent="-274320">
+              <a:spcAft>
+                <a:spcPts val="1080"/>
+              </a:spcAft>
+              <a:buClr>
+                <a:srgbClr val="0645AD"/>
+              </a:buClr>
+              <a:buFont typeface="Arial"/>
+              <a:buChar char="•"/>
+            </a:pPr>
+            <a:r>
+              <a:rPr sz="2400" b="1">
+                <a:solidFill>
+                  <a:srgbClr val="202122"/>
+                </a:solidFill>
+                <a:latin typeface="Calibri"/>
+              </a:rPr>
+              <a:t>Payload:</a:t>
+            </a:r>
+            <a:r>
+              <a:rPr sz="2400" b="0">
+                <a:solidFill>
+                  <a:srgbClr val="202122"/>
+                </a:solidFill>
+                <a:latin typeface="Calibri"/>
+              </a:rPr>
+              <a:t> the data itself.</a:t>
+            </a:r>
+          </a:p>
+          <a:p>
+            <a:pPr marL="274320" indent="-274320">
+              <a:spcAft>
+                <a:spcPts val="1080"/>
+              </a:spcAft>
+              <a:buClr>
+                <a:srgbClr val="0645AD"/>
+              </a:buClr>
+              <a:buFont typeface="Arial"/>
+              <a:buChar char="•"/>
+            </a:pPr>
+            <a:r>
+              <a:rPr sz="2400" b="1">
+                <a:solidFill>
+                  <a:srgbClr val="202122"/>
+                </a:solidFill>
+                <a:latin typeface="Calibri"/>
+              </a:rPr>
+              <a:t>Trailer:</a:t>
+            </a:r>
+            <a:r>
+              <a:rPr sz="2400" b="0">
+                <a:solidFill>
+                  <a:srgbClr val="202122"/>
+                </a:solidFill>
+                <a:latin typeface="Calibri"/>
+              </a:rPr>
+              <a:t> error checking, e.g. a cyclic redundancy check (CRC).</a:t>
+            </a:r>
+          </a:p>
+          <a:p>
+            <a:pPr marL="274320" indent="-274320">
+              <a:spcAft>
+                <a:spcPts val="1080"/>
+              </a:spcAft>
+              <a:buClr>
+                <a:srgbClr val="0645AD"/>
+              </a:buClr>
+              <a:buFont typeface="Arial"/>
+              <a:buChar char="•"/>
+            </a:pPr>
+            <a:r>
+              <a:rPr sz="2400" b="1">
+                <a:solidFill>
+                  <a:srgbClr val="202122"/>
+                </a:solidFill>
+                <a:latin typeface="Calibri"/>
+              </a:rPr>
+              <a:t>Packet switching:</a:t>
+            </a:r>
+            <a:r>
+              <a:rPr sz="2400" b="0">
+                <a:solidFill>
+                  <a:srgbClr val="202122"/>
+                </a:solidFill>
+                <a:latin typeface="Calibri"/>
+              </a:rPr>
+              <a:t> packets take different routes and are reassembled.</a:t>
+            </a:r>
+          </a:p>
+        </p:txBody>
+      </p:sp>
+      <p:sp>
+        <p:nvSpPr>
+          <p:cNvPr id="7" name="Rounded Rectangle 6"/>
           <p:cNvSpPr/>
           <p:nvPr/>
         </p:nvSpPr>
         <p:spPr>
           <a:xfrm>
-            <a:off x="548640" y="1618488"/>
-            <a:ext cx="411480" cy="411480"/>
+            <a:off x="7772400" y="1600200"/>
+            <a:ext cx="3867912" cy="4434840"/>
+          </a:xfrm>
+          <a:prstGeom prst="roundRect">
+            <a:avLst>
+              <a:gd name="adj" fmla="val 8000"/>
+            </a:avLst>
+          </a:prstGeom>
+          <a:solidFill>
+            <a:srgbClr val="03306E"/>
+          </a:solidFill>
+          <a:ln>
+            <a:noFill/>
+          </a:ln>
+          <a:effectLst/>
+        </p:spPr>
+        <p:style>
+          <a:lnRef idx="1">
+            <a:schemeClr val="accent1"/>
+          </a:lnRef>
+          <a:fillRef idx="3">
+            <a:schemeClr val="accent1"/>
+          </a:fillRef>
+          <a:effectRef idx="2">
+            <a:schemeClr val="accent1"/>
+          </a:effectRef>
+          <a:fontRef idx="minor">
+            <a:schemeClr val="lt1"/>
+          </a:fontRef>
+        </p:style>
+        <p:txBody>
+          <a:bodyPr rtlCol="0" anchor="ctr"/>
+          <a:lstStyle/>
+          <a:p/>
+        </p:txBody>
+      </p:sp>
+      <p:sp>
+        <p:nvSpPr>
+          <p:cNvPr id="8" name="Oval 7"/>
+          <p:cNvSpPr/>
+          <p:nvPr/>
+        </p:nvSpPr>
+        <p:spPr>
+          <a:xfrm>
+            <a:off x="8046720" y="1874519"/>
+            <a:ext cx="548640" cy="548640"/>
           </a:xfrm>
           <a:prstGeom prst="ellipse">
             <a:avLst/>
@@ -8369,110 +11732,13 @@
           <a:p>
             <a:pPr algn="ctr"/>
             <a:r>
-              <a:rPr sz="1400" b="1">
+              <a:rPr sz="2000" b="1">
                 <a:solidFill>
                   <a:srgbClr val="202122"/>
                 </a:solidFill>
                 <a:latin typeface="Calibri"/>
               </a:rPr>
-              <a:t>1</a:t>
-            </a:r>
-          </a:p>
-        </p:txBody>
-      </p:sp>
-      <p:sp>
-        <p:nvSpPr>
-          <p:cNvPr id="7" name="TextBox 6"/>
-          <p:cNvSpPr txBox="1"/>
-          <p:nvPr/>
-        </p:nvSpPr>
-        <p:spPr>
-          <a:xfrm>
-            <a:off x="1234440" y="1600200"/>
-            <a:ext cx="10408615" cy="1030986"/>
-          </a:xfrm>
-          <a:prstGeom prst="rect">
-            <a:avLst/>
-          </a:prstGeom>
-          <a:noFill/>
-        </p:spPr>
-        <p:txBody>
-          <a:bodyPr wrap="square" anchor="t" lIns="0" rIns="0" tIns="0" bIns="0"/>
-          <a:lstStyle/>
-          <a:p>
-            <a:pPr algn="l"/>
-            <a:r>
-              <a:rPr sz="1800" b="0" i="0">
-                <a:solidFill>
-                  <a:srgbClr val="54595D"/>
-                </a:solidFill>
-                <a:latin typeface="Calibri"/>
-              </a:rPr>
-              <a:t>Which layer handles routing in the OSI model?</a:t>
-            </a:r>
-          </a:p>
-          <a:p>
-            <a:r>
-              <a:rPr sz="1800" b="1">
-                <a:solidFill>
-                  <a:srgbClr val="03306E"/>
-                </a:solidFill>
-                <a:latin typeface="Calibri"/>
-              </a:rPr>
-              <a:t>Layer 3, network.</a:t>
-            </a:r>
-          </a:p>
-        </p:txBody>
-      </p:sp>
-      <p:sp>
-        <p:nvSpPr>
-          <p:cNvPr id="8" name="Oval 7"/>
-          <p:cNvSpPr/>
-          <p:nvPr/>
-        </p:nvSpPr>
-        <p:spPr>
-          <a:xfrm>
-            <a:off x="548640" y="2814066"/>
-            <a:ext cx="411480" cy="411480"/>
-          </a:xfrm>
-          <a:prstGeom prst="ellipse">
-            <a:avLst/>
-          </a:prstGeom>
-          <a:solidFill>
-            <a:srgbClr val="F2B705"/>
-          </a:solidFill>
-          <a:ln>
-            <a:noFill/>
-          </a:ln>
-          <a:effectLst/>
-        </p:spPr>
-        <p:style>
-          <a:lnRef idx="1">
-            <a:schemeClr val="accent1"/>
-          </a:lnRef>
-          <a:fillRef idx="3">
-            <a:schemeClr val="accent1"/>
-          </a:fillRef>
-          <a:effectRef idx="2">
-            <a:schemeClr val="accent1"/>
-          </a:effectRef>
-          <a:fontRef idx="minor">
-            <a:schemeClr val="lt1"/>
-          </a:fontRef>
-        </p:style>
-        <p:txBody>
-          <a:bodyPr rtlCol="0" anchor="ctr" lIns="0" rIns="0" tIns="0" bIns="0"/>
-          <a:lstStyle/>
-          <a:p>
-            <a:pPr algn="ctr"/>
-            <a:r>
-              <a:rPr sz="1400" b="1">
-                <a:solidFill>
-                  <a:srgbClr val="202122"/>
-                </a:solidFill>
-                <a:latin typeface="Calibri"/>
-              </a:rPr>
-              <a:t>2</a:t>
+              <a:t>!</a:t>
             </a:r>
           </a:p>
         </p:txBody>
@@ -8485,8 +11751,8 @@
         </p:nvSpPr>
         <p:spPr>
           <a:xfrm>
-            <a:off x="1234440" y="2795778"/>
-            <a:ext cx="10408615" cy="1030986"/>
+            <a:off x="8046720" y="2606040"/>
+            <a:ext cx="3291840" cy="365760"/>
           </a:xfrm>
           <a:prstGeom prst="rect">
             <a:avLst/>
@@ -8499,91 +11765,27 @@
           <a:p>
             <a:pPr algn="l"/>
             <a:r>
-              <a:rPr sz="1800" b="0" i="0">
-                <a:solidFill>
-                  <a:srgbClr val="54595D"/>
-                </a:solidFill>
-                <a:latin typeface="Calibri"/>
-              </a:rPr>
-              <a:t>What is a CRC for?</a:t>
-            </a:r>
-          </a:p>
-          <a:p>
-            <a:r>
-              <a:rPr sz="1800" b="1">
-                <a:solidFill>
-                  <a:srgbClr val="03306E"/>
-                </a:solidFill>
-                <a:latin typeface="Calibri"/>
-              </a:rPr>
-              <a:t>Detecting errors in transmitted data.</a:t>
-            </a:r>
-          </a:p>
-        </p:txBody>
-      </p:sp>
-      <p:sp>
-        <p:nvSpPr>
-          <p:cNvPr id="10" name="Oval 9"/>
-          <p:cNvSpPr/>
-          <p:nvPr/>
-        </p:nvSpPr>
-        <p:spPr>
-          <a:xfrm>
-            <a:off x="548640" y="4009644"/>
-            <a:ext cx="411480" cy="411480"/>
-          </a:xfrm>
-          <a:prstGeom prst="ellipse">
-            <a:avLst/>
-          </a:prstGeom>
-          <a:solidFill>
-            <a:srgbClr val="F2B705"/>
-          </a:solidFill>
-          <a:ln>
-            <a:noFill/>
-          </a:ln>
-          <a:effectLst/>
-        </p:spPr>
-        <p:style>
-          <a:lnRef idx="1">
-            <a:schemeClr val="accent1"/>
-          </a:lnRef>
-          <a:fillRef idx="3">
-            <a:schemeClr val="accent1"/>
-          </a:fillRef>
-          <a:effectRef idx="2">
-            <a:schemeClr val="accent1"/>
-          </a:effectRef>
-          <a:fontRef idx="minor">
-            <a:schemeClr val="lt1"/>
-          </a:fontRef>
-        </p:style>
-        <p:txBody>
-          <a:bodyPr rtlCol="0" anchor="ctr" lIns="0" rIns="0" tIns="0" bIns="0"/>
-          <a:lstStyle/>
-          <a:p>
-            <a:pPr algn="ctr"/>
-            <a:r>
-              <a:rPr sz="1400" b="1">
-                <a:solidFill>
-                  <a:srgbClr val="202122"/>
-                </a:solidFill>
-                <a:latin typeface="Calibri"/>
-              </a:rPr>
-              <a:t>3</a:t>
-            </a:r>
-          </a:p>
-        </p:txBody>
-      </p:sp>
-      <p:sp>
-        <p:nvSpPr>
-          <p:cNvPr id="11" name="TextBox 10"/>
+              <a:rPr sz="1300" b="1" i="0">
+                <a:solidFill>
+                  <a:srgbClr val="A9C8F0"/>
+                </a:solidFill>
+                <a:latin typeface="Calibri"/>
+              </a:rPr>
+              <a:t>KEY IDEA</a:t>
+            </a:r>
+          </a:p>
+        </p:txBody>
+      </p:sp>
+      <p:sp>
+        <p:nvSpPr>
+          <p:cNvPr id="10" name="TextBox 9"/>
           <p:cNvSpPr txBox="1"/>
           <p:nvPr/>
         </p:nvSpPr>
         <p:spPr>
           <a:xfrm>
-            <a:off x="1234440" y="3991356"/>
-            <a:ext cx="10408615" cy="1030986"/>
+            <a:off x="8046720" y="3017520"/>
+            <a:ext cx="3291840" cy="2926080"/>
           </a:xfrm>
           <a:prstGeom prst="rect">
             <a:avLst/>
@@ -8596,121 +11798,13 @@
           <a:p>
             <a:pPr algn="l"/>
             <a:r>
-              <a:rPr sz="1800" b="0" i="0">
-                <a:solidFill>
-                  <a:srgbClr val="54595D"/>
-                </a:solidFill>
-                <a:latin typeface="Calibri"/>
-              </a:rPr>
-              <a:t>Which protocol turns a domain name into an IP address?</a:t>
-            </a:r>
-          </a:p>
-          <a:p>
-            <a:r>
-              <a:rPr sz="1800" b="1">
-                <a:solidFill>
-                  <a:srgbClr val="03306E"/>
-                </a:solidFill>
-                <a:latin typeface="Calibri"/>
-              </a:rPr>
-              <a:t>DNS.</a:t>
-            </a:r>
-          </a:p>
-        </p:txBody>
-      </p:sp>
-      <p:sp>
-        <p:nvSpPr>
-          <p:cNvPr id="12" name="Oval 11"/>
-          <p:cNvSpPr/>
-          <p:nvPr/>
-        </p:nvSpPr>
-        <p:spPr>
-          <a:xfrm>
-            <a:off x="548640" y="5205221"/>
-            <a:ext cx="411480" cy="411480"/>
-          </a:xfrm>
-          <a:prstGeom prst="ellipse">
-            <a:avLst/>
-          </a:prstGeom>
-          <a:solidFill>
-            <a:srgbClr val="F2B705"/>
-          </a:solidFill>
-          <a:ln>
-            <a:noFill/>
-          </a:ln>
-          <a:effectLst/>
-        </p:spPr>
-        <p:style>
-          <a:lnRef idx="1">
-            <a:schemeClr val="accent1"/>
-          </a:lnRef>
-          <a:fillRef idx="3">
-            <a:schemeClr val="accent1"/>
-          </a:fillRef>
-          <a:effectRef idx="2">
-            <a:schemeClr val="accent1"/>
-          </a:effectRef>
-          <a:fontRef idx="minor">
-            <a:schemeClr val="lt1"/>
-          </a:fontRef>
-        </p:style>
-        <p:txBody>
-          <a:bodyPr rtlCol="0" anchor="ctr" lIns="0" rIns="0" tIns="0" bIns="0"/>
-          <a:lstStyle/>
-          <a:p>
-            <a:pPr algn="ctr"/>
-            <a:r>
-              <a:rPr sz="1400" b="1">
-                <a:solidFill>
-                  <a:srgbClr val="202122"/>
-                </a:solidFill>
-                <a:latin typeface="Calibri"/>
-              </a:rPr>
-              <a:t>4</a:t>
-            </a:r>
-          </a:p>
-        </p:txBody>
-      </p:sp>
-      <p:sp>
-        <p:nvSpPr>
-          <p:cNvPr id="13" name="TextBox 12"/>
-          <p:cNvSpPr txBox="1"/>
-          <p:nvPr/>
-        </p:nvSpPr>
-        <p:spPr>
-          <a:xfrm>
-            <a:off x="1234440" y="5186933"/>
-            <a:ext cx="10408615" cy="1030986"/>
-          </a:xfrm>
-          <a:prstGeom prst="rect">
-            <a:avLst/>
-          </a:prstGeom>
-          <a:noFill/>
-        </p:spPr>
-        <p:txBody>
-          <a:bodyPr wrap="square" anchor="t" lIns="0" rIns="0" tIns="0" bIns="0"/>
-          <a:lstStyle/>
-          <a:p>
-            <a:pPr algn="l"/>
-            <a:r>
-              <a:rPr sz="1800" b="0" i="0">
-                <a:solidFill>
-                  <a:srgbClr val="54595D"/>
-                </a:solidFill>
-                <a:latin typeface="Calibri"/>
-              </a:rPr>
-              <a:t>What is latency?</a:t>
-            </a:r>
-          </a:p>
-          <a:p>
-            <a:r>
-              <a:rPr sz="1800" b="1">
-                <a:solidFill>
-                  <a:srgbClr val="03306E"/>
-                </a:solidFill>
-                <a:latin typeface="Calibri"/>
-              </a:rPr>
-              <a:t>The delay before data arrives.</a:t>
+              <a:rPr sz="2200" b="0" i="0">
+                <a:solidFill>
+                  <a:srgbClr val="FFFFFF"/>
+                </a:solidFill>
+                <a:latin typeface="Cambria"/>
+              </a:rPr>
+              <a:t>Bandwidth is how much data can flow; latency is the delay. Both affect how fast your app feels.</a:t>
             </a:r>
           </a:p>
         </p:txBody>
@@ -8802,7 +11896,7 @@
                 </a:solidFill>
                 <a:latin typeface="Cambria"/>
               </a:rPr>
-              <a:t>Activity: Trace an API call</a:t>
+              <a:t>Quick check: Data packets</a:t>
             </a:r>
           </a:p>
         </p:txBody>
@@ -8875,19 +11969,17 @@
       </p:sp>
       <p:sp>
         <p:nvSpPr>
-          <p:cNvPr id="6" name="Rounded Rectangle 5"/>
+          <p:cNvPr id="6" name="Oval 5"/>
           <p:cNvSpPr/>
           <p:nvPr/>
         </p:nvSpPr>
         <p:spPr>
           <a:xfrm>
-            <a:off x="548640" y="1508760"/>
-            <a:ext cx="2011680" cy="457200"/>
-          </a:xfrm>
-          <a:prstGeom prst="roundRect">
-            <a:avLst>
-              <a:gd name="adj" fmla="val 50000"/>
-            </a:avLst>
+            <a:off x="548640" y="1691640"/>
+            <a:ext cx="502920" cy="502920"/>
+          </a:xfrm>
+          <a:prstGeom prst="ellipse">
+            <a:avLst/>
           </a:prstGeom>
           <a:solidFill>
             <a:srgbClr val="F2B705"/>
@@ -8912,9 +12004,20 @@
           </a:fontRef>
         </p:style>
         <p:txBody>
-          <a:bodyPr rtlCol="0" anchor="ctr"/>
-          <a:lstStyle/>
-          <a:p/>
+          <a:bodyPr rtlCol="0" anchor="ctr" lIns="0" rIns="0" tIns="0" bIns="0"/>
+          <a:lstStyle/>
+          <a:p>
+            <a:pPr algn="ctr"/>
+            <a:r>
+              <a:rPr sz="1600" b="1">
+                <a:solidFill>
+                  <a:srgbClr val="202122"/>
+                </a:solidFill>
+                <a:latin typeface="Calibri"/>
+              </a:rPr>
+              <a:t>1</a:t>
+            </a:r>
+          </a:p>
         </p:txBody>
       </p:sp>
       <p:sp>
@@ -8925,8 +12028,8 @@
         </p:nvSpPr>
         <p:spPr>
           <a:xfrm>
-            <a:off x="548640" y="1508760"/>
-            <a:ext cx="2011680" cy="457200"/>
+            <a:off x="1371600" y="1645920"/>
+            <a:ext cx="10271455" cy="1188720"/>
           </a:xfrm>
           <a:prstGeom prst="rect">
             <a:avLst/>
@@ -8934,71 +12037,38 @@
           <a:noFill/>
         </p:spPr>
         <p:txBody>
-          <a:bodyPr wrap="square" anchor="ctr" lIns="0" rIns="0" tIns="0" bIns="0"/>
-          <a:lstStyle/>
-          <a:p>
-            <a:pPr algn="ctr"/>
-            <a:r>
-              <a:rPr sz="1400" b="1" i="0">
+          <a:bodyPr wrap="square" anchor="t" lIns="0" rIns="0" tIns="0" bIns="0"/>
+          <a:lstStyle/>
+          <a:p>
+            <a:pPr algn="l"/>
+            <a:r>
+              <a:rPr sz="2400" b="0" i="0">
                 <a:solidFill>
                   <a:srgbClr val="202122"/>
                 </a:solidFill>
                 <a:latin typeface="Calibri"/>
               </a:rPr>
-              <a:t>20 minutes</a:t>
-            </a:r>
-          </a:p>
-        </p:txBody>
-      </p:sp>
-      <p:sp>
-        <p:nvSpPr>
-          <p:cNvPr id="8" name="TextBox 7"/>
-          <p:cNvSpPr txBox="1"/>
-          <p:nvPr/>
-        </p:nvSpPr>
-        <p:spPr>
-          <a:xfrm>
-            <a:off x="2743200" y="1508760"/>
-            <a:ext cx="4754880" cy="457200"/>
-          </a:xfrm>
-          <a:prstGeom prst="rect">
-            <a:avLst/>
-          </a:prstGeom>
-          <a:noFill/>
-        </p:spPr>
-        <p:txBody>
-          <a:bodyPr wrap="square" anchor="ctr" lIns="0" rIns="0" tIns="0" bIns="0"/>
-          <a:lstStyle/>
-          <a:p>
-            <a:pPr algn="l"/>
-            <a:r>
-              <a:rPr sz="1400" b="0" i="1">
-                <a:solidFill>
-                  <a:srgbClr val="54595D"/>
-                </a:solidFill>
-                <a:latin typeface="Calibri"/>
-              </a:rPr>
-              <a:t>Pairs</a:t>
-            </a:r>
-          </a:p>
-        </p:txBody>
-      </p:sp>
-      <p:sp>
-        <p:nvSpPr>
-          <p:cNvPr id="9" name="Oval 8"/>
+              <a:t>What does a packet header contain?</a:t>
+            </a:r>
+          </a:p>
+        </p:txBody>
+      </p:sp>
+      <p:sp>
+        <p:nvSpPr>
+          <p:cNvPr id="8" name="Oval 7"/>
           <p:cNvSpPr/>
           <p:nvPr/>
         </p:nvSpPr>
         <p:spPr>
           <a:xfrm>
-            <a:off x="548640" y="2482596"/>
-            <a:ext cx="384048" cy="384048"/>
+            <a:off x="548640" y="3108960"/>
+            <a:ext cx="502920" cy="502920"/>
           </a:xfrm>
           <a:prstGeom prst="ellipse">
             <a:avLst/>
           </a:prstGeom>
           <a:solidFill>
-            <a:srgbClr val="0645AD"/>
+            <a:srgbClr val="F2B705"/>
           </a:solidFill>
           <a:ln>
             <a:noFill/>
@@ -9025,27 +12095,27 @@
           <a:p>
             <a:pPr algn="ctr"/>
             <a:r>
-              <a:rPr sz="1300" b="1">
-                <a:solidFill>
-                  <a:srgbClr val="FFFFFF"/>
-                </a:solidFill>
-                <a:latin typeface="Calibri"/>
-              </a:rPr>
-              <a:t>1</a:t>
-            </a:r>
-          </a:p>
-        </p:txBody>
-      </p:sp>
-      <p:sp>
-        <p:nvSpPr>
-          <p:cNvPr id="10" name="TextBox 9"/>
+              <a:rPr sz="1600" b="1">
+                <a:solidFill>
+                  <a:srgbClr val="202122"/>
+                </a:solidFill>
+                <a:latin typeface="Calibri"/>
+              </a:rPr>
+              <a:t>2</a:t>
+            </a:r>
+          </a:p>
+        </p:txBody>
+      </p:sp>
+      <p:sp>
+        <p:nvSpPr>
+          <p:cNvPr id="9" name="TextBox 8"/>
           <p:cNvSpPr txBox="1"/>
           <p:nvPr/>
         </p:nvSpPr>
         <p:spPr>
           <a:xfrm>
-            <a:off x="1143000" y="2240280"/>
-            <a:ext cx="5943600" cy="868680"/>
+            <a:off x="1371600" y="3063240"/>
+            <a:ext cx="10271455" cy="1188720"/>
           </a:xfrm>
           <a:prstGeom prst="rect">
             <a:avLst/>
@@ -9053,38 +12123,38 @@
           <a:noFill/>
         </p:spPr>
         <p:txBody>
-          <a:bodyPr wrap="square" anchor="ctr" lIns="0" rIns="0" tIns="0" bIns="0"/>
+          <a:bodyPr wrap="square" anchor="t" lIns="0" rIns="0" tIns="0" bIns="0"/>
           <a:lstStyle/>
           <a:p>
             <a:pPr algn="l"/>
             <a:r>
-              <a:rPr sz="1700" b="0" i="0">
+              <a:rPr sz="2400" b="0" i="0">
                 <a:solidFill>
                   <a:srgbClr val="202122"/>
                 </a:solidFill>
                 <a:latin typeface="Calibri"/>
               </a:rPr>
-              <a:t>Draw what happens when an app requests weather data from an API.</a:t>
-            </a:r>
-          </a:p>
-        </p:txBody>
-      </p:sp>
-      <p:sp>
-        <p:nvSpPr>
-          <p:cNvPr id="11" name="Oval 10"/>
+              <a:t>What is a CRC for?</a:t>
+            </a:r>
+          </a:p>
+        </p:txBody>
+      </p:sp>
+      <p:sp>
+        <p:nvSpPr>
+          <p:cNvPr id="10" name="Oval 9"/>
           <p:cNvSpPr/>
           <p:nvPr/>
         </p:nvSpPr>
         <p:spPr>
           <a:xfrm>
-            <a:off x="548640" y="3461004"/>
-            <a:ext cx="384048" cy="384048"/>
+            <a:off x="548640" y="4526280"/>
+            <a:ext cx="502920" cy="502920"/>
           </a:xfrm>
           <a:prstGeom prst="ellipse">
             <a:avLst/>
           </a:prstGeom>
           <a:solidFill>
-            <a:srgbClr val="0645AD"/>
+            <a:srgbClr val="F2B705"/>
           </a:solidFill>
           <a:ln>
             <a:noFill/>
@@ -9111,13 +12181,46 @@
           <a:p>
             <a:pPr algn="ctr"/>
             <a:r>
-              <a:rPr sz="1300" b="1">
-                <a:solidFill>
-                  <a:srgbClr val="FFFFFF"/>
-                </a:solidFill>
-                <a:latin typeface="Calibri"/>
-              </a:rPr>
-              <a:t>2</a:t>
+              <a:rPr sz="1600" b="1">
+                <a:solidFill>
+                  <a:srgbClr val="202122"/>
+                </a:solidFill>
+                <a:latin typeface="Calibri"/>
+              </a:rPr>
+              <a:t>3</a:t>
+            </a:r>
+          </a:p>
+        </p:txBody>
+      </p:sp>
+      <p:sp>
+        <p:nvSpPr>
+          <p:cNvPr id="11" name="TextBox 10"/>
+          <p:cNvSpPr txBox="1"/>
+          <p:nvPr/>
+        </p:nvSpPr>
+        <p:spPr>
+          <a:xfrm>
+            <a:off x="1371600" y="4480560"/>
+            <a:ext cx="10271455" cy="1188720"/>
+          </a:xfrm>
+          <a:prstGeom prst="rect">
+            <a:avLst/>
+          </a:prstGeom>
+          <a:noFill/>
+        </p:spPr>
+        <p:txBody>
+          <a:bodyPr wrap="square" anchor="t" lIns="0" rIns="0" tIns="0" bIns="0"/>
+          <a:lstStyle/>
+          <a:p>
+            <a:pPr algn="l"/>
+            <a:r>
+              <a:rPr sz="2400" b="0" i="0">
+                <a:solidFill>
+                  <a:srgbClr val="202122"/>
+                </a:solidFill>
+                <a:latin typeface="Calibri"/>
+              </a:rPr>
+              <a:t>Why does latency matter for games?</a:t>
             </a:r>
           </a:p>
         </p:txBody>
@@ -9130,8 +12233,8 @@
         </p:nvSpPr>
         <p:spPr>
           <a:xfrm>
-            <a:off x="1143000" y="3218688"/>
-            <a:ext cx="5943600" cy="868680"/>
+            <a:off x="548640" y="5852160"/>
+            <a:ext cx="11094415" cy="365760"/>
           </a:xfrm>
           <a:prstGeom prst="rect">
             <a:avLst/>
@@ -9139,353 +12242,18 @@
           <a:noFill/>
         </p:spPr>
         <p:txBody>
-          <a:bodyPr wrap="square" anchor="ctr" lIns="0" rIns="0" tIns="0" bIns="0"/>
+          <a:bodyPr wrap="square" anchor="t" lIns="0" rIns="0" tIns="0" bIns="0"/>
           <a:lstStyle/>
           <a:p>
             <a:pPr algn="l"/>
             <a:r>
-              <a:rPr sz="1700" b="0" i="0">
-                <a:solidFill>
-                  <a:srgbClr val="202122"/>
-                </a:solidFill>
-                <a:latin typeface="Calibri"/>
-              </a:rPr>
-              <a:t>Label the protocols used (DNS, HTTPS, TCP/IP).</a:t>
-            </a:r>
-          </a:p>
-        </p:txBody>
-      </p:sp>
-      <p:sp>
-        <p:nvSpPr>
-          <p:cNvPr id="13" name="Oval 12"/>
-          <p:cNvSpPr/>
-          <p:nvPr/>
-        </p:nvSpPr>
-        <p:spPr>
-          <a:xfrm>
-            <a:off x="548640" y="4439412"/>
-            <a:ext cx="384048" cy="384048"/>
-          </a:xfrm>
-          <a:prstGeom prst="ellipse">
-            <a:avLst/>
-          </a:prstGeom>
-          <a:solidFill>
-            <a:srgbClr val="0645AD"/>
-          </a:solidFill>
-          <a:ln>
-            <a:noFill/>
-          </a:ln>
-          <a:effectLst/>
-        </p:spPr>
-        <p:style>
-          <a:lnRef idx="1">
-            <a:schemeClr val="accent1"/>
-          </a:lnRef>
-          <a:fillRef idx="3">
-            <a:schemeClr val="accent1"/>
-          </a:fillRef>
-          <a:effectRef idx="2">
-            <a:schemeClr val="accent1"/>
-          </a:effectRef>
-          <a:fontRef idx="minor">
-            <a:schemeClr val="lt1"/>
-          </a:fontRef>
-        </p:style>
-        <p:txBody>
-          <a:bodyPr rtlCol="0" anchor="ctr" lIns="0" rIns="0" tIns="0" bIns="0"/>
-          <a:lstStyle/>
-          <a:p>
-            <a:pPr algn="ctr"/>
-            <a:r>
-              <a:rPr sz="1300" b="1">
-                <a:solidFill>
-                  <a:srgbClr val="FFFFFF"/>
-                </a:solidFill>
-                <a:latin typeface="Calibri"/>
-              </a:rPr>
-              <a:t>3</a:t>
-            </a:r>
-          </a:p>
-        </p:txBody>
-      </p:sp>
-      <p:sp>
-        <p:nvSpPr>
-          <p:cNvPr id="14" name="TextBox 13"/>
-          <p:cNvSpPr txBox="1"/>
-          <p:nvPr/>
-        </p:nvSpPr>
-        <p:spPr>
-          <a:xfrm>
-            <a:off x="1143000" y="4197096"/>
-            <a:ext cx="5943600" cy="868680"/>
-          </a:xfrm>
-          <a:prstGeom prst="rect">
-            <a:avLst/>
-          </a:prstGeom>
-          <a:noFill/>
-        </p:spPr>
-        <p:txBody>
-          <a:bodyPr wrap="square" anchor="ctr" lIns="0" rIns="0" tIns="0" bIns="0"/>
-          <a:lstStyle/>
-          <a:p>
-            <a:pPr algn="l"/>
-            <a:r>
-              <a:rPr sz="1700" b="0" i="0">
-                <a:solidFill>
-                  <a:srgbClr val="202122"/>
-                </a:solidFill>
-                <a:latin typeface="Calibri"/>
-              </a:rPr>
-              <a:t>Show which OSI layers are involved.</a:t>
-            </a:r>
-          </a:p>
-        </p:txBody>
-      </p:sp>
-      <p:sp>
-        <p:nvSpPr>
-          <p:cNvPr id="15" name="Oval 14"/>
-          <p:cNvSpPr/>
-          <p:nvPr/>
-        </p:nvSpPr>
-        <p:spPr>
-          <a:xfrm>
-            <a:off x="548640" y="5417820"/>
-            <a:ext cx="384048" cy="384048"/>
-          </a:xfrm>
-          <a:prstGeom prst="ellipse">
-            <a:avLst/>
-          </a:prstGeom>
-          <a:solidFill>
-            <a:srgbClr val="0645AD"/>
-          </a:solidFill>
-          <a:ln>
-            <a:noFill/>
-          </a:ln>
-          <a:effectLst/>
-        </p:spPr>
-        <p:style>
-          <a:lnRef idx="1">
-            <a:schemeClr val="accent1"/>
-          </a:lnRef>
-          <a:fillRef idx="3">
-            <a:schemeClr val="accent1"/>
-          </a:fillRef>
-          <a:effectRef idx="2">
-            <a:schemeClr val="accent1"/>
-          </a:effectRef>
-          <a:fontRef idx="minor">
-            <a:schemeClr val="lt1"/>
-          </a:fontRef>
-        </p:style>
-        <p:txBody>
-          <a:bodyPr rtlCol="0" anchor="ctr" lIns="0" rIns="0" tIns="0" bIns="0"/>
-          <a:lstStyle/>
-          <a:p>
-            <a:pPr algn="ctr"/>
-            <a:r>
-              <a:rPr sz="1300" b="1">
-                <a:solidFill>
-                  <a:srgbClr val="FFFFFF"/>
-                </a:solidFill>
-                <a:latin typeface="Calibri"/>
-              </a:rPr>
-              <a:t>4</a:t>
-            </a:r>
-          </a:p>
-        </p:txBody>
-      </p:sp>
-      <p:sp>
-        <p:nvSpPr>
-          <p:cNvPr id="16" name="TextBox 15"/>
-          <p:cNvSpPr txBox="1"/>
-          <p:nvPr/>
-        </p:nvSpPr>
-        <p:spPr>
-          <a:xfrm>
-            <a:off x="1143000" y="5175504"/>
-            <a:ext cx="5943600" cy="868680"/>
-          </a:xfrm>
-          <a:prstGeom prst="rect">
-            <a:avLst/>
-          </a:prstGeom>
-          <a:noFill/>
-        </p:spPr>
-        <p:txBody>
-          <a:bodyPr wrap="square" anchor="ctr" lIns="0" rIns="0" tIns="0" bIns="0"/>
-          <a:lstStyle/>
-          <a:p>
-            <a:pPr algn="l"/>
-            <a:r>
-              <a:rPr sz="1700" b="0" i="0">
-                <a:solidFill>
-                  <a:srgbClr val="202122"/>
-                </a:solidFill>
-                <a:latin typeface="Calibri"/>
-              </a:rPr>
-              <a:t>Suggest what the app should do if packets are lost.</a:t>
-            </a:r>
-          </a:p>
-        </p:txBody>
-      </p:sp>
-      <p:sp>
-        <p:nvSpPr>
-          <p:cNvPr id="17" name="Rounded Rectangle 16"/>
-          <p:cNvSpPr/>
-          <p:nvPr/>
-        </p:nvSpPr>
-        <p:spPr>
-          <a:xfrm>
-            <a:off x="7772400" y="1508760"/>
-            <a:ext cx="3867912" cy="4572000"/>
-          </a:xfrm>
-          <a:prstGeom prst="roundRect">
-            <a:avLst>
-              <a:gd name="adj" fmla="val 8000"/>
-            </a:avLst>
-          </a:prstGeom>
-          <a:solidFill>
-            <a:srgbClr val="EAF3FF"/>
-          </a:solidFill>
-          <a:ln>
-            <a:noFill/>
-          </a:ln>
-          <a:effectLst/>
-        </p:spPr>
-        <p:style>
-          <a:lnRef idx="1">
-            <a:schemeClr val="accent1"/>
-          </a:lnRef>
-          <a:fillRef idx="3">
-            <a:schemeClr val="accent1"/>
-          </a:fillRef>
-          <a:effectRef idx="2">
-            <a:schemeClr val="accent1"/>
-          </a:effectRef>
-          <a:fontRef idx="minor">
-            <a:schemeClr val="lt1"/>
-          </a:fontRef>
-        </p:style>
-        <p:txBody>
-          <a:bodyPr rtlCol="0" anchor="ctr"/>
-          <a:lstStyle/>
-          <a:p/>
-        </p:txBody>
-      </p:sp>
-      <p:sp>
-        <p:nvSpPr>
-          <p:cNvPr id="18" name="TextBox 17"/>
-          <p:cNvSpPr txBox="1"/>
-          <p:nvPr/>
-        </p:nvSpPr>
-        <p:spPr>
-          <a:xfrm>
-            <a:off x="8046720" y="1737360"/>
-            <a:ext cx="3291840" cy="365760"/>
-          </a:xfrm>
-          <a:prstGeom prst="rect">
-            <a:avLst/>
-          </a:prstGeom>
-          <a:noFill/>
-        </p:spPr>
-        <p:txBody>
-          <a:bodyPr wrap="square" anchor="t" lIns="0" rIns="0" tIns="0" bIns="0"/>
-          <a:lstStyle/>
-          <a:p>
-            <a:pPr algn="l"/>
-            <a:r>
-              <a:rPr sz="1300" b="1" i="0">
-                <a:solidFill>
-                  <a:srgbClr val="0645AD"/>
-                </a:solidFill>
-                <a:latin typeface="Calibri"/>
-              </a:rPr>
-              <a:t>SUCCESS CRITERIA</a:t>
-            </a:r>
-          </a:p>
-        </p:txBody>
-      </p:sp>
-      <p:sp>
-        <p:nvSpPr>
-          <p:cNvPr id="19" name="TextBox 18"/>
-          <p:cNvSpPr txBox="1"/>
-          <p:nvPr/>
-        </p:nvSpPr>
-        <p:spPr>
-          <a:xfrm>
-            <a:off x="8046720" y="2240280"/>
-            <a:ext cx="3337560" cy="3657600"/>
-          </a:xfrm>
-          <a:prstGeom prst="rect">
-            <a:avLst/>
-          </a:prstGeom>
-          <a:noFill/>
-        </p:spPr>
-        <p:txBody>
-          <a:bodyPr wrap="square" lIns="0" rIns="0" tIns="0" bIns="0">
-            <a:spAutoFit/>
-          </a:bodyPr>
-          <a:lstStyle/>
-          <a:p>
-            <a:pPr marL="274320" indent="-274320">
-              <a:spcAft>
-                <a:spcPts val="810"/>
-              </a:spcAft>
-              <a:buClr>
-                <a:srgbClr val="0645AD"/>
-              </a:buClr>
-              <a:buFont typeface="Arial"/>
-              <a:buChar char="•"/>
-            </a:pPr>
-            <a:r>
-              <a:rPr sz="1800" b="0">
-                <a:solidFill>
-                  <a:srgbClr val="202122"/>
-                </a:solidFill>
-                <a:latin typeface="Calibri"/>
-              </a:rPr>
-              <a:t>DNS lookup included</a:t>
-            </a:r>
-          </a:p>
-          <a:p>
-            <a:pPr marL="274320" indent="-274320">
-              <a:spcAft>
-                <a:spcPts val="810"/>
-              </a:spcAft>
-              <a:buClr>
-                <a:srgbClr val="0645AD"/>
-              </a:buClr>
-              <a:buFont typeface="Arial"/>
-              <a:buChar char="•"/>
-            </a:pPr>
-            <a:r>
-              <a:rPr sz="1800" b="0">
-                <a:solidFill>
-                  <a:srgbClr val="202122"/>
-                </a:solidFill>
-                <a:latin typeface="Calibri"/>
-              </a:rPr>
-              <a:t>Layers in the right order</a:t>
-            </a:r>
-          </a:p>
-          <a:p>
-            <a:pPr marL="274320" indent="-274320">
-              <a:spcAft>
-                <a:spcPts val="810"/>
-              </a:spcAft>
-              <a:buClr>
-                <a:srgbClr val="0645AD"/>
-              </a:buClr>
-              <a:buFont typeface="Arial"/>
-              <a:buChar char="•"/>
-            </a:pPr>
-            <a:r>
-              <a:rPr sz="1800" b="0">
-                <a:solidFill>
-                  <a:srgbClr val="202122"/>
-                </a:solidFill>
-                <a:latin typeface="Calibri"/>
-              </a:rPr>
-              <a:t>Sensible error handling</a:t>
+              <a:rPr sz="1300" b="0" i="1">
+                <a:solidFill>
+                  <a:srgbClr val="54595D"/>
+                </a:solidFill>
+                <a:latin typeface="Calibri"/>
+              </a:rPr>
+              <a:t>Answer on mini whiteboards or in your book. Answers are in the speaker notes.</a:t>
             </a:r>
           </a:p>
         </p:txBody>
